--- a/labs/lab06-multi-agent/presentation/Lab06-Agent-Memory-Strategies.pptx
+++ b/labs/lab06-multi-agent/presentation/Lab06-Agent-Memory-Strategies.pptx
@@ -664,7 +664,7 @@
           <a:lstStyle/>
           <a:p>
             <a:r>
-              <a:t>One flag, four backends, ONE interface behind them (IMemoryStore). Be honest about status: off, LOCAL, and COSMOS are built and verified live today (Cosmos is keyless — Entra RBAC, serverless). FOUNDRY-managed is designed and wired to the same interface but not yet demoable end-to-end — it's the remaining roadmap item on the next slide. The value of the interface is exactly this: moving from a file to Cosmos to Foundry-managed is a store swap, not an app rewrite. The banner always prints the TRUTHFUL backend it actually used — so it never claims Cosmos when it's really writing a local file.</a:t>
+              <a:t>One flag, four modes — but TWO memory models, and be precise about the difference. BYO (local + cosmos) is the app owning memory behind one IMemoryStore contract: recall→inject a preamble into the five specialists, compact→save after — and local↔cosmos is a true store swap. FOUNDRY is the MANAGED tier and does NOT use IMemoryStore: it attaches a FoundryMemoryProvider to a SINGLE agent + session and the platform extracts, embeds, and recalls automatically, so --memory foundry runs a dedicated single-agent demo. All four are verified live now (Cosmos keyless — Entra RBAC, serverless; Foundry needs an embedding deploy + preview + a managed-identity role grant). The banner always prints the TRUTHFUL backend it actually used.</a:t>
             </a:r>
           </a:p>
         </p:txBody>
@@ -734,7 +734,7 @@
           <a:lstStyle/>
           <a:p>
             <a:r>
-              <a:t>Where this goes next — and the point is that each step is a STORE SWAP, not a rewrite, because everything hangs off the same IMemoryStore contract and the same recall/record seams. Cosmos is DONE and verified live: same BYO code, partition by /userId, keyless (Entra RBAC), serverless, with a one-command provision script. Foundry-managed is the remaining step — hand the whole job to the platform: attach a memory tool, scope by user; needs an embedding deployment and preview. And the shared AI Search knowledge tier reuses Lab 03. Foundry + AI Search are mark-as: verify against your own resource, not verified on stage today.</a:t>
+              <a:t>Where this goes. BYO first: local→Cosmos is a pure STORE SWAP — same IMemoryStore contract, same recall/record seams, partition by /userId, keyless (Entra RBAC), serverless, one-command provision. Foundry-managed is the MANAGED tier — NOT a store swap: you hand the job to the platform (attach the provider, scope by user; it extracts, embeds, recalls). It's now verified live end-to-end — it needs an embedding deployment, memory preview, and a managed-identity role grant (provision-foundry-memory.ps1). The forward-looking item is the shared AI Search knowledge tier (reuses Lab 03) + Python parity — verify those against your own resource.</a:t>
             </a:r>
           </a:p>
         </p:txBody>
@@ -874,7 +874,7 @@
           <a:lstStyle/>
           <a:p>
             <a:r>
-              <a:t>Land it. Memory didn't require re-architecting the team — it rode the seams orchestration already gave us. Local and Cosmos are real and run today; Foundry-managed is the next step and is already wired to the same interface. Close with what's next and hand back to Q&amp;A. Repo + contact on screen.</a:t>
+              <a:t>Land it. Memory didn't require re-architecting the team — the BYO tiers rode the seams orchestration already gave us, and the managed tier is a faithful single-agent demo of platform-owned memory. All three run today. The forward-looking item is the shared knowledge tier + Python parity. Close with what's next and hand back to Q&amp;A. Repo + contact on screen.</a:t>
             </a:r>
           </a:p>
         </p:txBody>
@@ -944,7 +944,7 @@
           <a:lstStyle/>
           <a:p>
             <a:r>
-              <a:t>Roadmap for the follow-up. Recap is deliberately short — two slides — because the ask this session is MEMORY. Spend the bulk on the tiers, the diff (what changed in the code), and the live off-vs-local demo. Cosmos is now verified live too; the remaining roadmap item is Foundry-managed memory + the shared knowledge tier.</a:t>
+              <a:t>Roadmap for the follow-up. Recap is deliberately short — two slides — because the ask this session is MEMORY. Spend the bulk on the tiers, the diff (what changed in the code), and the live off-vs-local demo. All three memory tiers — local, cosmos, and Foundry-managed — are now verified live; the remaining roadmap item is the shared knowledge (AI Search) tier + Python parity.</a:t>
             </a:r>
           </a:p>
         </p:txBody>
@@ -4644,7 +4644,7 @@
                 </a:solidFill>
                 <a:latin typeface="Segoe UI"/>
               </a:rPr>
-              <a:t>Managed vs. bring-your-own   ·   compaction &amp; recall   ·   --memory local, live on Foundry</a:t>
+              <a:t>Managed vs. bring-your-own   ·   compaction &amp; recall   ·   local, cosmos, foundry — all live</a:t>
             </a:r>
           </a:p>
         </p:txBody>
@@ -6798,7 +6798,7 @@
                 </a:solidFill>
                 <a:latin typeface="Segoe UI"/>
               </a:rPr>
-              <a:t>--memory: four modes, one interface</a:t>
+              <a:t>--memory: four modes, two memory models</a:t>
             </a:r>
           </a:p>
         </p:txBody>
@@ -6859,7 +6859,7 @@
                 </a:solidFill>
                 <a:latin typeface="Segoe UI"/>
               </a:rPr>
-              <a:t>✓  local —  BYO file store, no Azure  —  verified live today</a:t>
+              <a:t>✓  local —  BYO file store, no Azure  —  verified live</a:t>
             </a:r>
           </a:p>
           <a:p>
@@ -6878,9 +6878,51 @@
                 </a:solidFill>
                 <a:latin typeface="Segoe UI"/>
               </a:rPr>
-              <a:t>✓  cosmos —  BYO managed store (Cosmos DB)  —  verified live today</a:t>
-            </a:r>
-          </a:p>
+              <a:t>✓  cosmos —  BYO managed store (Cosmos DB)  —  verified live</a:t>
+            </a:r>
+          </a:p>
+          <a:p>
+            <a:pPr algn="l">
+              <a:spcBef>
+                <a:spcPts val="0"/>
+              </a:spcBef>
+              <a:spcAft>
+                <a:spcPts val="500"/>
+              </a:spcAft>
+            </a:pPr>
+            <a:r>
+              <a:rPr sz="1800" b="0" i="0">
+                <a:solidFill>
+                  <a:srgbClr val="107C10"/>
+                </a:solidFill>
+                <a:latin typeface="Segoe UI"/>
+              </a:rPr>
+              <a:t>✓  foundry — platform-managed Memory (preview)  —  verified live</a:t>
+            </a:r>
+          </a:p>
+        </p:txBody>
+      </p:sp>
+      <p:sp>
+        <p:nvSpPr>
+          <p:cNvPr id="7" name="TextBox 6"/>
+          <p:cNvSpPr txBox="1"/>
+          <p:nvPr/>
+        </p:nvSpPr>
+        <p:spPr>
+          <a:xfrm>
+            <a:off x="5989320" y="1325880"/>
+            <a:ext cx="5212080" cy="4572000"/>
+          </a:xfrm>
+          <a:prstGeom prst="rect">
+            <a:avLst/>
+          </a:prstGeom>
+          <a:noFill/>
+        </p:spPr>
+        <p:txBody>
+          <a:bodyPr wrap="square" anchor="t" lIns="0" rIns="0" tIns="0" bIns="0">
+            <a:spAutoFit/>
+          </a:bodyPr>
+          <a:lstStyle/>
           <a:p>
             <a:pPr algn="l">
               <a:spcBef>
@@ -6897,32 +6939,47 @@
                 </a:solidFill>
                 <a:latin typeface="Segoe UI"/>
               </a:rPr>
-              <a:t>■  foundry — platform-managed Memory (preview)  —  next</a:t>
-            </a:r>
-          </a:p>
-        </p:txBody>
-      </p:sp>
-      <p:sp>
-        <p:nvSpPr>
-          <p:cNvPr id="7" name="TextBox 6"/>
-          <p:cNvSpPr txBox="1"/>
-          <p:nvPr/>
-        </p:nvSpPr>
-        <p:spPr>
-          <a:xfrm>
-            <a:off x="5989320" y="1325880"/>
-            <a:ext cx="5212080" cy="4572000"/>
-          </a:xfrm>
-          <a:prstGeom prst="rect">
-            <a:avLst/>
-          </a:prstGeom>
-          <a:noFill/>
-        </p:spPr>
-        <p:txBody>
-          <a:bodyPr wrap="square" anchor="t" lIns="0" rIns="0" tIns="0" bIns="0">
-            <a:spAutoFit/>
-          </a:bodyPr>
-          <a:lstStyle/>
+              <a:t>■  BYO tiers (local + cosmos)</a:t>
+            </a:r>
+          </a:p>
+          <a:p>
+            <a:pPr algn="l">
+              <a:spcBef>
+                <a:spcPts val="0"/>
+              </a:spcBef>
+              <a:spcAft>
+                <a:spcPts val="300"/>
+              </a:spcAft>
+            </a:pPr>
+            <a:r>
+              <a:rPr sz="1500" b="0" i="0">
+                <a:solidFill>
+                  <a:srgbClr val="201F1E"/>
+                </a:solidFill>
+                <a:latin typeface="Segoe UI"/>
+              </a:rPr>
+              <a:t>–  One contract: IMemoryStore — Load / Save / Describe</a:t>
+            </a:r>
+          </a:p>
+          <a:p>
+            <a:pPr algn="l">
+              <a:spcBef>
+                <a:spcPts val="0"/>
+              </a:spcBef>
+              <a:spcAft>
+                <a:spcPts val="300"/>
+              </a:spcAft>
+            </a:pPr>
+            <a:r>
+              <a:rPr sz="1500" b="0" i="0">
+                <a:solidFill>
+                  <a:srgbClr val="201F1E"/>
+                </a:solidFill>
+                <a:latin typeface="Segoe UI"/>
+              </a:rPr>
+              <a:t>–  Swap the store — app, agents, and workflow stay identical</a:t>
+            </a:r>
+          </a:p>
           <a:p>
             <a:pPr algn="l">
               <a:spcBef>
@@ -6939,7 +6996,7 @@
                 </a:solidFill>
                 <a:latin typeface="Segoe UI"/>
               </a:rPr>
-              <a:t>■  One contract behind all four</a:t>
+              <a:t>■  Managed tier (foundry)</a:t>
             </a:r>
           </a:p>
           <a:p>
@@ -6958,26 +7015,7 @@
                 </a:solidFill>
                 <a:latin typeface="Segoe UI"/>
               </a:rPr>
-              <a:t>–  IMemoryStore: Load / Save / Describe</a:t>
-            </a:r>
-          </a:p>
-          <a:p>
-            <a:pPr algn="l">
-              <a:spcBef>
-                <a:spcPts val="0"/>
-              </a:spcBef>
-              <a:spcAft>
-                <a:spcPts val="300"/>
-              </a:spcAft>
-            </a:pPr>
-            <a:r>
-              <a:rPr sz="1500" b="0" i="0">
-                <a:solidFill>
-                  <a:srgbClr val="201F1E"/>
-                </a:solidFill>
-                <a:latin typeface="Segoe UI"/>
-              </a:rPr>
-              <a:t>–  Swap the store — the app, agents, and demo stay identical</a:t>
+              <a:t>–  FoundryMemoryProvider on a single agent + session — platform extracts/embeds/recalls</a:t>
             </a:r>
           </a:p>
           <a:p>
@@ -6996,45 +7034,7 @@
                 </a:solidFill>
                 <a:latin typeface="Segoe UI"/>
               </a:rPr>
-              <a:t>✓  Honest status banner</a:t>
-            </a:r>
-          </a:p>
-          <a:p>
-            <a:pPr algn="l">
-              <a:spcBef>
-                <a:spcPts val="0"/>
-              </a:spcBef>
-              <a:spcAft>
-                <a:spcPts val="300"/>
-              </a:spcAft>
-            </a:pPr>
-            <a:r>
-              <a:rPr sz="1500" b="0" i="0">
-                <a:solidFill>
-                  <a:srgbClr val="201F1E"/>
-                </a:solidFill>
-                <a:latin typeface="Segoe UI"/>
-              </a:rPr>
-              <a:t>–  Prints the backend it truly used, never the raw mode word</a:t>
-            </a:r>
-          </a:p>
-          <a:p>
-            <a:pPr algn="l">
-              <a:spcBef>
-                <a:spcPts val="0"/>
-              </a:spcBef>
-              <a:spcAft>
-                <a:spcPts val="500"/>
-              </a:spcAft>
-            </a:pPr>
-            <a:r>
-              <a:rPr sz="1800" b="0" i="0">
-                <a:solidFill>
-                  <a:srgbClr val="107C10"/>
-                </a:solidFill>
-                <a:latin typeface="Segoe UI"/>
-              </a:rPr>
-              <a:t>✓  Today: off + local + cosmos verified · foundry designed</a:t>
+              <a:t>✓  Honest status banner — prints the backend it truly used</a:t>
             </a:r>
           </a:p>
         </p:txBody>
@@ -7613,7 +7613,7 @@
                 </a:solidFill>
                 <a:latin typeface="Segoe UI"/>
               </a:rPr>
-              <a:t>(managed)</a:t>
+              <a:t>(managed, done)</a:t>
             </a:r>
           </a:p>
         </p:txBody>
@@ -7724,7 +7724,7 @@
                 </a:solidFill>
                 <a:latin typeface="Segoe UI"/>
               </a:rPr>
-              <a:t>(knowledge)</a:t>
+              <a:t>(next)</a:t>
             </a:r>
           </a:p>
         </p:txBody>
@@ -7759,7 +7759,7 @@
                 </a:solidFill>
                 <a:latin typeface="Segoe UI"/>
               </a:rPr>
-              <a:t>Same seams, richer stores — each arrow is a store swap, not an app rewrite</a:t>
+              <a:t>BYO swaps behind one interface · managed is the platform-owned tier · knowledge is next</a:t>
             </a:r>
           </a:p>
         </p:txBody>
@@ -7807,20 +7807,20 @@
           <a:p>
             <a:pPr algn="l">
               <a:spcBef>
-                <a:spcPts val="400"/>
+                <a:spcPts val="0"/>
               </a:spcBef>
               <a:spcAft>
                 <a:spcPts val="500"/>
               </a:spcAft>
             </a:pPr>
             <a:r>
-              <a:rPr sz="1800" b="1" i="0">
-                <a:solidFill>
-                  <a:srgbClr val="243A5E"/>
-                </a:solidFill>
-                <a:latin typeface="Segoe UI"/>
-              </a:rPr>
-              <a:t>■  Foundry Memory (next): attach memory tool, scope by user · needs embedding deploy + preview enabled</a:t>
+              <a:rPr sz="1800" b="0" i="0">
+                <a:solidFill>
+                  <a:srgbClr val="107C10"/>
+                </a:solidFill>
+                <a:latin typeface="Segoe UI"/>
+              </a:rPr>
+              <a:t>✓  Foundry Memory (done): managed provider, scope by user · embedding deploy + preview + MI role · provision-foundry-memory.ps1</a:t>
             </a:r>
           </a:p>
           <a:p>
@@ -8773,7 +8773,7 @@
                 </a:solidFill>
                 <a:latin typeface="Segoe UI"/>
               </a:rPr>
-              <a:t>✓  --memory local + cosmos verified live · Foundry-managed designed to the same interface</a:t>
+              <a:t>✓  All three tiers verified live — local + cosmos (BYO) and foundry (platform-managed)</a:t>
             </a:r>
           </a:p>
           <a:p>
@@ -8811,7 +8811,7 @@
                 </a:solidFill>
                 <a:latin typeface="Segoe UI"/>
               </a:rPr>
-              <a:t>✓  New memory tier + Cosmos IaC — no agent or workflow rewrites</a:t>
+              <a:t>✓  New memory tiers + IaC (Cosmos + Foundry role grant) — no agent or workflow rewrites</a:t>
             </a:r>
           </a:p>
         </p:txBody>
@@ -8891,7 +8891,7 @@
                 </a:solidFill>
                 <a:latin typeface="Segoe UI"/>
               </a:rPr>
-              <a:t>–  Foundry-managed Memory (embedding deploy + preview)</a:t>
+              <a:t>–  Foundry-managed Memory — done (embedding + preview + MI role)</a:t>
             </a:r>
           </a:p>
           <a:p>
@@ -9413,7 +9413,7 @@
                 </a:solidFill>
                 <a:latin typeface="Segoe UI"/>
               </a:rPr>
-              <a:t>■  Roadmap — Foundry-managed Memory + shared knowledge search (Cosmos now live)</a:t>
+              <a:t>■  Managed tier + roadmap — Foundry-managed Memory (live) · shared knowledge search (next)</a:t>
             </a:r>
           </a:p>
         </p:txBody>

--- a/labs/lab06-multi-agent/presentation/Lab06-Agent-Memory-Strategies.pptx
+++ b/labs/lab06-multi-agent/presentation/Lab06-Agent-Memory-Strategies.pptx
@@ -22,6 +22,9 @@
     <p:sldId id="270" r:id="rId22"/>
     <p:sldId id="271" r:id="rId23"/>
     <p:sldId id="272" r:id="rId24"/>
+    <p:sldId id="273" r:id="rId25"/>
+    <p:sldId id="274" r:id="rId26"/>
+    <p:sldId id="275" r:id="rId27"/>
   </p:sldIdLst>
   <p:sldSz cx="12192000" cy="6858000" type="screen4x3"/>
   <p:notesSz cx="6858000" cy="9144000"/>
@@ -588,13 +591,7 @@
           <a:lstStyle/>
           <a:p>
             <a:r>
-              <a:t>The payoff — and it fixes the thing that used to look flat. Earlier drafts ran the SAME fully detailed request each time, so both runs looked identical: the prompt already carried every number, so recall had nothing to add. Instead, SEED run 1 with the detailed loan request — it saves the facts. Run 2 asks a follow-up that says ‘finalize the loan we discussed’ and deliberately omits the numbers. With --memory local the team walks in already knowing — $25,000, 60-month term, 4.99% — and finalizes it. Run 3 is the SAME follow-up with --memory off: the team has no record and has to ask you to re-supply the amount, term, and rate. Same question, opposite behavior — memory is the only thing that changed. Ask only for amount, term, and rate; those are stored deterministically, so recall is stable on stage.</a:t>
-            </a:r>
-          </a:p>
-          <a:p/>
-          <a:p>
-            <a:r>
-              <a:t>DEMO TO RUN — Memory that changes behavior. cd labs/lab06-multi-agent/src-dotnet/BankingConcierge. Preflight: az login to the RIGHT subscription (the one with your Foundry resource); warm tokens (az account get-access-token --resource https://cognitiveservices.azure.com and .../ai.azure.com); $env:FOUNDRY_PROJECT_ENDPOINT / FOUNDRY_MODEL; $env:DOTNET_ROLL_FORWARD='LatestMajor'. SEED: dotnet run --no-build -- --pattern sequential --memory local --customer CUST-2001 --task 'I would like a $25,000 auto loan for 60 months. Please prepare an offer with the required disclosures.'  Then set $fu='Please finalize the loan we discussed earlier and restate its amount, term, and rate before you send the disclosures.' and run it TWICE: --memory local (team recalls $25,000 / 60-mo / 4.99%), then the SAME $fu with --memory off (team asks you to re-supply the details). Optionally: Get-Content .memory/CUST-2001.json to show the compacted record.</a:t>
+              <a:t>The seam that makes local and cosmos interchangeable. Everything hangs off IMemoryStore -- Load, Save, Describe. CreateStore is the ENTIRE difference between the two BYO tiers: ask Cosmos for a store from the environment (keyless, Entra RBAC); if it isn't configured, say so out loud and fall back to a local JSON file. Same interface, different backend -- a store swap, not a rewrite. Describe() feeds the honest banner so we never claim a store we didn't use.</a:t>
             </a:r>
           </a:p>
         </p:txBody>
@@ -664,7 +661,7 @@
           <a:lstStyle/>
           <a:p>
             <a:r>
-              <a:t>One flag, four modes — but TWO memory models, and be precise about the difference. BYO (local + cosmos) is the app owning memory behind one IMemoryStore contract: recall→inject a preamble into the five specialists, compact→save after — and local↔cosmos is a true store swap. FOUNDRY is the MANAGED tier and does NOT use IMemoryStore: it attaches a FoundryMemoryProvider to a SINGLE agent + session and the platform extracts, embeds, and recalls automatically, so --memory foundry runs a dedicated single-agent demo. All four are verified live now (Cosmos keyless — Entra RBAC, serverless; Foundry needs an embedding deploy + preview + a managed-identity role grant). The banner always prints the TRUTHFUL backend it actually used.</a:t>
+              <a:t>The two lifecycle moments every memory system needs, and both reuse the Skills seam. RECALL runs before the workflow: load the customer's compacted record and turn it into a short preamble. Then Build() injects that preamble into every specialist's instructions -- the exact same injection point the SKILL.md rules use, which is why no agent changed. RECORD runs after: the Compactor distills the new turns to { summary, facts, decisions, pending } and saves. Scope is the customerId, not the thread.</a:t>
             </a:r>
           </a:p>
         </p:txBody>
@@ -734,7 +731,7 @@
           <a:lstStyle/>
           <a:p>
             <a:r>
-              <a:t>Where this goes. BYO first: local→Cosmos is a pure STORE SWAP — same IMemoryStore contract, same recall/record seams, partition by /userId, keyless (Entra RBAC), serverless, one-command provision. Foundry-managed is the MANAGED tier — NOT a store swap: you hand the job to the platform (attach the provider, scope by user; it extracts, embeds, recalls). It's now verified live end-to-end — it needs an embedding deployment, memory preview, and a managed-identity role grant (provision-foundry-memory.ps1). The forward-looking item is the shared AI Search knowledge tier (reuses Lab 03) + Python parity — verify those against your own resource.</a:t>
+              <a:t>The managed tier, and it is deliberately a DIFFERENT shape. There is no IMemoryStore here -- you attach a FoundryMemoryProvider as an AIContextProvider on a SINGLE agent + session, scoped by the customerId, and the platform extracts, embeds, stores, and recalls automatically. That is why --memory foundry runs one concierge agent, not the five-agent workflow. Two honesty notes for the room: extraction is async (WhenUpdatesCompletedAsync), and on a brand-new scope server-side indexing lags -- so pre-seed, then the re-run recalls. Preview needs a chat AND an embedding deployment plus the memory preview.</a:t>
             </a:r>
           </a:p>
         </p:txBody>
@@ -804,7 +801,13 @@
           <a:lstStyle/>
           <a:p>
             <a:r>
-              <a:t>Generalize past this lab. Five rules that travel to any agent app. Memory is cross-cutting — keep it out of the agents. Use the right tier per kind of memory. Compact to a structured shape, never a raw log. Scope by user and keep that separate from the thread. Store decisions and facts — not a pile of PII — and default memory OFF so it's an explicit, auditable choice. All public-doc-aligned; no customer specifics.</a:t>
+              <a:t>The payoff — and it fixes the thing that used to look flat. Earlier drafts ran the SAME fully detailed request each time, so both runs looked identical: the prompt already carried every number, so recall had nothing to add. Instead, SEED run 1 with the detailed loan request — it saves the facts. Run 2 asks a follow-up that says ‘finalize the loan we discussed’ and deliberately omits the numbers. With --memory local the team walks in already knowing — $25,000, 60-month term, 4.99% — and finalizes it. Run 3 is the SAME follow-up with --memory off: the team has no record and has to ask you to re-supply the amount, term, and rate. Same question, opposite behavior — memory is the only thing that changed. Ask only for amount, term, and rate; those are stored deterministically, so recall is stable on stage.</a:t>
+            </a:r>
+          </a:p>
+          <a:p/>
+          <a:p>
+            <a:r>
+              <a:t>DEMO TO RUN — Memory that changes behavior. cd labs/lab06-multi-agent/src-dotnet/BankingConcierge. Preflight: az login to the RIGHT subscription (the one with your Foundry resource); warm tokens (az account get-access-token --resource https://cognitiveservices.azure.com and .../ai.azure.com); $env:FOUNDRY_PROJECT_ENDPOINT / FOUNDRY_MODEL; $env:DOTNET_ROLL_FORWARD='LatestMajor'. SEED: dotnet run --no-build -- --pattern sequential --memory local --customer CUST-2001 --task 'I would like a $25,000 auto loan for 60 months. Please prepare an offer with the required disclosures.'  Then set $fu='Please finalize the loan we discussed earlier and restate its amount, term, and rate before you send the disclosures.' and run it TWICE: --memory local (team recalls $25,000 / 60-mo / 4.99%), then the SAME $fu with --memory off (team asks you to re-supply the details). Optionally: Get-Content .memory/CUST-2001.json to show the compacted record.</a:t>
             </a:r>
           </a:p>
         </p:txBody>
@@ -830,6 +833,216 @@
 </file>
 
 <file path=ppt/notesSlides/notesSlide14.xml><?xml version="1.0" encoding="utf-8"?>
+<p:notes xmlns:a="http://schemas.openxmlformats.org/drawingml/2006/main" xmlns:p="http://schemas.openxmlformats.org/presentationml/2006/main" xmlns:r="http://schemas.openxmlformats.org/officeDocument/2006/relationships">
+  <p:cSld>
+    <p:spTree>
+      <p:nvGrpSpPr>
+        <p:cNvPr id="1" name=""/>
+        <p:cNvGrpSpPr/>
+        <p:nvPr/>
+      </p:nvGrpSpPr>
+      <p:grpSpPr>
+        <a:xfrm>
+          <a:off x="0" y="0"/>
+          <a:ext cx="0" cy="0"/>
+          <a:chOff x="0" y="0"/>
+          <a:chExt cx="0" cy="0"/>
+        </a:xfrm>
+      </p:grpSpPr>
+      <p:sp>
+        <p:nvSpPr>
+          <p:cNvPr id="2" name="Slide Image Placeholder 1"/>
+          <p:cNvSpPr>
+            <a:spLocks noGrp="1"/>
+          </p:cNvSpPr>
+          <p:nvPr>
+            <p:ph type="sldImg" idx="2"/>
+          </p:nvPr>
+        </p:nvSpPr>
+        <p:spPr/>
+      </p:sp>
+      <p:sp>
+        <p:nvSpPr>
+          <p:cNvPr id="3" name="Notes Placeholder 2"/>
+          <p:cNvSpPr>
+            <a:spLocks noGrp="1"/>
+          </p:cNvSpPr>
+          <p:nvPr>
+            <p:ph type="body" idx="3" sz="quarter"/>
+          </p:nvPr>
+        </p:nvSpPr>
+        <p:spPr/>
+        <p:txBody>
+          <a:bodyPr/>
+          <a:lstStyle/>
+          <a:p>
+            <a:r>
+              <a:t>One flag, four modes — but TWO memory models, and be precise about the difference. BYO (local + cosmos) is the app owning memory behind one IMemoryStore contract: recall→inject a preamble into the five specialists, compact→save after — and local↔cosmos is a true store swap. FOUNDRY is the MANAGED tier and does NOT use IMemoryStore: it attaches a FoundryMemoryProvider to a SINGLE agent + session and the platform extracts, embeds, and recalls automatically, so --memory foundry runs a dedicated single-agent demo. All four are verified live now (Cosmos keyless — Entra RBAC, serverless; Foundry needs an embedding deploy + preview + a managed-identity role grant). The banner always prints the TRUTHFUL backend it actually used.</a:t>
+            </a:r>
+          </a:p>
+        </p:txBody>
+      </p:sp>
+      <p:sp>
+        <p:nvSpPr>
+          <p:cNvPr id="4" name="Slide Number Placeholder 3"/>
+          <p:cNvSpPr>
+            <a:spLocks noGrp="1"/>
+          </p:cNvSpPr>
+          <p:nvPr>
+            <p:ph type="sldNum" idx="5" sz="quarter"/>
+          </p:nvPr>
+        </p:nvSpPr>
+        <p:spPr/>
+      </p:sp>
+    </p:spTree>
+  </p:cSld>
+  <p:clrMapOvr>
+    <a:masterClrMapping/>
+  </p:clrMapOvr>
+</p:notes>
+</file>
+
+<file path=ppt/notesSlides/notesSlide15.xml><?xml version="1.0" encoding="utf-8"?>
+<p:notes xmlns:a="http://schemas.openxmlformats.org/drawingml/2006/main" xmlns:p="http://schemas.openxmlformats.org/presentationml/2006/main" xmlns:r="http://schemas.openxmlformats.org/officeDocument/2006/relationships">
+  <p:cSld>
+    <p:spTree>
+      <p:nvGrpSpPr>
+        <p:cNvPr id="1" name=""/>
+        <p:cNvGrpSpPr/>
+        <p:nvPr/>
+      </p:nvGrpSpPr>
+      <p:grpSpPr>
+        <a:xfrm>
+          <a:off x="0" y="0"/>
+          <a:ext cx="0" cy="0"/>
+          <a:chOff x="0" y="0"/>
+          <a:chExt cx="0" cy="0"/>
+        </a:xfrm>
+      </p:grpSpPr>
+      <p:sp>
+        <p:nvSpPr>
+          <p:cNvPr id="2" name="Slide Image Placeholder 1"/>
+          <p:cNvSpPr>
+            <a:spLocks noGrp="1"/>
+          </p:cNvSpPr>
+          <p:nvPr>
+            <p:ph type="sldImg" idx="2"/>
+          </p:nvPr>
+        </p:nvSpPr>
+        <p:spPr/>
+      </p:sp>
+      <p:sp>
+        <p:nvSpPr>
+          <p:cNvPr id="3" name="Notes Placeholder 2"/>
+          <p:cNvSpPr>
+            <a:spLocks noGrp="1"/>
+          </p:cNvSpPr>
+          <p:nvPr>
+            <p:ph type="body" idx="3" sz="quarter"/>
+          </p:nvPr>
+        </p:nvSpPr>
+        <p:spPr/>
+        <p:txBody>
+          <a:bodyPr/>
+          <a:lstStyle/>
+          <a:p>
+            <a:r>
+              <a:t>Where this goes. BYO first: local→Cosmos is a pure STORE SWAP — same IMemoryStore contract, same recall/record seams, partition by /userId, keyless (Entra RBAC), serverless, one-command provision. Foundry-managed is the MANAGED tier — NOT a store swap: you hand the job to the platform (attach the provider, scope by user; it extracts, embeds, recalls). It's now verified live end-to-end — it needs an embedding deployment, memory preview, and a managed-identity role grant (provision-foundry-memory.ps1). The forward-looking item is the shared AI Search knowledge tier (reuses Lab 03) + Python parity — verify those against your own resource.</a:t>
+            </a:r>
+          </a:p>
+        </p:txBody>
+      </p:sp>
+      <p:sp>
+        <p:nvSpPr>
+          <p:cNvPr id="4" name="Slide Number Placeholder 3"/>
+          <p:cNvSpPr>
+            <a:spLocks noGrp="1"/>
+          </p:cNvSpPr>
+          <p:nvPr>
+            <p:ph type="sldNum" idx="5" sz="quarter"/>
+          </p:nvPr>
+        </p:nvSpPr>
+        <p:spPr/>
+      </p:sp>
+    </p:spTree>
+  </p:cSld>
+  <p:clrMapOvr>
+    <a:masterClrMapping/>
+  </p:clrMapOvr>
+</p:notes>
+</file>
+
+<file path=ppt/notesSlides/notesSlide16.xml><?xml version="1.0" encoding="utf-8"?>
+<p:notes xmlns:a="http://schemas.openxmlformats.org/drawingml/2006/main" xmlns:p="http://schemas.openxmlformats.org/presentationml/2006/main" xmlns:r="http://schemas.openxmlformats.org/officeDocument/2006/relationships">
+  <p:cSld>
+    <p:spTree>
+      <p:nvGrpSpPr>
+        <p:cNvPr id="1" name=""/>
+        <p:cNvGrpSpPr/>
+        <p:nvPr/>
+      </p:nvGrpSpPr>
+      <p:grpSpPr>
+        <a:xfrm>
+          <a:off x="0" y="0"/>
+          <a:ext cx="0" cy="0"/>
+          <a:chOff x="0" y="0"/>
+          <a:chExt cx="0" cy="0"/>
+        </a:xfrm>
+      </p:grpSpPr>
+      <p:sp>
+        <p:nvSpPr>
+          <p:cNvPr id="2" name="Slide Image Placeholder 1"/>
+          <p:cNvSpPr>
+            <a:spLocks noGrp="1"/>
+          </p:cNvSpPr>
+          <p:nvPr>
+            <p:ph type="sldImg" idx="2"/>
+          </p:nvPr>
+        </p:nvSpPr>
+        <p:spPr/>
+      </p:sp>
+      <p:sp>
+        <p:nvSpPr>
+          <p:cNvPr id="3" name="Notes Placeholder 2"/>
+          <p:cNvSpPr>
+            <a:spLocks noGrp="1"/>
+          </p:cNvSpPr>
+          <p:nvPr>
+            <p:ph type="body" idx="3" sz="quarter"/>
+          </p:nvPr>
+        </p:nvSpPr>
+        <p:spPr/>
+        <p:txBody>
+          <a:bodyPr/>
+          <a:lstStyle/>
+          <a:p>
+            <a:r>
+              <a:t>Generalize past this lab. Five rules that travel to any agent app. Memory is cross-cutting — keep it out of the agents. Use the right tier per kind of memory. Compact to a structured shape, never a raw log. Scope by user and keep that separate from the thread. Store decisions and facts — not a pile of PII — and default memory OFF so it's an explicit, auditable choice. All public-doc-aligned; no customer specifics.</a:t>
+            </a:r>
+          </a:p>
+        </p:txBody>
+      </p:sp>
+      <p:sp>
+        <p:nvSpPr>
+          <p:cNvPr id="4" name="Slide Number Placeholder 3"/>
+          <p:cNvSpPr>
+            <a:spLocks noGrp="1"/>
+          </p:cNvSpPr>
+          <p:nvPr>
+            <p:ph type="sldNum" idx="5" sz="quarter"/>
+          </p:nvPr>
+        </p:nvSpPr>
+        <p:spPr/>
+      </p:sp>
+    </p:spTree>
+  </p:cSld>
+  <p:clrMapOvr>
+    <a:masterClrMapping/>
+  </p:clrMapOvr>
+</p:notes>
+</file>
+
+<file path=ppt/notesSlides/notesSlide17.xml><?xml version="1.0" encoding="utf-8"?>
 <p:notes xmlns:a="http://schemas.openxmlformats.org/drawingml/2006/main" xmlns:p="http://schemas.openxmlformats.org/presentationml/2006/main" xmlns:r="http://schemas.openxmlformats.org/officeDocument/2006/relationships">
   <p:cSld>
     <p:spTree>
@@ -5801,7 +6014,7 @@
         <p:spPr>
           <a:xfrm>
             <a:off x="0" y="0"/>
-            <a:ext cx="12192000" cy="6858000"/>
+            <a:ext cx="12192000" cy="1051560"/>
           </a:xfrm>
           <a:prstGeom prst="rect">
             <a:avLst/>
@@ -5844,8 +6057,8 @@
         </p:nvSpPr>
         <p:spPr>
           <a:xfrm>
-            <a:off x="502920" y="2468880"/>
-            <a:ext cx="109728" cy="1554480"/>
+            <a:off x="0" y="1051560"/>
+            <a:ext cx="12192000" cy="54864"/>
           </a:xfrm>
           <a:prstGeom prst="rect">
             <a:avLst/>
@@ -5888,8 +6101,8 @@
         </p:nvSpPr>
         <p:spPr>
           <a:xfrm>
-            <a:off x="868680" y="2331720"/>
-            <a:ext cx="2743200" cy="914400"/>
+            <a:off x="502920" y="164592"/>
+            <a:ext cx="10058400" cy="274320"/>
           </a:xfrm>
           <a:prstGeom prst="rect">
             <a:avLst/>
@@ -5904,13 +6117,13 @@
           <a:p>
             <a:pPr algn="l"/>
             <a:r>
-              <a:rPr sz="6600" b="1" i="0">
+              <a:rPr sz="1200" b="1" i="0">
                 <a:solidFill>
                   <a:srgbClr val="00B7C3"/>
                 </a:solidFill>
                 <a:latin typeface="Segoe UI"/>
               </a:rPr>
-              <a:t>02</a:t>
+              <a:t>HOW · THE CODE</a:t>
             </a:r>
           </a:p>
         </p:txBody>
@@ -5923,8 +6136,87 @@
         </p:nvSpPr>
         <p:spPr>
           <a:xfrm>
-            <a:off x="868680" y="3200400"/>
-            <a:ext cx="9601200" cy="914400"/>
+            <a:off x="502920" y="420624"/>
+            <a:ext cx="10972800" cy="566928"/>
+          </a:xfrm>
+          <a:prstGeom prst="rect">
+            <a:avLst/>
+          </a:prstGeom>
+          <a:noFill/>
+        </p:spPr>
+        <p:txBody>
+          <a:bodyPr wrap="square" anchor="ctr" lIns="0" rIns="0" tIns="0" bIns="0">
+            <a:spAutoFit/>
+          </a:bodyPr>
+          <a:lstStyle/>
+          <a:p>
+            <a:pPr algn="l"/>
+            <a:r>
+              <a:rPr sz="2600" b="1" i="0">
+                <a:solidFill>
+                  <a:srgbClr val="FFFFFF"/>
+                </a:solidFill>
+                <a:latin typeface="Segoe UI"/>
+              </a:rPr>
+              <a:t>The BYO seam — one interface, swap the store</a:t>
+            </a:r>
+          </a:p>
+        </p:txBody>
+      </p:sp>
+      <p:sp>
+        <p:nvSpPr>
+          <p:cNvPr id="6" name="Rounded Rectangle 5"/>
+          <p:cNvSpPr/>
+          <p:nvPr/>
+        </p:nvSpPr>
+        <p:spPr>
+          <a:xfrm>
+            <a:off x="502920" y="1371600"/>
+            <a:ext cx="10332720" cy="4160520"/>
+          </a:xfrm>
+          <a:prstGeom prst="roundRect">
+            <a:avLst/>
+          </a:prstGeom>
+          <a:solidFill>
+            <a:srgbClr val="1E1E1E"/>
+          </a:solidFill>
+          <a:ln>
+            <a:noFill/>
+          </a:ln>
+          <a:effectLst/>
+        </p:spPr>
+        <p:style>
+          <a:lnRef idx="1">
+            <a:schemeClr val="accent1"/>
+          </a:lnRef>
+          <a:fillRef idx="3">
+            <a:schemeClr val="accent1"/>
+          </a:fillRef>
+          <a:effectRef idx="2">
+            <a:schemeClr val="accent1"/>
+          </a:effectRef>
+          <a:fontRef idx="minor">
+            <a:schemeClr val="lt1"/>
+          </a:fontRef>
+        </p:style>
+        <p:txBody>
+          <a:bodyPr rtlCol="0" anchor="ctr"/>
+          <a:lstStyle/>
+          <a:p>
+            <a:pPr algn="ctr"/>
+          </a:p>
+        </p:txBody>
+      </p:sp>
+      <p:sp>
+        <p:nvSpPr>
+          <p:cNvPr id="7" name="TextBox 6"/>
+          <p:cNvSpPr txBox="1"/>
+          <p:nvPr/>
+        </p:nvSpPr>
+        <p:spPr>
+          <a:xfrm>
+            <a:off x="758952" y="1463040"/>
+            <a:ext cx="9875520" cy="274320"/>
           </a:xfrm>
           <a:prstGeom prst="rect">
             <a:avLst/>
@@ -5939,27 +6231,27 @@
           <a:p>
             <a:pPr algn="l"/>
             <a:r>
-              <a:rPr sz="3800" b="1" i="0">
-                <a:solidFill>
-                  <a:srgbClr val="FFFFFF"/>
-                </a:solidFill>
-                <a:latin typeface="Segoe UI"/>
-              </a:rPr>
-              <a:t>Live</a:t>
-            </a:r>
-          </a:p>
-        </p:txBody>
-      </p:sp>
-      <p:sp>
-        <p:nvSpPr>
-          <p:cNvPr id="6" name="TextBox 5"/>
+              <a:rPr sz="1200" b="1" i="0">
+                <a:solidFill>
+                  <a:srgbClr val="00B7C3"/>
+                </a:solidFill>
+                <a:latin typeface="Segoe UI"/>
+              </a:rPr>
+              <a:t>●  Memory/IMemoryStore.cs  +  MemoryManager.cs</a:t>
+            </a:r>
+          </a:p>
+        </p:txBody>
+      </p:sp>
+      <p:sp>
+        <p:nvSpPr>
+          <p:cNvPr id="8" name="TextBox 7"/>
           <p:cNvSpPr txBox="1"/>
           <p:nvPr/>
         </p:nvSpPr>
         <p:spPr>
           <a:xfrm>
-            <a:off x="896112" y="4114800"/>
-            <a:ext cx="9601200" cy="731520"/>
+            <a:off x="758952" y="1828800"/>
+            <a:ext cx="9875520" cy="3566160"/>
           </a:xfrm>
           <a:prstGeom prst="rect">
             <a:avLst/>
@@ -5972,15 +6264,456 @@
           </a:bodyPr>
           <a:lstStyle/>
           <a:p>
+            <a:pPr algn="l">
+              <a:spcAft>
+                <a:spcPts val="200"/>
+              </a:spcAft>
+            </a:pPr>
+            <a:r>
+              <a:rPr sz="1300" b="0" i="0">
+                <a:solidFill>
+                  <a:srgbClr val="6A9955"/>
+                </a:solidFill>
+                <a:latin typeface="Consolas"/>
+              </a:rPr>
+              <a:t>// local + cosmos BOTH implement this one contract.</a:t>
+            </a:r>
+          </a:p>
+          <a:p>
+            <a:pPr algn="l">
+              <a:spcAft>
+                <a:spcPts val="200"/>
+              </a:spcAft>
+            </a:pPr>
+            <a:r>
+              <a:rPr sz="1300" b="0" i="0">
+                <a:solidFill>
+                  <a:srgbClr val="DCDCDC"/>
+                </a:solidFill>
+                <a:latin typeface="Consolas"/>
+              </a:rPr>
+              <a:t>public interface IMemoryStore</a:t>
+            </a:r>
+          </a:p>
+          <a:p>
+            <a:pPr algn="l">
+              <a:spcAft>
+                <a:spcPts val="200"/>
+              </a:spcAft>
+            </a:pPr>
+            <a:r>
+              <a:rPr sz="1300" b="0" i="0">
+                <a:solidFill>
+                  <a:srgbClr val="DCDCDC"/>
+                </a:solidFill>
+                <a:latin typeface="Consolas"/>
+              </a:rPr>
+              <a:t>{</a:t>
+            </a:r>
+          </a:p>
+          <a:p>
+            <a:pPr algn="l">
+              <a:spcAft>
+                <a:spcPts val="200"/>
+              </a:spcAft>
+            </a:pPr>
+            <a:r>
+              <a:rPr sz="1300" b="0" i="0">
+                <a:solidFill>
+                  <a:srgbClr val="DCDCDC"/>
+                </a:solidFill>
+                <a:latin typeface="Consolas"/>
+              </a:rPr>
+              <a:t>    Task&lt;MemoryRecord?&gt; LoadAsync(string userId, ...);</a:t>
+            </a:r>
+          </a:p>
+          <a:p>
+            <a:pPr algn="l">
+              <a:spcAft>
+                <a:spcPts val="200"/>
+              </a:spcAft>
+            </a:pPr>
+            <a:r>
+              <a:rPr sz="1300" b="0" i="0">
+                <a:solidFill>
+                  <a:srgbClr val="DCDCDC"/>
+                </a:solidFill>
+                <a:latin typeface="Consolas"/>
+              </a:rPr>
+              <a:t>    Task SaveAsync(MemoryRecord record, ...);</a:t>
+            </a:r>
+          </a:p>
+          <a:p>
+            <a:pPr algn="l">
+              <a:spcAft>
+                <a:spcPts val="200"/>
+              </a:spcAft>
+            </a:pPr>
+            <a:r>
+              <a:rPr sz="1300" b="1" i="0">
+                <a:solidFill>
+                  <a:srgbClr val="9CDCFE"/>
+                </a:solidFill>
+                <a:latin typeface="Consolas"/>
+              </a:rPr>
+              <a:t>    string Describe();   // feeds the honest startup banner</a:t>
+            </a:r>
+          </a:p>
+          <a:p>
+            <a:pPr algn="l">
+              <a:spcAft>
+                <a:spcPts val="200"/>
+              </a:spcAft>
+            </a:pPr>
+            <a:r>
+              <a:rPr sz="1300" b="0" i="0">
+                <a:solidFill>
+                  <a:srgbClr val="DCDCDC"/>
+                </a:solidFill>
+                <a:latin typeface="Consolas"/>
+              </a:rPr>
+              <a:t>}</a:t>
+            </a:r>
+          </a:p>
+          <a:p>
+            <a:pPr algn="l">
+              <a:spcAft>
+                <a:spcPts val="200"/>
+              </a:spcAft>
+            </a:pPr>
+            <a:r>
+              <a:rPr sz="600" b="0" i="0">
+                <a:solidFill>
+                  <a:srgbClr val="DCDCDC"/>
+                </a:solidFill>
+                <a:latin typeface="Consolas"/>
+              </a:rPr>
+              <a:t> </a:t>
+            </a:r>
+          </a:p>
+          <a:p>
+            <a:pPr algn="l">
+              <a:spcAft>
+                <a:spcPts val="200"/>
+              </a:spcAft>
+            </a:pPr>
+            <a:r>
+              <a:rPr sz="1300" b="0" i="0">
+                <a:solidFill>
+                  <a:srgbClr val="6A9955"/>
+                </a:solidFill>
+                <a:latin typeface="Consolas"/>
+              </a:rPr>
+              <a:t>// The store swap: same interface, different backend.</a:t>
+            </a:r>
+          </a:p>
+          <a:p>
+            <a:pPr algn="l">
+              <a:spcAft>
+                <a:spcPts val="200"/>
+              </a:spcAft>
+            </a:pPr>
+            <a:r>
+              <a:rPr sz="1300" b="0" i="0">
+                <a:solidFill>
+                  <a:srgbClr val="DCDCDC"/>
+                </a:solidFill>
+                <a:latin typeface="Consolas"/>
+              </a:rPr>
+              <a:t>public static IMemoryStore CreateStore(string mode)</a:t>
+            </a:r>
+          </a:p>
+          <a:p>
+            <a:pPr algn="l">
+              <a:spcAft>
+                <a:spcPts val="200"/>
+              </a:spcAft>
+            </a:pPr>
+            <a:r>
+              <a:rPr sz="1300" b="0" i="0">
+                <a:solidFill>
+                  <a:srgbClr val="DCDCDC"/>
+                </a:solidFill>
+                <a:latin typeface="Consolas"/>
+              </a:rPr>
+              <a:t>{</a:t>
+            </a:r>
+          </a:p>
+          <a:p>
+            <a:pPr algn="l">
+              <a:spcAft>
+                <a:spcPts val="200"/>
+              </a:spcAft>
+            </a:pPr>
+            <a:r>
+              <a:rPr sz="1300" b="0" i="0">
+                <a:solidFill>
+                  <a:srgbClr val="DCDCDC"/>
+                </a:solidFill>
+                <a:latin typeface="Consolas"/>
+              </a:rPr>
+              <a:t>    if (mode == "cosmos")</a:t>
+            </a:r>
+          </a:p>
+          <a:p>
+            <a:pPr algn="l">
+              <a:spcAft>
+                <a:spcPts val="200"/>
+              </a:spcAft>
+            </a:pPr>
+            <a:r>
+              <a:rPr sz="1300" b="0" i="0">
+                <a:solidFill>
+                  <a:srgbClr val="DCDCDC"/>
+                </a:solidFill>
+                <a:latin typeface="Consolas"/>
+              </a:rPr>
+              <a:t>    {</a:t>
+            </a:r>
+          </a:p>
+          <a:p>
+            <a:pPr algn="l">
+              <a:spcAft>
+                <a:spcPts val="200"/>
+              </a:spcAft>
+            </a:pPr>
+            <a:r>
+              <a:rPr sz="1300" b="0" i="0">
+                <a:solidFill>
+                  <a:srgbClr val="DCDCDC"/>
+                </a:solidFill>
+                <a:latin typeface="Consolas"/>
+              </a:rPr>
+              <a:t>        var store = CosmosStore.FromEnvironment(out var why);</a:t>
+            </a:r>
+          </a:p>
+          <a:p>
+            <a:pPr algn="l">
+              <a:spcAft>
+                <a:spcPts val="200"/>
+              </a:spcAft>
+            </a:pPr>
+            <a:r>
+              <a:rPr sz="1300" b="1" i="0">
+                <a:solidFill>
+                  <a:srgbClr val="9CDCFE"/>
+                </a:solidFill>
+                <a:latin typeface="Consolas"/>
+              </a:rPr>
+              <a:t>        if (store is not null) return store;  // keyless RBAC</a:t>
+            </a:r>
+          </a:p>
+          <a:p>
+            <a:pPr algn="l">
+              <a:spcAft>
+                <a:spcPts val="200"/>
+              </a:spcAft>
+            </a:pPr>
+            <a:r>
+              <a:rPr sz="1300" b="0" i="0">
+                <a:solidFill>
+                  <a:srgbClr val="DCDCDC"/>
+                </a:solidFill>
+                <a:latin typeface="Consolas"/>
+              </a:rPr>
+              <a:t>        Console.WriteLine($"cosmos off ({why}) -&gt; local");</a:t>
+            </a:r>
+          </a:p>
+          <a:p>
+            <a:pPr algn="l">
+              <a:spcAft>
+                <a:spcPts val="200"/>
+              </a:spcAft>
+            </a:pPr>
+            <a:r>
+              <a:rPr sz="1300" b="0" i="0">
+                <a:solidFill>
+                  <a:srgbClr val="DCDCDC"/>
+                </a:solidFill>
+                <a:latin typeface="Consolas"/>
+              </a:rPr>
+              <a:t>    }</a:t>
+            </a:r>
+          </a:p>
+          <a:p>
+            <a:pPr algn="l">
+              <a:spcAft>
+                <a:spcPts val="200"/>
+              </a:spcAft>
+            </a:pPr>
+            <a:r>
+              <a:rPr sz="1300" b="1" i="0">
+                <a:solidFill>
+                  <a:srgbClr val="9CDCFE"/>
+                </a:solidFill>
+                <a:latin typeface="Consolas"/>
+              </a:rPr>
+              <a:t>    return new LocalFileStore();   // JSON on disk, no Azure</a:t>
+            </a:r>
+          </a:p>
+          <a:p>
+            <a:pPr algn="l">
+              <a:spcAft>
+                <a:spcPts val="200"/>
+              </a:spcAft>
+            </a:pPr>
+            <a:r>
+              <a:rPr sz="1300" b="0" i="0">
+                <a:solidFill>
+                  <a:srgbClr val="DCDCDC"/>
+                </a:solidFill>
+                <a:latin typeface="Consolas"/>
+              </a:rPr>
+              <a:t>}</a:t>
+            </a:r>
+          </a:p>
+        </p:txBody>
+      </p:sp>
+      <p:sp>
+        <p:nvSpPr>
+          <p:cNvPr id="9" name="TextBox 8"/>
+          <p:cNvSpPr txBox="1"/>
+          <p:nvPr/>
+        </p:nvSpPr>
+        <p:spPr>
+          <a:xfrm>
+            <a:off x="502920" y="5650992"/>
+            <a:ext cx="10332720" cy="274320"/>
+          </a:xfrm>
+          <a:prstGeom prst="rect">
+            <a:avLst/>
+          </a:prstGeom>
+          <a:noFill/>
+        </p:spPr>
+        <p:txBody>
+          <a:bodyPr wrap="square" anchor="t" lIns="0" rIns="0" tIns="0" bIns="0">
+            <a:spAutoFit/>
+          </a:bodyPr>
+          <a:lstStyle/>
+          <a:p>
             <a:pPr algn="l"/>
             <a:r>
-              <a:rPr sz="1800" b="0" i="0">
-                <a:solidFill>
-                  <a:srgbClr val="BFD7F0"/>
-                </a:solidFill>
-                <a:latin typeface="Segoe UI"/>
-              </a:rPr>
-              <a:t>Memory changes what the team can answer — seed, then follow up</a:t>
+              <a:rPr sz="1200" b="0" i="1">
+                <a:solidFill>
+                  <a:srgbClr val="605E5C"/>
+                </a:solidFill>
+                <a:latin typeface="Segoe UI"/>
+              </a:rPr>
+              <a:t>local ↔ cosmos is a store swap behind one interface — agents and workflow never change</a:t>
+            </a:r>
+          </a:p>
+        </p:txBody>
+      </p:sp>
+      <p:sp>
+        <p:nvSpPr>
+          <p:cNvPr id="10" name="Rectangle 9"/>
+          <p:cNvSpPr/>
+          <p:nvPr/>
+        </p:nvSpPr>
+        <p:spPr>
+          <a:xfrm>
+            <a:off x="0" y="6601968"/>
+            <a:ext cx="12192000" cy="256032"/>
+          </a:xfrm>
+          <a:prstGeom prst="rect">
+            <a:avLst/>
+          </a:prstGeom>
+          <a:solidFill>
+            <a:srgbClr val="F3F6FB"/>
+          </a:solidFill>
+          <a:ln>
+            <a:noFill/>
+          </a:ln>
+          <a:effectLst/>
+        </p:spPr>
+        <p:style>
+          <a:lnRef idx="1">
+            <a:schemeClr val="accent1"/>
+          </a:lnRef>
+          <a:fillRef idx="3">
+            <a:schemeClr val="accent1"/>
+          </a:fillRef>
+          <a:effectRef idx="2">
+            <a:schemeClr val="accent1"/>
+          </a:effectRef>
+          <a:fontRef idx="minor">
+            <a:schemeClr val="lt1"/>
+          </a:fontRef>
+        </p:style>
+        <p:txBody>
+          <a:bodyPr rtlCol="0" anchor="ctr"/>
+          <a:lstStyle/>
+          <a:p>
+            <a:pPr algn="ctr"/>
+          </a:p>
+        </p:txBody>
+      </p:sp>
+      <p:sp>
+        <p:nvSpPr>
+          <p:cNvPr id="11" name="TextBox 10"/>
+          <p:cNvSpPr txBox="1"/>
+          <p:nvPr/>
+        </p:nvSpPr>
+        <p:spPr>
+          <a:xfrm>
+            <a:off x="502920" y="6611112"/>
+            <a:ext cx="8229600" cy="228600"/>
+          </a:xfrm>
+          <a:prstGeom prst="rect">
+            <a:avLst/>
+          </a:prstGeom>
+          <a:noFill/>
+        </p:spPr>
+        <p:txBody>
+          <a:bodyPr wrap="square" anchor="ctr" lIns="0" rIns="0" tIns="0" bIns="0">
+            <a:spAutoFit/>
+          </a:bodyPr>
+          <a:lstStyle/>
+          <a:p>
+            <a:pPr algn="l"/>
+            <a:r>
+              <a:rPr sz="900" b="0" i="0">
+                <a:solidFill>
+                  <a:srgbClr val="605E5C"/>
+                </a:solidFill>
+                <a:latin typeface="Segoe UI"/>
+              </a:rPr>
+              <a:t>Agent Modernization Workshops — Lab 06: Agent Memory Strategies   |   How · the code</a:t>
+            </a:r>
+          </a:p>
+        </p:txBody>
+      </p:sp>
+      <p:sp>
+        <p:nvSpPr>
+          <p:cNvPr id="12" name="TextBox 11"/>
+          <p:cNvSpPr txBox="1"/>
+          <p:nvPr/>
+        </p:nvSpPr>
+        <p:spPr>
+          <a:xfrm>
+            <a:off x="11003280" y="6611112"/>
+            <a:ext cx="731520" cy="228600"/>
+          </a:xfrm>
+          <a:prstGeom prst="rect">
+            <a:avLst/>
+          </a:prstGeom>
+          <a:noFill/>
+        </p:spPr>
+        <p:txBody>
+          <a:bodyPr wrap="square" anchor="ctr" lIns="0" rIns="0" tIns="0" bIns="0">
+            <a:spAutoFit/>
+          </a:bodyPr>
+          <a:lstStyle/>
+          <a:p>
+            <a:pPr algn="r"/>
+            <a:r>
+              <a:rPr sz="900" b="1" i="0">
+                <a:solidFill>
+                  <a:srgbClr val="605E5C"/>
+                </a:solidFill>
+                <a:latin typeface="Segoe UI"/>
+              </a:rPr>
+              <a:t>12</a:t>
             </a:r>
           </a:p>
         </p:txBody>
@@ -6121,7 +6854,7 @@
                 </a:solidFill>
                 <a:latin typeface="Segoe UI"/>
               </a:rPr>
-              <a:t>DEMO</a:t>
+              <a:t>HOW · THE CODE</a:t>
             </a:r>
           </a:p>
         </p:txBody>
@@ -6156,21 +6889,65 @@
                 </a:solidFill>
                 <a:latin typeface="Segoe UI"/>
               </a:rPr>
-              <a:t>The team remembers — and it shows in the answer</a:t>
-            </a:r>
-          </a:p>
-        </p:txBody>
-      </p:sp>
-      <p:sp>
-        <p:nvSpPr>
-          <p:cNvPr id="6" name="TextBox 5"/>
+              <a:t>The two hooks — recall before, record after</a:t>
+            </a:r>
+          </a:p>
+        </p:txBody>
+      </p:sp>
+      <p:sp>
+        <p:nvSpPr>
+          <p:cNvPr id="6" name="Rounded Rectangle 5"/>
+          <p:cNvSpPr/>
+          <p:nvPr/>
+        </p:nvSpPr>
+        <p:spPr>
+          <a:xfrm>
+            <a:off x="502920" y="1371600"/>
+            <a:ext cx="10332720" cy="4160520"/>
+          </a:xfrm>
+          <a:prstGeom prst="roundRect">
+            <a:avLst/>
+          </a:prstGeom>
+          <a:solidFill>
+            <a:srgbClr val="1E1E1E"/>
+          </a:solidFill>
+          <a:ln>
+            <a:noFill/>
+          </a:ln>
+          <a:effectLst/>
+        </p:spPr>
+        <p:style>
+          <a:lnRef idx="1">
+            <a:schemeClr val="accent1"/>
+          </a:lnRef>
+          <a:fillRef idx="3">
+            <a:schemeClr val="accent1"/>
+          </a:fillRef>
+          <a:effectRef idx="2">
+            <a:schemeClr val="accent1"/>
+          </a:effectRef>
+          <a:fontRef idx="minor">
+            <a:schemeClr val="lt1"/>
+          </a:fontRef>
+        </p:style>
+        <p:txBody>
+          <a:bodyPr rtlCol="0" anchor="ctr"/>
+          <a:lstStyle/>
+          <a:p>
+            <a:pPr algn="ctr"/>
+          </a:p>
+        </p:txBody>
+      </p:sp>
+      <p:sp>
+        <p:nvSpPr>
+          <p:cNvPr id="7" name="TextBox 6"/>
           <p:cNvSpPr txBox="1"/>
           <p:nvPr/>
         </p:nvSpPr>
         <p:spPr>
           <a:xfrm>
-            <a:off x="502920" y="1325880"/>
-            <a:ext cx="5212080" cy="4572000"/>
+            <a:off x="758952" y="1463040"/>
+            <a:ext cx="9875520" cy="274320"/>
           </a:xfrm>
           <a:prstGeom prst="rect">
             <a:avLst/>
@@ -6183,112 +6960,29 @@
           </a:bodyPr>
           <a:lstStyle/>
           <a:p>
-            <a:pPr algn="l">
-              <a:spcBef>
-                <a:spcPts val="400"/>
-              </a:spcBef>
-              <a:spcAft>
-                <a:spcPts val="500"/>
-              </a:spcAft>
-            </a:pPr>
-            <a:r>
-              <a:rPr sz="1800" b="1" i="0">
-                <a:solidFill>
-                  <a:srgbClr val="243A5E"/>
-                </a:solidFill>
-                <a:latin typeface="Segoe UI"/>
-              </a:rPr>
-              <a:t>■  Seed one session, then ask a follow-up that omits the details:</a:t>
-            </a:r>
-          </a:p>
-          <a:p>
-            <a:pPr algn="l">
-              <a:spcBef>
-                <a:spcPts val="0"/>
-              </a:spcBef>
-              <a:spcAft>
-                <a:spcPts val="300"/>
-              </a:spcAft>
-            </a:pPr>
-            <a:r>
-              <a:rPr sz="1500" b="0" i="0">
-                <a:solidFill>
-                  <a:srgbClr val="201F1E"/>
-                </a:solidFill>
-                <a:latin typeface="Segoe UI"/>
-              </a:rPr>
-              <a:t>–  Run 1  —  seed · --memory local  →  prepares the $25,000 / 60-mo offer, SAVES the facts</a:t>
-            </a:r>
-          </a:p>
-          <a:p>
-            <a:pPr algn="l">
-              <a:spcBef>
-                <a:spcPts val="0"/>
-              </a:spcBef>
-              <a:spcAft>
-                <a:spcPts val="300"/>
-              </a:spcAft>
-            </a:pPr>
-            <a:r>
-              <a:rPr sz="1500" b="0" i="0">
-                <a:solidFill>
-                  <a:srgbClr val="201F1E"/>
-                </a:solidFill>
-                <a:latin typeface="Segoe UI"/>
-              </a:rPr>
-              <a:t>–  Run 2  —  follow-up · --memory local  →  “finalize the loan we discussed” → recalls $25,000 · 60-mo · 4.99%</a:t>
-            </a:r>
-          </a:p>
-          <a:p>
-            <a:pPr algn="l">
-              <a:spcBef>
-                <a:spcPts val="0"/>
-              </a:spcBef>
-              <a:spcAft>
-                <a:spcPts val="300"/>
-              </a:spcAft>
-            </a:pPr>
-            <a:r>
-              <a:rPr sz="1500" b="0" i="0">
-                <a:solidFill>
-                  <a:srgbClr val="201F1E"/>
-                </a:solidFill>
-                <a:latin typeface="Segoe UI"/>
-              </a:rPr>
-              <a:t>–  Run 3  —  same follow-up · --memory off  →  “which loan? please re-supply the details”</a:t>
-            </a:r>
-          </a:p>
-          <a:p>
-            <a:pPr algn="l">
-              <a:spcBef>
-                <a:spcPts val="0"/>
-              </a:spcBef>
-              <a:spcAft>
-                <a:spcPts val="500"/>
-              </a:spcAft>
-            </a:pPr>
-            <a:r>
-              <a:rPr sz="1800" b="0" i="0">
-                <a:solidFill>
-                  <a:srgbClr val="107C10"/>
-                </a:solidFill>
-                <a:latin typeface="Segoe UI"/>
-              </a:rPr>
-              <a:t>✓  Same question — memory ON answers it, memory OFF can’t. That’s the difference</a:t>
-            </a:r>
-          </a:p>
-        </p:txBody>
-      </p:sp>
-      <p:sp>
-        <p:nvSpPr>
-          <p:cNvPr id="7" name="TextBox 6"/>
+            <a:pPr algn="l"/>
+            <a:r>
+              <a:rPr sz="1200" b="1" i="0">
+                <a:solidFill>
+                  <a:srgbClr val="00B7C3"/>
+                </a:solidFill>
+                <a:latin typeface="Segoe UI"/>
+              </a:rPr>
+              <a:t>●  MemoryManager.cs  +  Program.cs</a:t>
+            </a:r>
+          </a:p>
+        </p:txBody>
+      </p:sp>
+      <p:sp>
+        <p:nvSpPr>
+          <p:cNvPr id="8" name="TextBox 7"/>
           <p:cNvSpPr txBox="1"/>
           <p:nvPr/>
         </p:nvSpPr>
         <p:spPr>
           <a:xfrm>
-            <a:off x="5989320" y="1325880"/>
-            <a:ext cx="5212080" cy="4572000"/>
+            <a:off x="758952" y="1828800"/>
+            <a:ext cx="9875520" cy="3566160"/>
           </a:xfrm>
           <a:prstGeom prst="rect">
             <a:avLst/>
@@ -6302,104 +6996,316 @@
           <a:lstStyle/>
           <a:p>
             <a:pPr algn="l">
-              <a:spcBef>
-                <a:spcPts val="400"/>
-              </a:spcBef>
-              <a:spcAft>
-                <a:spcPts val="500"/>
-              </a:spcAft>
-            </a:pPr>
-            <a:r>
-              <a:rPr sz="1800" b="1" i="0">
-                <a:solidFill>
-                  <a:srgbClr val="243A5E"/>
-                </a:solidFill>
-                <a:latin typeface="Segoe UI"/>
-              </a:rPr>
-              <a:t>■  Point out</a:t>
-            </a:r>
-          </a:p>
-          <a:p>
-            <a:pPr algn="l">
-              <a:spcBef>
-                <a:spcPts val="0"/>
-              </a:spcBef>
-              <a:spcAft>
-                <a:spcPts val="300"/>
-              </a:spcAft>
-            </a:pPr>
-            <a:r>
-              <a:rPr sz="1500" b="0" i="0">
-                <a:solidFill>
-                  <a:srgbClr val="201F1E"/>
-                </a:solidFill>
-                <a:latin typeface="Segoe UI"/>
-              </a:rPr>
-              <a:t>–  The follow-up OMITS the numbers — that’s why recall matters</a:t>
-            </a:r>
-          </a:p>
-          <a:p>
-            <a:pPr algn="l">
-              <a:spcBef>
-                <a:spcPts val="0"/>
-              </a:spcBef>
-              <a:spcAft>
-                <a:spcPts val="300"/>
-              </a:spcAft>
-            </a:pPr>
-            <a:r>
-              <a:rPr sz="1500" b="0" i="0">
-                <a:solidFill>
-                  <a:srgbClr val="201F1E"/>
-                </a:solidFill>
-                <a:latin typeface="Segoe UI"/>
-              </a:rPr>
-              <a:t>–  Memory OFF signals absence (asks for details) — it doesn’t bluff</a:t>
-            </a:r>
-          </a:p>
-          <a:p>
-            <a:pPr algn="l">
-              <a:spcBef>
-                <a:spcPts val="0"/>
-              </a:spcBef>
-              <a:spcAft>
-                <a:spcPts val="300"/>
-              </a:spcAft>
-            </a:pPr>
-            <a:r>
-              <a:rPr sz="1500" b="0" i="0">
-                <a:solidFill>
-                  <a:srgbClr val="201F1E"/>
-                </a:solidFill>
-                <a:latin typeface="Segoe UI"/>
-              </a:rPr>
-              <a:t>–  The store is a plain JSON file under .memory/ — open it and show it</a:t>
-            </a:r>
-          </a:p>
-          <a:p>
-            <a:pPr algn="l">
-              <a:spcBef>
-                <a:spcPts val="0"/>
-              </a:spcBef>
-              <a:spcAft>
-                <a:spcPts val="500"/>
-              </a:spcAft>
-            </a:pPr>
-            <a:r>
-              <a:rPr sz="1800" b="0" i="0">
-                <a:solidFill>
-                  <a:srgbClr val="107C10"/>
-                </a:solidFill>
-                <a:latin typeface="Segoe UI"/>
-              </a:rPr>
-              <a:t>✓  Validated live — .NET on Foundry gpt-4o</a:t>
-            </a:r>
-          </a:p>
-        </p:txBody>
-      </p:sp>
-      <p:sp>
-        <p:nvSpPr>
-          <p:cNvPr id="8" name="Rectangle 7"/>
+              <a:spcAft>
+                <a:spcPts val="200"/>
+              </a:spcAft>
+            </a:pPr>
+            <a:r>
+              <a:rPr sz="1300" b="0" i="0">
+                <a:solidFill>
+                  <a:srgbClr val="6A9955"/>
+                </a:solidFill>
+                <a:latin typeface="Consolas"/>
+              </a:rPr>
+              <a:t>// BEFORE the run: load memory, build a preamble to inject.</a:t>
+            </a:r>
+          </a:p>
+          <a:p>
+            <a:pPr algn="l">
+              <a:spcAft>
+                <a:spcPts val="200"/>
+              </a:spcAft>
+            </a:pPr>
+            <a:r>
+              <a:rPr sz="1300" b="0" i="0">
+                <a:solidFill>
+                  <a:srgbClr val="DCDCDC"/>
+                </a:solidFill>
+                <a:latin typeface="Consolas"/>
+              </a:rPr>
+              <a:t>public async Task&lt;Recall&gt; RecallAsync(string userId, ...)</a:t>
+            </a:r>
+          </a:p>
+          <a:p>
+            <a:pPr algn="l">
+              <a:spcAft>
+                <a:spcPts val="200"/>
+              </a:spcAft>
+            </a:pPr>
+            <a:r>
+              <a:rPr sz="1300" b="0" i="0">
+                <a:solidFill>
+                  <a:srgbClr val="DCDCDC"/>
+                </a:solidFill>
+                <a:latin typeface="Consolas"/>
+              </a:rPr>
+              <a:t>{</a:t>
+            </a:r>
+          </a:p>
+          <a:p>
+            <a:pPr algn="l">
+              <a:spcAft>
+                <a:spcPts val="200"/>
+              </a:spcAft>
+            </a:pPr>
+            <a:r>
+              <a:rPr sz="1300" b="0" i="0">
+                <a:solidFill>
+                  <a:srgbClr val="DCDCDC"/>
+                </a:solidFill>
+                <a:latin typeface="Consolas"/>
+              </a:rPr>
+              <a:t>    var record = await _store.LoadAsync(userId, ...);</a:t>
+            </a:r>
+          </a:p>
+          <a:p>
+            <a:pPr algn="l">
+              <a:spcAft>
+                <a:spcPts val="200"/>
+              </a:spcAft>
+            </a:pPr>
+            <a:r>
+              <a:rPr sz="1300" b="0" i="0">
+                <a:solidFill>
+                  <a:srgbClr val="DCDCDC"/>
+                </a:solidFill>
+                <a:latin typeface="Consolas"/>
+              </a:rPr>
+              <a:t>    return record is null || record.IsEmpty</a:t>
+            </a:r>
+          </a:p>
+          <a:p>
+            <a:pPr algn="l">
+              <a:spcAft>
+                <a:spcPts val="200"/>
+              </a:spcAft>
+            </a:pPr>
+            <a:r>
+              <a:rPr sz="1300" b="0" i="0">
+                <a:solidFill>
+                  <a:srgbClr val="DCDCDC"/>
+                </a:solidFill>
+                <a:latin typeface="Consolas"/>
+              </a:rPr>
+              <a:t>        ? new Recall("", null)</a:t>
+            </a:r>
+          </a:p>
+          <a:p>
+            <a:pPr algn="l">
+              <a:spcAft>
+                <a:spcPts val="200"/>
+              </a:spcAft>
+            </a:pPr>
+            <a:r>
+              <a:rPr sz="1300" b="1" i="0">
+                <a:solidFill>
+                  <a:srgbClr val="9CDCFE"/>
+                </a:solidFill>
+                <a:latin typeface="Consolas"/>
+              </a:rPr>
+              <a:t>        : new Recall(BuildPreamble(record), record);  // inject</a:t>
+            </a:r>
+          </a:p>
+          <a:p>
+            <a:pPr algn="l">
+              <a:spcAft>
+                <a:spcPts val="200"/>
+              </a:spcAft>
+            </a:pPr>
+            <a:r>
+              <a:rPr sz="1300" b="0" i="0">
+                <a:solidFill>
+                  <a:srgbClr val="DCDCDC"/>
+                </a:solidFill>
+                <a:latin typeface="Consolas"/>
+              </a:rPr>
+              <a:t>}</a:t>
+            </a:r>
+          </a:p>
+          <a:p>
+            <a:pPr algn="l">
+              <a:spcAft>
+                <a:spcPts val="200"/>
+              </a:spcAft>
+            </a:pPr>
+            <a:r>
+              <a:rPr sz="600" b="0" i="0">
+                <a:solidFill>
+                  <a:srgbClr val="DCDCDC"/>
+                </a:solidFill>
+                <a:latin typeface="Consolas"/>
+              </a:rPr>
+              <a:t> </a:t>
+            </a:r>
+          </a:p>
+          <a:p>
+            <a:pPr algn="l">
+              <a:spcAft>
+                <a:spcPts val="200"/>
+              </a:spcAft>
+            </a:pPr>
+            <a:r>
+              <a:rPr sz="1300" b="0" i="0">
+                <a:solidFill>
+                  <a:srgbClr val="6A9955"/>
+                </a:solidFill>
+                <a:latin typeface="Consolas"/>
+              </a:rPr>
+              <a:t>// Program.cs -- the SAME seam Agent-&gt;Skills already used:</a:t>
+            </a:r>
+          </a:p>
+          <a:p>
+            <a:pPr algn="l">
+              <a:spcAft>
+                <a:spcPts val="200"/>
+              </a:spcAft>
+            </a:pPr>
+            <a:r>
+              <a:rPr sz="1300" b="0" i="0">
+                <a:solidFill>
+                  <a:srgbClr val="DCDCDC"/>
+                </a:solidFill>
+                <a:latin typeface="Consolas"/>
+              </a:rPr>
+              <a:t>var recall = memory is null ? null</a:t>
+            </a:r>
+          </a:p>
+          <a:p>
+            <a:pPr algn="l">
+              <a:spcAft>
+                <a:spcPts val="200"/>
+              </a:spcAft>
+            </a:pPr>
+            <a:r>
+              <a:rPr sz="1300" b="0" i="0">
+                <a:solidFill>
+                  <a:srgbClr val="DCDCDC"/>
+                </a:solidFill>
+                <a:latin typeface="Consolas"/>
+              </a:rPr>
+              <a:t>    : await memory.RecallAsync(customerId);</a:t>
+            </a:r>
+          </a:p>
+          <a:p>
+            <a:pPr algn="l">
+              <a:spcAft>
+                <a:spcPts val="200"/>
+              </a:spcAft>
+            </a:pPr>
+            <a:r>
+              <a:rPr sz="1300" b="0" i="0">
+                <a:solidFill>
+                  <a:srgbClr val="DCDCDC"/>
+                </a:solidFill>
+                <a:latin typeface="Consolas"/>
+              </a:rPr>
+              <a:t>var team = AgentTeam.Build(client, model, customerId, skills,</a:t>
+            </a:r>
+          </a:p>
+          <a:p>
+            <a:pPr algn="l">
+              <a:spcAft>
+                <a:spcPts val="200"/>
+              </a:spcAft>
+            </a:pPr>
+            <a:r>
+              <a:rPr sz="1300" b="1" i="0">
+                <a:solidFill>
+                  <a:srgbClr val="9CDCFE"/>
+                </a:solidFill>
+                <a:latin typeface="Consolas"/>
+              </a:rPr>
+              <a:t>    recall is { HasMemory: true } ? recall.Preamble : null);</a:t>
+            </a:r>
+          </a:p>
+          <a:p>
+            <a:pPr algn="l">
+              <a:spcAft>
+                <a:spcPts val="200"/>
+              </a:spcAft>
+            </a:pPr>
+            <a:r>
+              <a:rPr sz="600" b="0" i="0">
+                <a:solidFill>
+                  <a:srgbClr val="DCDCDC"/>
+                </a:solidFill>
+                <a:latin typeface="Consolas"/>
+              </a:rPr>
+              <a:t> </a:t>
+            </a:r>
+          </a:p>
+          <a:p>
+            <a:pPr algn="l">
+              <a:spcAft>
+                <a:spcPts val="200"/>
+              </a:spcAft>
+            </a:pPr>
+            <a:r>
+              <a:rPr sz="1300" b="0" i="0">
+                <a:solidFill>
+                  <a:srgbClr val="6A9955"/>
+                </a:solidFill>
+                <a:latin typeface="Consolas"/>
+              </a:rPr>
+              <a:t>// AFTER the run: compact + persist.</a:t>
+            </a:r>
+          </a:p>
+          <a:p>
+            <a:pPr algn="l">
+              <a:spcAft>
+                <a:spcPts val="200"/>
+              </a:spcAft>
+            </a:pPr>
+            <a:r>
+              <a:rPr sz="1300" b="1" i="0">
+                <a:solidFill>
+                  <a:srgbClr val="9CDCFE"/>
+                </a:solidFill>
+                <a:latin typeface="Consolas"/>
+              </a:rPr>
+              <a:t>await memory.RecordAsync(customerId, threadId, turns);</a:t>
+            </a:r>
+          </a:p>
+        </p:txBody>
+      </p:sp>
+      <p:sp>
+        <p:nvSpPr>
+          <p:cNvPr id="9" name="TextBox 8"/>
+          <p:cNvSpPr txBox="1"/>
+          <p:nvPr/>
+        </p:nvSpPr>
+        <p:spPr>
+          <a:xfrm>
+            <a:off x="502920" y="5650992"/>
+            <a:ext cx="10332720" cy="274320"/>
+          </a:xfrm>
+          <a:prstGeom prst="rect">
+            <a:avLst/>
+          </a:prstGeom>
+          <a:noFill/>
+        </p:spPr>
+        <p:txBody>
+          <a:bodyPr wrap="square" anchor="t" lIns="0" rIns="0" tIns="0" bIns="0">
+            <a:spAutoFit/>
+          </a:bodyPr>
+          <a:lstStyle/>
+          <a:p>
+            <a:pPr algn="l"/>
+            <a:r>
+              <a:rPr sz="1200" b="0" i="1">
+                <a:solidFill>
+                  <a:srgbClr val="605E5C"/>
+                </a:solidFill>
+                <a:latin typeface="Segoe UI"/>
+              </a:rPr>
+              <a:t>Two hooks on the existing seam — no agent or workflow rewrites</a:t>
+            </a:r>
+          </a:p>
+        </p:txBody>
+      </p:sp>
+      <p:sp>
+        <p:nvSpPr>
+          <p:cNvPr id="10" name="Rectangle 9"/>
           <p:cNvSpPr/>
           <p:nvPr/>
         </p:nvSpPr>
@@ -6443,7 +7349,7 @@
       </p:sp>
       <p:sp>
         <p:nvSpPr>
-          <p:cNvPr id="9" name="TextBox 8"/>
+          <p:cNvPr id="11" name="TextBox 10"/>
           <p:cNvSpPr txBox="1"/>
           <p:nvPr/>
         </p:nvSpPr>
@@ -6471,14 +7377,14 @@
                 </a:solidFill>
                 <a:latin typeface="Segoe UI"/>
               </a:rPr>
-              <a:t>Agent Modernization Workshops — Lab 06: Agent Memory Strategies   |   Demo</a:t>
-            </a:r>
-          </a:p>
-        </p:txBody>
-      </p:sp>
-      <p:sp>
-        <p:nvSpPr>
-          <p:cNvPr id="10" name="TextBox 9"/>
+              <a:t>Agent Modernization Workshops — Lab 06: Agent Memory Strategies   |   How · the code</a:t>
+            </a:r>
+          </a:p>
+        </p:txBody>
+      </p:sp>
+      <p:sp>
+        <p:nvSpPr>
+          <p:cNvPr id="12" name="TextBox 11"/>
           <p:cNvSpPr txBox="1"/>
           <p:nvPr/>
         </p:nvSpPr>
@@ -6507,122 +7413,6 @@
                 <a:latin typeface="Segoe UI"/>
               </a:rPr>
               <a:t>13</a:t>
-            </a:r>
-          </a:p>
-        </p:txBody>
-      </p:sp>
-      <p:sp>
-        <p:nvSpPr>
-          <p:cNvPr id="11" name="Rounded Rectangle 10"/>
-          <p:cNvSpPr/>
-          <p:nvPr/>
-        </p:nvSpPr>
-        <p:spPr>
-          <a:xfrm>
-            <a:off x="502920" y="5961888"/>
-            <a:ext cx="10332720" cy="530352"/>
-          </a:xfrm>
-          <a:prstGeom prst="roundRect">
-            <a:avLst/>
-          </a:prstGeom>
-          <a:solidFill>
-            <a:srgbClr val="E3F3F6"/>
-          </a:solidFill>
-          <a:ln w="15875">
-            <a:solidFill>
-              <a:srgbClr val="00B7C3"/>
-            </a:solidFill>
-          </a:ln>
-          <a:effectLst/>
-        </p:spPr>
-        <p:style>
-          <a:lnRef idx="1">
-            <a:schemeClr val="accent1"/>
-          </a:lnRef>
-          <a:fillRef idx="3">
-            <a:schemeClr val="accent1"/>
-          </a:fillRef>
-          <a:effectRef idx="2">
-            <a:schemeClr val="accent1"/>
-          </a:effectRef>
-          <a:fontRef idx="minor">
-            <a:schemeClr val="lt1"/>
-          </a:fontRef>
-        </p:style>
-        <p:txBody>
-          <a:bodyPr rtlCol="0" anchor="ctr"/>
-          <a:lstStyle/>
-          <a:p>
-            <a:pPr algn="ctr"/>
-          </a:p>
-        </p:txBody>
-      </p:sp>
-      <p:sp>
-        <p:nvSpPr>
-          <p:cNvPr id="12" name="TextBox 11"/>
-          <p:cNvSpPr txBox="1"/>
-          <p:nvPr/>
-        </p:nvSpPr>
-        <p:spPr>
-          <a:xfrm>
-            <a:off x="704088" y="5961888"/>
-            <a:ext cx="1417320" cy="530352"/>
-          </a:xfrm>
-          <a:prstGeom prst="rect">
-            <a:avLst/>
-          </a:prstGeom>
-          <a:noFill/>
-        </p:spPr>
-        <p:txBody>
-          <a:bodyPr wrap="square" anchor="ctr" lIns="0" rIns="0" tIns="0" bIns="0">
-            <a:spAutoFit/>
-          </a:bodyPr>
-          <a:lstStyle/>
-          <a:p>
-            <a:pPr algn="l"/>
-            <a:r>
-              <a:rPr sz="1400" b="1" i="0">
-                <a:solidFill>
-                  <a:srgbClr val="00B7C3"/>
-                </a:solidFill>
-                <a:latin typeface="Segoe UI"/>
-              </a:rPr>
-              <a:t>▶ DEMO</a:t>
-            </a:r>
-          </a:p>
-        </p:txBody>
-      </p:sp>
-      <p:sp>
-        <p:nvSpPr>
-          <p:cNvPr id="13" name="TextBox 12"/>
-          <p:cNvSpPr txBox="1"/>
-          <p:nvPr/>
-        </p:nvSpPr>
-        <p:spPr>
-          <a:xfrm>
-            <a:off x="2057400" y="5961888"/>
-            <a:ext cx="8595360" cy="530352"/>
-          </a:xfrm>
-          <a:prstGeom prst="rect">
-            <a:avLst/>
-          </a:prstGeom>
-          <a:noFill/>
-        </p:spPr>
-        <p:txBody>
-          <a:bodyPr wrap="square" anchor="ctr" lIns="0" rIns="0" tIns="0" bIns="0">
-            <a:spAutoFit/>
-          </a:bodyPr>
-          <a:lstStyle/>
-          <a:p>
-            <a:pPr algn="l"/>
-            <a:r>
-              <a:rPr sz="1300" b="1" i="0">
-                <a:solidFill>
-                  <a:srgbClr val="243A5E"/>
-                </a:solidFill>
-                <a:latin typeface="Segoe UI"/>
-              </a:rPr>
-              <a:t>seed → --memory local  (team recalls the loan)   vs   --memory off  (team has to ask)</a:t>
             </a:r>
           </a:p>
         </p:txBody>
@@ -6763,7 +7553,7 @@
                 </a:solidFill>
                 <a:latin typeface="Segoe UI"/>
               </a:rPr>
-              <a:t>HOW</a:t>
+              <a:t>HOW · THE CODE</a:t>
             </a:r>
           </a:p>
         </p:txBody>
@@ -6798,21 +7588,65 @@
                 </a:solidFill>
                 <a:latin typeface="Segoe UI"/>
               </a:rPr>
-              <a:t>--memory: four modes, two memory models</a:t>
-            </a:r>
-          </a:p>
-        </p:txBody>
-      </p:sp>
-      <p:sp>
-        <p:nvSpPr>
-          <p:cNvPr id="6" name="TextBox 5"/>
+              <a:t>The managed tier — hand it to the platform</a:t>
+            </a:r>
+          </a:p>
+        </p:txBody>
+      </p:sp>
+      <p:sp>
+        <p:nvSpPr>
+          <p:cNvPr id="6" name="Rounded Rectangle 5"/>
+          <p:cNvSpPr/>
+          <p:nvPr/>
+        </p:nvSpPr>
+        <p:spPr>
+          <a:xfrm>
+            <a:off x="502920" y="1371600"/>
+            <a:ext cx="10332720" cy="4160520"/>
+          </a:xfrm>
+          <a:prstGeom prst="roundRect">
+            <a:avLst/>
+          </a:prstGeom>
+          <a:solidFill>
+            <a:srgbClr val="1E1E1E"/>
+          </a:solidFill>
+          <a:ln>
+            <a:noFill/>
+          </a:ln>
+          <a:effectLst/>
+        </p:spPr>
+        <p:style>
+          <a:lnRef idx="1">
+            <a:schemeClr val="accent1"/>
+          </a:lnRef>
+          <a:fillRef idx="3">
+            <a:schemeClr val="accent1"/>
+          </a:fillRef>
+          <a:effectRef idx="2">
+            <a:schemeClr val="accent1"/>
+          </a:effectRef>
+          <a:fontRef idx="minor">
+            <a:schemeClr val="lt1"/>
+          </a:fontRef>
+        </p:style>
+        <p:txBody>
+          <a:bodyPr rtlCol="0" anchor="ctr"/>
+          <a:lstStyle/>
+          <a:p>
+            <a:pPr algn="ctr"/>
+          </a:p>
+        </p:txBody>
+      </p:sp>
+      <p:sp>
+        <p:nvSpPr>
+          <p:cNvPr id="7" name="TextBox 6"/>
           <p:cNvSpPr txBox="1"/>
           <p:nvPr/>
         </p:nvSpPr>
         <p:spPr>
           <a:xfrm>
-            <a:off x="502920" y="1325880"/>
-            <a:ext cx="5212080" cy="4572000"/>
+            <a:off x="758952" y="1463040"/>
+            <a:ext cx="9875520" cy="274320"/>
           </a:xfrm>
           <a:prstGeom prst="rect">
             <a:avLst/>
@@ -6825,93 +7659,29 @@
           </a:bodyPr>
           <a:lstStyle/>
           <a:p>
-            <a:pPr algn="l">
-              <a:spcBef>
-                <a:spcPts val="400"/>
-              </a:spcBef>
-              <a:spcAft>
-                <a:spcPts val="500"/>
-              </a:spcAft>
-            </a:pPr>
-            <a:r>
-              <a:rPr sz="1800" b="1" i="0">
-                <a:solidFill>
-                  <a:srgbClr val="243A5E"/>
-                </a:solidFill>
-                <a:latin typeface="Segoe UI"/>
-              </a:rPr>
-              <a:t>■  off   —  default; clean, stateless runs (every other demo)</a:t>
-            </a:r>
-          </a:p>
-          <a:p>
-            <a:pPr algn="l">
-              <a:spcBef>
-                <a:spcPts val="0"/>
-              </a:spcBef>
-              <a:spcAft>
-                <a:spcPts val="500"/>
-              </a:spcAft>
-            </a:pPr>
-            <a:r>
-              <a:rPr sz="1800" b="0" i="0">
-                <a:solidFill>
-                  <a:srgbClr val="107C10"/>
-                </a:solidFill>
-                <a:latin typeface="Segoe UI"/>
-              </a:rPr>
-              <a:t>✓  local —  BYO file store, no Azure  —  verified live</a:t>
-            </a:r>
-          </a:p>
-          <a:p>
-            <a:pPr algn="l">
-              <a:spcBef>
-                <a:spcPts val="0"/>
-              </a:spcBef>
-              <a:spcAft>
-                <a:spcPts val="500"/>
-              </a:spcAft>
-            </a:pPr>
-            <a:r>
-              <a:rPr sz="1800" b="0" i="0">
-                <a:solidFill>
-                  <a:srgbClr val="107C10"/>
-                </a:solidFill>
-                <a:latin typeface="Segoe UI"/>
-              </a:rPr>
-              <a:t>✓  cosmos —  BYO managed store (Cosmos DB)  —  verified live</a:t>
-            </a:r>
-          </a:p>
-          <a:p>
-            <a:pPr algn="l">
-              <a:spcBef>
-                <a:spcPts val="0"/>
-              </a:spcBef>
-              <a:spcAft>
-                <a:spcPts val="500"/>
-              </a:spcAft>
-            </a:pPr>
-            <a:r>
-              <a:rPr sz="1800" b="0" i="0">
-                <a:solidFill>
-                  <a:srgbClr val="107C10"/>
-                </a:solidFill>
-                <a:latin typeface="Segoe UI"/>
-              </a:rPr>
-              <a:t>✓  foundry — platform-managed Memory (preview)  —  verified live</a:t>
-            </a:r>
-          </a:p>
-        </p:txBody>
-      </p:sp>
-      <p:sp>
-        <p:nvSpPr>
-          <p:cNvPr id="7" name="TextBox 6"/>
+            <a:pPr algn="l"/>
+            <a:r>
+              <a:rPr sz="1200" b="1" i="0">
+                <a:solidFill>
+                  <a:srgbClr val="00B7C3"/>
+                </a:solidFill>
+                <a:latin typeface="Segoe UI"/>
+              </a:rPr>
+              <a:t>●  Memory/FoundryMemoryDemo.cs   (--memory foundry)</a:t>
+            </a:r>
+          </a:p>
+        </p:txBody>
+      </p:sp>
+      <p:sp>
+        <p:nvSpPr>
+          <p:cNvPr id="8" name="TextBox 7"/>
           <p:cNvSpPr txBox="1"/>
           <p:nvPr/>
         </p:nvSpPr>
         <p:spPr>
           <a:xfrm>
-            <a:off x="5989320" y="1325880"/>
-            <a:ext cx="5212080" cy="4572000"/>
+            <a:off x="758952" y="1828800"/>
+            <a:ext cx="9875520" cy="3566160"/>
           </a:xfrm>
           <a:prstGeom prst="rect">
             <a:avLst/>
@@ -6925,123 +7695,332 @@
           <a:lstStyle/>
           <a:p>
             <a:pPr algn="l">
-              <a:spcBef>
-                <a:spcPts val="400"/>
-              </a:spcBef>
-              <a:spcAft>
-                <a:spcPts val="500"/>
-              </a:spcAft>
-            </a:pPr>
-            <a:r>
-              <a:rPr sz="1800" b="1" i="0">
-                <a:solidFill>
-                  <a:srgbClr val="243A5E"/>
-                </a:solidFill>
-                <a:latin typeface="Segoe UI"/>
-              </a:rPr>
-              <a:t>■  BYO tiers (local + cosmos)</a:t>
-            </a:r>
-          </a:p>
-          <a:p>
-            <a:pPr algn="l">
-              <a:spcBef>
-                <a:spcPts val="0"/>
-              </a:spcBef>
-              <a:spcAft>
-                <a:spcPts val="300"/>
-              </a:spcAft>
-            </a:pPr>
-            <a:r>
-              <a:rPr sz="1500" b="0" i="0">
-                <a:solidFill>
-                  <a:srgbClr val="201F1E"/>
-                </a:solidFill>
-                <a:latin typeface="Segoe UI"/>
-              </a:rPr>
-              <a:t>–  One contract: IMemoryStore — Load / Save / Describe</a:t>
-            </a:r>
-          </a:p>
-          <a:p>
-            <a:pPr algn="l">
-              <a:spcBef>
-                <a:spcPts val="0"/>
-              </a:spcBef>
-              <a:spcAft>
-                <a:spcPts val="300"/>
-              </a:spcAft>
-            </a:pPr>
-            <a:r>
-              <a:rPr sz="1500" b="0" i="0">
-                <a:solidFill>
-                  <a:srgbClr val="201F1E"/>
-                </a:solidFill>
-                <a:latin typeface="Segoe UI"/>
-              </a:rPr>
-              <a:t>–  Swap the store — app, agents, and workflow stay identical</a:t>
-            </a:r>
-          </a:p>
-          <a:p>
-            <a:pPr algn="l">
-              <a:spcBef>
-                <a:spcPts val="400"/>
-              </a:spcBef>
-              <a:spcAft>
-                <a:spcPts val="500"/>
-              </a:spcAft>
-            </a:pPr>
-            <a:r>
-              <a:rPr sz="1800" b="1" i="0">
-                <a:solidFill>
-                  <a:srgbClr val="243A5E"/>
-                </a:solidFill>
-                <a:latin typeface="Segoe UI"/>
-              </a:rPr>
-              <a:t>■  Managed tier (foundry)</a:t>
-            </a:r>
-          </a:p>
-          <a:p>
-            <a:pPr algn="l">
-              <a:spcBef>
-                <a:spcPts val="0"/>
-              </a:spcBef>
-              <a:spcAft>
-                <a:spcPts val="300"/>
-              </a:spcAft>
-            </a:pPr>
-            <a:r>
-              <a:rPr sz="1500" b="0" i="0">
-                <a:solidFill>
-                  <a:srgbClr val="201F1E"/>
-                </a:solidFill>
-                <a:latin typeface="Segoe UI"/>
-              </a:rPr>
-              <a:t>–  FoundryMemoryProvider on a single agent + session — platform extracts/embeds/recalls</a:t>
-            </a:r>
-          </a:p>
-          <a:p>
-            <a:pPr algn="l">
-              <a:spcBef>
-                <a:spcPts val="0"/>
-              </a:spcBef>
-              <a:spcAft>
-                <a:spcPts val="500"/>
-              </a:spcAft>
-            </a:pPr>
-            <a:r>
-              <a:rPr sz="1800" b="0" i="0">
-                <a:solidFill>
-                  <a:srgbClr val="107C10"/>
-                </a:solidFill>
-                <a:latin typeface="Segoe UI"/>
-              </a:rPr>
-              <a:t>✓  Honest status banner — prints the backend it truly used</a:t>
-            </a:r>
-          </a:p>
-        </p:txBody>
-      </p:sp>
-      <p:sp>
-        <p:nvSpPr>
-          <p:cNvPr id="8" name="Rectangle 7"/>
+              <a:spcAft>
+                <a:spcPts val="200"/>
+              </a:spcAft>
+            </a:pPr>
+            <a:r>
+              <a:rPr sz="1300" b="0" i="0">
+                <a:solidFill>
+                  <a:srgbClr val="6A9955"/>
+                </a:solidFill>
+                <a:latin typeface="Consolas"/>
+              </a:rPr>
+              <a:t>// No IMemoryStore -- the PLATFORM owns extraction + storage.</a:t>
+            </a:r>
+          </a:p>
+          <a:p>
+            <a:pPr algn="l">
+              <a:spcAft>
+                <a:spcPts val="200"/>
+              </a:spcAft>
+            </a:pPr>
+            <a:r>
+              <a:rPr sz="1300" b="0" i="0">
+                <a:solidFill>
+                  <a:srgbClr val="6A9955"/>
+                </a:solidFill>
+                <a:latin typeface="Consolas"/>
+              </a:rPr>
+              <a:t>// Scope keys memory to THIS customer (across sessions):</a:t>
+            </a:r>
+          </a:p>
+          <a:p>
+            <a:pPr algn="l">
+              <a:spcAft>
+                <a:spcPts val="200"/>
+              </a:spcAft>
+            </a:pPr>
+            <a:r>
+              <a:rPr sz="1300" b="0" i="0">
+                <a:solidFill>
+                  <a:srgbClr val="DCDCDC"/>
+                </a:solidFill>
+                <a:latin typeface="Consolas"/>
+              </a:rPr>
+              <a:t>var memory = new FoundryMemoryProvider(</a:t>
+            </a:r>
+          </a:p>
+          <a:p>
+            <a:pPr algn="l">
+              <a:spcAft>
+                <a:spcPts val="200"/>
+              </a:spcAft>
+            </a:pPr>
+            <a:r>
+              <a:rPr sz="1300" b="0" i="0">
+                <a:solidFill>
+                  <a:srgbClr val="DCDCDC"/>
+                </a:solidFill>
+                <a:latin typeface="Consolas"/>
+              </a:rPr>
+              <a:t>    client, storeName,</a:t>
+            </a:r>
+          </a:p>
+          <a:p>
+            <a:pPr algn="l">
+              <a:spcAft>
+                <a:spcPts val="200"/>
+              </a:spcAft>
+            </a:pPr>
+            <a:r>
+              <a:rPr sz="1300" b="1" i="0">
+                <a:solidFill>
+                  <a:srgbClr val="9CDCFE"/>
+                </a:solidFill>
+                <a:latin typeface="Consolas"/>
+              </a:rPr>
+              <a:t>    _ =&gt; new(new FoundryMemoryProviderScope(customerId)));</a:t>
+            </a:r>
+          </a:p>
+          <a:p>
+            <a:pPr algn="l">
+              <a:spcAft>
+                <a:spcPts val="200"/>
+              </a:spcAft>
+            </a:pPr>
+            <a:r>
+              <a:rPr sz="600" b="0" i="0">
+                <a:solidFill>
+                  <a:srgbClr val="DCDCDC"/>
+                </a:solidFill>
+                <a:latin typeface="Consolas"/>
+              </a:rPr>
+              <a:t> </a:t>
+            </a:r>
+          </a:p>
+          <a:p>
+            <a:pPr algn="l">
+              <a:spcAft>
+                <a:spcPts val="200"/>
+              </a:spcAft>
+            </a:pPr>
+            <a:r>
+              <a:rPr sz="1300" b="0" i="0">
+                <a:solidFill>
+                  <a:srgbClr val="DCDCDC"/>
+                </a:solidFill>
+                <a:latin typeface="Consolas"/>
+              </a:rPr>
+              <a:t>var agent = client.AsAIAgent(new ChatClientAgentOptions</a:t>
+            </a:r>
+          </a:p>
+          <a:p>
+            <a:pPr algn="l">
+              <a:spcAft>
+                <a:spcPts val="200"/>
+              </a:spcAft>
+            </a:pPr>
+            <a:r>
+              <a:rPr sz="1300" b="0" i="0">
+                <a:solidFill>
+                  <a:srgbClr val="DCDCDC"/>
+                </a:solidFill>
+                <a:latin typeface="Consolas"/>
+              </a:rPr>
+              <a:t>{</a:t>
+            </a:r>
+          </a:p>
+          <a:p>
+            <a:pPr algn="l">
+              <a:spcAft>
+                <a:spcPts val="200"/>
+              </a:spcAft>
+            </a:pPr>
+            <a:r>
+              <a:rPr sz="1300" b="0" i="0">
+                <a:solidFill>
+                  <a:srgbClr val="DCDCDC"/>
+                </a:solidFill>
+                <a:latin typeface="Consolas"/>
+              </a:rPr>
+              <a:t>    Name = "BankingConcierge",</a:t>
+            </a:r>
+          </a:p>
+          <a:p>
+            <a:pPr algn="l">
+              <a:spcAft>
+                <a:spcPts val="200"/>
+              </a:spcAft>
+            </a:pPr>
+            <a:r>
+              <a:rPr sz="1300" b="0" i="0">
+                <a:solidFill>
+                  <a:srgbClr val="DCDCDC"/>
+                </a:solidFill>
+                <a:latin typeface="Consolas"/>
+              </a:rPr>
+              <a:t>    ChatOptions = new() { ModelId = chatModel, Instructions = ... },</a:t>
+            </a:r>
+          </a:p>
+          <a:p>
+            <a:pPr algn="l">
+              <a:spcAft>
+                <a:spcPts val="200"/>
+              </a:spcAft>
+            </a:pPr>
+            <a:r>
+              <a:rPr sz="1300" b="1" i="0">
+                <a:solidFill>
+                  <a:srgbClr val="9CDCFE"/>
+                </a:solidFill>
+                <a:latin typeface="Consolas"/>
+              </a:rPr>
+              <a:t>    AIContextProviders = [memory],   // attach the provider</a:t>
+            </a:r>
+          </a:p>
+          <a:p>
+            <a:pPr algn="l">
+              <a:spcAft>
+                <a:spcPts val="200"/>
+              </a:spcAft>
+            </a:pPr>
+            <a:r>
+              <a:rPr sz="1300" b="0" i="0">
+                <a:solidFill>
+                  <a:srgbClr val="DCDCDC"/>
+                </a:solidFill>
+                <a:latin typeface="Consolas"/>
+              </a:rPr>
+              <a:t>});</a:t>
+            </a:r>
+          </a:p>
+          <a:p>
+            <a:pPr algn="l">
+              <a:spcAft>
+                <a:spcPts val="200"/>
+              </a:spcAft>
+            </a:pPr>
+            <a:r>
+              <a:rPr sz="600" b="0" i="0">
+                <a:solidFill>
+                  <a:srgbClr val="DCDCDC"/>
+                </a:solidFill>
+                <a:latin typeface="Consolas"/>
+              </a:rPr>
+              <a:t> </a:t>
+            </a:r>
+          </a:p>
+          <a:p>
+            <a:pPr algn="l">
+              <a:spcAft>
+                <a:spcPts val="200"/>
+              </a:spcAft>
+            </a:pPr>
+            <a:r>
+              <a:rPr sz="1300" b="0" i="0">
+                <a:solidFill>
+                  <a:srgbClr val="DCDCDC"/>
+                </a:solidFill>
+                <a:latin typeface="Consolas"/>
+              </a:rPr>
+              <a:t>await memory.EnsureMemoryStoreCreatedAsync(chat, embedding, ...);</a:t>
+            </a:r>
+          </a:p>
+          <a:p>
+            <a:pPr algn="l">
+              <a:spcAft>
+                <a:spcPts val="200"/>
+              </a:spcAft>
+            </a:pPr>
+            <a:r>
+              <a:rPr sz="1300" b="0" i="0">
+                <a:solidFill>
+                  <a:srgbClr val="DCDCDC"/>
+                </a:solidFill>
+                <a:latin typeface="Consolas"/>
+              </a:rPr>
+              <a:t>var session = await agent.CreateSessionAsync();</a:t>
+            </a:r>
+          </a:p>
+          <a:p>
+            <a:pPr algn="l">
+              <a:spcAft>
+                <a:spcPts val="200"/>
+              </a:spcAft>
+            </a:pPr>
+            <a:r>
+              <a:rPr sz="1300" b="0" i="0">
+                <a:solidFill>
+                  <a:srgbClr val="DCDCDC"/>
+                </a:solidFill>
+                <a:latin typeface="Consolas"/>
+              </a:rPr>
+              <a:t>await foreach (var u in agent.RunStreamingAsync(task, session))</a:t>
+            </a:r>
+          </a:p>
+          <a:p>
+            <a:pPr algn="l">
+              <a:spcAft>
+                <a:spcPts val="200"/>
+              </a:spcAft>
+            </a:pPr>
+            <a:r>
+              <a:rPr sz="1300" b="0" i="0">
+                <a:solidFill>
+                  <a:srgbClr val="DCDCDC"/>
+                </a:solidFill>
+                <a:latin typeface="Consolas"/>
+              </a:rPr>
+              <a:t>    Console.Write(u.Text);</a:t>
+            </a:r>
+          </a:p>
+          <a:p>
+            <a:pPr algn="l">
+              <a:spcAft>
+                <a:spcPts val="200"/>
+              </a:spcAft>
+            </a:pPr>
+            <a:r>
+              <a:rPr sz="1300" b="1" i="0">
+                <a:solidFill>
+                  <a:srgbClr val="9CDCFE"/>
+                </a:solidFill>
+                <a:latin typeface="Consolas"/>
+              </a:rPr>
+              <a:t>await memory.WhenUpdatesCompletedAsync();  // extraction is async</a:t>
+            </a:r>
+          </a:p>
+        </p:txBody>
+      </p:sp>
+      <p:sp>
+        <p:nvSpPr>
+          <p:cNvPr id="9" name="TextBox 8"/>
+          <p:cNvSpPr txBox="1"/>
+          <p:nvPr/>
+        </p:nvSpPr>
+        <p:spPr>
+          <a:xfrm>
+            <a:off x="502920" y="5650992"/>
+            <a:ext cx="10332720" cy="274320"/>
+          </a:xfrm>
+          <a:prstGeom prst="rect">
+            <a:avLst/>
+          </a:prstGeom>
+          <a:noFill/>
+        </p:spPr>
+        <p:txBody>
+          <a:bodyPr wrap="square" anchor="t" lIns="0" rIns="0" tIns="0" bIns="0">
+            <a:spAutoFit/>
+          </a:bodyPr>
+          <a:lstStyle/>
+          <a:p>
+            <a:pPr algn="l"/>
+            <a:r>
+              <a:rPr sz="1200" b="0" i="1">
+                <a:solidFill>
+                  <a:srgbClr val="605E5C"/>
+                </a:solidFill>
+                <a:latin typeface="Segoe UI"/>
+              </a:rPr>
+              <a:t>A context provider on one agent — the platform owns storage, not IMemoryStore</a:t>
+            </a:r>
+          </a:p>
+        </p:txBody>
+      </p:sp>
+      <p:sp>
+        <p:nvSpPr>
+          <p:cNvPr id="10" name="Rectangle 9"/>
           <p:cNvSpPr/>
           <p:nvPr/>
         </p:nvSpPr>
@@ -7085,7 +8064,7 @@
       </p:sp>
       <p:sp>
         <p:nvSpPr>
-          <p:cNvPr id="9" name="TextBox 8"/>
+          <p:cNvPr id="11" name="TextBox 10"/>
           <p:cNvSpPr txBox="1"/>
           <p:nvPr/>
         </p:nvSpPr>
@@ -7113,14 +8092,14 @@
                 </a:solidFill>
                 <a:latin typeface="Segoe UI"/>
               </a:rPr>
-              <a:t>Agent Modernization Workshops — Lab 06: Agent Memory Strategies   |   How</a:t>
-            </a:r>
-          </a:p>
-        </p:txBody>
-      </p:sp>
-      <p:sp>
-        <p:nvSpPr>
-          <p:cNvPr id="10" name="TextBox 9"/>
+              <a:t>Agent Modernization Workshops — Lab 06: Agent Memory Strategies   |   How · the code</a:t>
+            </a:r>
+          </a:p>
+        </p:txBody>
+      </p:sp>
+      <p:sp>
+        <p:nvSpPr>
+          <p:cNvPr id="12" name="TextBox 11"/>
           <p:cNvSpPr txBox="1"/>
           <p:nvPr/>
         </p:nvSpPr>
@@ -7180,7 +8159,7 @@
         <p:spPr>
           <a:xfrm>
             <a:off x="0" y="0"/>
-            <a:ext cx="12192000" cy="1051560"/>
+            <a:ext cx="12192000" cy="6858000"/>
           </a:xfrm>
           <a:prstGeom prst="rect">
             <a:avLst/>
@@ -7223,8 +8202,8 @@
         </p:nvSpPr>
         <p:spPr>
           <a:xfrm>
-            <a:off x="0" y="1051560"/>
-            <a:ext cx="12192000" cy="54864"/>
+            <a:off x="502920" y="2468880"/>
+            <a:ext cx="109728" cy="1554480"/>
           </a:xfrm>
           <a:prstGeom prst="rect">
             <a:avLst/>
@@ -7267,8 +8246,8 @@
         </p:nvSpPr>
         <p:spPr>
           <a:xfrm>
-            <a:off x="502920" y="164592"/>
-            <a:ext cx="10058400" cy="274320"/>
+            <a:off x="868680" y="2331720"/>
+            <a:ext cx="2743200" cy="914400"/>
           </a:xfrm>
           <a:prstGeom prst="rect">
             <a:avLst/>
@@ -7283,13 +8262,13 @@
           <a:p>
             <a:pPr algn="l"/>
             <a:r>
-              <a:rPr sz="1200" b="1" i="0">
+              <a:rPr sz="6600" b="1" i="0">
                 <a:solidFill>
                   <a:srgbClr val="00B7C3"/>
                 </a:solidFill>
                 <a:latin typeface="Segoe UI"/>
               </a:rPr>
-              <a:t>ROADMAP</a:t>
+              <a:t>02</a:t>
             </a:r>
           </a:p>
         </p:txBody>
@@ -7302,443 +8281,8 @@
         </p:nvSpPr>
         <p:spPr>
           <a:xfrm>
-            <a:off x="502920" y="420624"/>
-            <a:ext cx="10972800" cy="566928"/>
-          </a:xfrm>
-          <a:prstGeom prst="rect">
-            <a:avLst/>
-          </a:prstGeom>
-          <a:noFill/>
-        </p:spPr>
-        <p:txBody>
-          <a:bodyPr wrap="square" anchor="ctr" lIns="0" rIns="0" tIns="0" bIns="0">
-            <a:spAutoFit/>
-          </a:bodyPr>
-          <a:lstStyle/>
-          <a:p>
-            <a:pPr algn="l"/>
-            <a:r>
-              <a:rPr sz="2600" b="1" i="0">
-                <a:solidFill>
-                  <a:srgbClr val="FFFFFF"/>
-                </a:solidFill>
-                <a:latin typeface="Segoe UI"/>
-              </a:rPr>
-              <a:t>From file, to Cosmos, to platform-managed</a:t>
-            </a:r>
-          </a:p>
-        </p:txBody>
-      </p:sp>
-      <p:sp>
-        <p:nvSpPr>
-          <p:cNvPr id="6" name="Rounded Rectangle 5"/>
-          <p:cNvSpPr/>
-          <p:nvPr/>
-        </p:nvSpPr>
-        <p:spPr>
-          <a:xfrm>
-            <a:off x="502920" y="1783080"/>
-            <a:ext cx="2343150" cy="868680"/>
-          </a:xfrm>
-          <a:prstGeom prst="roundRect">
-            <a:avLst/>
-          </a:prstGeom>
-          <a:solidFill>
-            <a:srgbClr val="FFFFFF"/>
-          </a:solidFill>
-          <a:ln w="19050">
-            <a:solidFill>
-              <a:srgbClr val="0078D4"/>
-            </a:solidFill>
-          </a:ln>
-          <a:effectLst/>
-        </p:spPr>
-        <p:style>
-          <a:lnRef idx="1">
-            <a:schemeClr val="accent1"/>
-          </a:lnRef>
-          <a:fillRef idx="3">
-            <a:schemeClr val="accent1"/>
-          </a:fillRef>
-          <a:effectRef idx="2">
-            <a:schemeClr val="accent1"/>
-          </a:effectRef>
-          <a:fontRef idx="minor">
-            <a:schemeClr val="lt1"/>
-          </a:fontRef>
-        </p:style>
-        <p:txBody>
-          <a:bodyPr rtlCol="0" anchor="ctr" wrap="square"/>
-          <a:lstStyle/>
-          <a:p>
-            <a:pPr algn="ctr"/>
-            <a:r>
-              <a:rPr sz="1200" b="1" i="0">
-                <a:solidFill>
-                  <a:srgbClr val="243A5E"/>
-                </a:solidFill>
-                <a:latin typeface="Segoe UI"/>
-              </a:rPr>
-              <a:t>local file</a:t>
-            </a:r>
-          </a:p>
-          <a:p>
-            <a:pPr algn="ctr"/>
-            <a:r>
-              <a:rPr sz="1000" b="0" i="0">
-                <a:solidFill>
-                  <a:srgbClr val="605E5C"/>
-                </a:solidFill>
-                <a:latin typeface="Segoe UI"/>
-              </a:rPr>
-              <a:t>(done)</a:t>
-            </a:r>
-          </a:p>
-        </p:txBody>
-      </p:sp>
-      <p:sp>
-        <p:nvSpPr>
-          <p:cNvPr id="7" name="Right Arrow 6"/>
-          <p:cNvSpPr/>
-          <p:nvPr/>
-        </p:nvSpPr>
-        <p:spPr>
-          <a:xfrm>
-            <a:off x="2827782" y="2162556"/>
-            <a:ext cx="374904" cy="109728"/>
-          </a:xfrm>
-          <a:prstGeom prst="rightArrow">
-            <a:avLst/>
-          </a:prstGeom>
-          <a:solidFill>
-            <a:srgbClr val="00B7C3"/>
-          </a:solidFill>
-          <a:ln>
-            <a:noFill/>
-          </a:ln>
-          <a:effectLst/>
-        </p:spPr>
-        <p:style>
-          <a:lnRef idx="1">
-            <a:schemeClr val="accent1"/>
-          </a:lnRef>
-          <a:fillRef idx="3">
-            <a:schemeClr val="accent1"/>
-          </a:fillRef>
-          <a:effectRef idx="2">
-            <a:schemeClr val="accent1"/>
-          </a:effectRef>
-          <a:fontRef idx="minor">
-            <a:schemeClr val="lt1"/>
-          </a:fontRef>
-        </p:style>
-        <p:txBody>
-          <a:bodyPr rtlCol="0" anchor="ctr"/>
-          <a:lstStyle/>
-          <a:p>
-            <a:pPr algn="ctr"/>
-          </a:p>
-        </p:txBody>
-      </p:sp>
-      <p:sp>
-        <p:nvSpPr>
-          <p:cNvPr id="8" name="Rounded Rectangle 7"/>
-          <p:cNvSpPr/>
-          <p:nvPr/>
-        </p:nvSpPr>
-        <p:spPr>
-          <a:xfrm>
-            <a:off x="3166110" y="1783080"/>
-            <a:ext cx="2343150" cy="868680"/>
-          </a:xfrm>
-          <a:prstGeom prst="roundRect">
-            <a:avLst/>
-          </a:prstGeom>
-          <a:solidFill>
-            <a:srgbClr val="FFFFFF"/>
-          </a:solidFill>
-          <a:ln w="19050">
-            <a:solidFill>
-              <a:srgbClr val="0078D4"/>
-            </a:solidFill>
-          </a:ln>
-          <a:effectLst/>
-        </p:spPr>
-        <p:style>
-          <a:lnRef idx="1">
-            <a:schemeClr val="accent1"/>
-          </a:lnRef>
-          <a:fillRef idx="3">
-            <a:schemeClr val="accent1"/>
-          </a:fillRef>
-          <a:effectRef idx="2">
-            <a:schemeClr val="accent1"/>
-          </a:effectRef>
-          <a:fontRef idx="minor">
-            <a:schemeClr val="lt1"/>
-          </a:fontRef>
-        </p:style>
-        <p:txBody>
-          <a:bodyPr rtlCol="0" anchor="ctr" wrap="square"/>
-          <a:lstStyle/>
-          <a:p>
-            <a:pPr algn="ctr"/>
-            <a:r>
-              <a:rPr sz="1200" b="1" i="0">
-                <a:solidFill>
-                  <a:srgbClr val="243A5E"/>
-                </a:solidFill>
-                <a:latin typeface="Segoe UI"/>
-              </a:rPr>
-              <a:t>Cosmos DB</a:t>
-            </a:r>
-          </a:p>
-          <a:p>
-            <a:pPr algn="ctr"/>
-            <a:r>
-              <a:rPr sz="1000" b="0" i="0">
-                <a:solidFill>
-                  <a:srgbClr val="605E5C"/>
-                </a:solidFill>
-                <a:latin typeface="Segoe UI"/>
-              </a:rPr>
-              <a:t>(done)</a:t>
-            </a:r>
-          </a:p>
-        </p:txBody>
-      </p:sp>
-      <p:sp>
-        <p:nvSpPr>
-          <p:cNvPr id="9" name="Right Arrow 8"/>
-          <p:cNvSpPr/>
-          <p:nvPr/>
-        </p:nvSpPr>
-        <p:spPr>
-          <a:xfrm>
-            <a:off x="5490972" y="2162556"/>
-            <a:ext cx="374904" cy="109728"/>
-          </a:xfrm>
-          <a:prstGeom prst="rightArrow">
-            <a:avLst/>
-          </a:prstGeom>
-          <a:solidFill>
-            <a:srgbClr val="00B7C3"/>
-          </a:solidFill>
-          <a:ln>
-            <a:noFill/>
-          </a:ln>
-          <a:effectLst/>
-        </p:spPr>
-        <p:style>
-          <a:lnRef idx="1">
-            <a:schemeClr val="accent1"/>
-          </a:lnRef>
-          <a:fillRef idx="3">
-            <a:schemeClr val="accent1"/>
-          </a:fillRef>
-          <a:effectRef idx="2">
-            <a:schemeClr val="accent1"/>
-          </a:effectRef>
-          <a:fontRef idx="minor">
-            <a:schemeClr val="lt1"/>
-          </a:fontRef>
-        </p:style>
-        <p:txBody>
-          <a:bodyPr rtlCol="0" anchor="ctr"/>
-          <a:lstStyle/>
-          <a:p>
-            <a:pPr algn="ctr"/>
-          </a:p>
-        </p:txBody>
-      </p:sp>
-      <p:sp>
-        <p:nvSpPr>
-          <p:cNvPr id="10" name="Rounded Rectangle 9"/>
-          <p:cNvSpPr/>
-          <p:nvPr/>
-        </p:nvSpPr>
-        <p:spPr>
-          <a:xfrm>
-            <a:off x="5829300" y="1783080"/>
-            <a:ext cx="2343150" cy="868680"/>
-          </a:xfrm>
-          <a:prstGeom prst="roundRect">
-            <a:avLst/>
-          </a:prstGeom>
-          <a:solidFill>
-            <a:srgbClr val="FFFFFF"/>
-          </a:solidFill>
-          <a:ln w="19050">
-            <a:solidFill>
-              <a:srgbClr val="0078D4"/>
-            </a:solidFill>
-          </a:ln>
-          <a:effectLst/>
-        </p:spPr>
-        <p:style>
-          <a:lnRef idx="1">
-            <a:schemeClr val="accent1"/>
-          </a:lnRef>
-          <a:fillRef idx="3">
-            <a:schemeClr val="accent1"/>
-          </a:fillRef>
-          <a:effectRef idx="2">
-            <a:schemeClr val="accent1"/>
-          </a:effectRef>
-          <a:fontRef idx="minor">
-            <a:schemeClr val="lt1"/>
-          </a:fontRef>
-        </p:style>
-        <p:txBody>
-          <a:bodyPr rtlCol="0" anchor="ctr" wrap="square"/>
-          <a:lstStyle/>
-          <a:p>
-            <a:pPr algn="ctr"/>
-            <a:r>
-              <a:rPr sz="1200" b="1" i="0">
-                <a:solidFill>
-                  <a:srgbClr val="243A5E"/>
-                </a:solidFill>
-                <a:latin typeface="Segoe UI"/>
-              </a:rPr>
-              <a:t>Foundry Memory</a:t>
-            </a:r>
-          </a:p>
-          <a:p>
-            <a:pPr algn="ctr"/>
-            <a:r>
-              <a:rPr sz="1000" b="0" i="0">
-                <a:solidFill>
-                  <a:srgbClr val="605E5C"/>
-                </a:solidFill>
-                <a:latin typeface="Segoe UI"/>
-              </a:rPr>
-              <a:t>(managed, done)</a:t>
-            </a:r>
-          </a:p>
-        </p:txBody>
-      </p:sp>
-      <p:sp>
-        <p:nvSpPr>
-          <p:cNvPr id="11" name="Right Arrow 10"/>
-          <p:cNvSpPr/>
-          <p:nvPr/>
-        </p:nvSpPr>
-        <p:spPr>
-          <a:xfrm>
-            <a:off x="8154162" y="2162556"/>
-            <a:ext cx="374904" cy="109728"/>
-          </a:xfrm>
-          <a:prstGeom prst="rightArrow">
-            <a:avLst/>
-          </a:prstGeom>
-          <a:solidFill>
-            <a:srgbClr val="00B7C3"/>
-          </a:solidFill>
-          <a:ln>
-            <a:noFill/>
-          </a:ln>
-          <a:effectLst/>
-        </p:spPr>
-        <p:style>
-          <a:lnRef idx="1">
-            <a:schemeClr val="accent1"/>
-          </a:lnRef>
-          <a:fillRef idx="3">
-            <a:schemeClr val="accent1"/>
-          </a:fillRef>
-          <a:effectRef idx="2">
-            <a:schemeClr val="accent1"/>
-          </a:effectRef>
-          <a:fontRef idx="minor">
-            <a:schemeClr val="lt1"/>
-          </a:fontRef>
-        </p:style>
-        <p:txBody>
-          <a:bodyPr rtlCol="0" anchor="ctr"/>
-          <a:lstStyle/>
-          <a:p>
-            <a:pPr algn="ctr"/>
-          </a:p>
-        </p:txBody>
-      </p:sp>
-      <p:sp>
-        <p:nvSpPr>
-          <p:cNvPr id="12" name="Rounded Rectangle 11"/>
-          <p:cNvSpPr/>
-          <p:nvPr/>
-        </p:nvSpPr>
-        <p:spPr>
-          <a:xfrm>
-            <a:off x="8492490" y="1783080"/>
-            <a:ext cx="2343150" cy="868680"/>
-          </a:xfrm>
-          <a:prstGeom prst="roundRect">
-            <a:avLst/>
-          </a:prstGeom>
-          <a:solidFill>
-            <a:srgbClr val="FFFFFF"/>
-          </a:solidFill>
-          <a:ln w="19050">
-            <a:solidFill>
-              <a:srgbClr val="0078D4"/>
-            </a:solidFill>
-          </a:ln>
-          <a:effectLst/>
-        </p:spPr>
-        <p:style>
-          <a:lnRef idx="1">
-            <a:schemeClr val="accent1"/>
-          </a:lnRef>
-          <a:fillRef idx="3">
-            <a:schemeClr val="accent1"/>
-          </a:fillRef>
-          <a:effectRef idx="2">
-            <a:schemeClr val="accent1"/>
-          </a:effectRef>
-          <a:fontRef idx="minor">
-            <a:schemeClr val="lt1"/>
-          </a:fontRef>
-        </p:style>
-        <p:txBody>
-          <a:bodyPr rtlCol="0" anchor="ctr" wrap="square"/>
-          <a:lstStyle/>
-          <a:p>
-            <a:pPr algn="ctr"/>
-            <a:r>
-              <a:rPr sz="1200" b="1" i="0">
-                <a:solidFill>
-                  <a:srgbClr val="243A5E"/>
-                </a:solidFill>
-                <a:latin typeface="Segoe UI"/>
-              </a:rPr>
-              <a:t>+ AI Search</a:t>
-            </a:r>
-          </a:p>
-          <a:p>
-            <a:pPr algn="ctr"/>
-            <a:r>
-              <a:rPr sz="1000" b="0" i="0">
-                <a:solidFill>
-                  <a:srgbClr val="605E5C"/>
-                </a:solidFill>
-                <a:latin typeface="Segoe UI"/>
-              </a:rPr>
-              <a:t>(next)</a:t>
-            </a:r>
-          </a:p>
-        </p:txBody>
-      </p:sp>
-      <p:sp>
-        <p:nvSpPr>
-          <p:cNvPr id="13" name="TextBox 12"/>
-          <p:cNvSpPr txBox="1"/>
-          <p:nvPr/>
-        </p:nvSpPr>
-        <p:spPr>
-          <a:xfrm>
-            <a:off x="502920" y="2880360"/>
-            <a:ext cx="10332720" cy="457200"/>
+            <a:off x="868680" y="3200400"/>
+            <a:ext cx="9601200" cy="914400"/>
           </a:xfrm>
           <a:prstGeom prst="rect">
             <a:avLst/>
@@ -7751,29 +8295,29 @@
           </a:bodyPr>
           <a:lstStyle/>
           <a:p>
-            <a:pPr algn="ctr"/>
-            <a:r>
-              <a:rPr sz="1300" b="0" i="1">
-                <a:solidFill>
-                  <a:srgbClr val="605E5C"/>
-                </a:solidFill>
-                <a:latin typeface="Segoe UI"/>
-              </a:rPr>
-              <a:t>BYO swaps behind one interface · managed is the platform-owned tier · knowledge is next</a:t>
-            </a:r>
-          </a:p>
-        </p:txBody>
-      </p:sp>
-      <p:sp>
-        <p:nvSpPr>
-          <p:cNvPr id="14" name="TextBox 13"/>
+            <a:pPr algn="l"/>
+            <a:r>
+              <a:rPr sz="3800" b="1" i="0">
+                <a:solidFill>
+                  <a:srgbClr val="FFFFFF"/>
+                </a:solidFill>
+                <a:latin typeface="Segoe UI"/>
+              </a:rPr>
+              <a:t>Live</a:t>
+            </a:r>
+          </a:p>
+        </p:txBody>
+      </p:sp>
+      <p:sp>
+        <p:nvSpPr>
+          <p:cNvPr id="6" name="TextBox 5"/>
           <p:cNvSpPr txBox="1"/>
           <p:nvPr/>
         </p:nvSpPr>
         <p:spPr>
           <a:xfrm>
-            <a:off x="502920" y="3474720"/>
-            <a:ext cx="10332720" cy="2286000"/>
+            <a:off x="896112" y="4114800"/>
+            <a:ext cx="9601200" cy="731520"/>
           </a:xfrm>
           <a:prstGeom prst="rect">
             <a:avLst/>
@@ -7786,174 +8330,15 @@
           </a:bodyPr>
           <a:lstStyle/>
           <a:p>
-            <a:pPr algn="l">
-              <a:spcBef>
-                <a:spcPts val="0"/>
-              </a:spcBef>
-              <a:spcAft>
-                <a:spcPts val="500"/>
-              </a:spcAft>
-            </a:pPr>
+            <a:pPr algn="l"/>
             <a:r>
               <a:rPr sz="1800" b="0" i="0">
                 <a:solidFill>
-                  <a:srgbClr val="107C10"/>
-                </a:solidFill>
-                <a:latin typeface="Segoe UI"/>
-              </a:rPr>
-              <a:t>✓  Cosmos (done): partition by /userId · keyless Entra RBAC · serverless · infra/provision-cosmos.ps1</a:t>
-            </a:r>
-          </a:p>
-          <a:p>
-            <a:pPr algn="l">
-              <a:spcBef>
-                <a:spcPts val="0"/>
-              </a:spcBef>
-              <a:spcAft>
-                <a:spcPts val="500"/>
-              </a:spcAft>
-            </a:pPr>
-            <a:r>
-              <a:rPr sz="1800" b="0" i="0">
-                <a:solidFill>
-                  <a:srgbClr val="107C10"/>
-                </a:solidFill>
-                <a:latin typeface="Segoe UI"/>
-              </a:rPr>
-              <a:t>✓  Foundry Memory (done): managed provider, scope by user · embedding deploy + preview + MI role · provision-foundry-memory.ps1</a:t>
-            </a:r>
-          </a:p>
-          <a:p>
-            <a:pPr algn="l">
-              <a:spcBef>
-                <a:spcPts val="400"/>
-              </a:spcBef>
-              <a:spcAft>
-                <a:spcPts val="500"/>
-              </a:spcAft>
-            </a:pPr>
-            <a:r>
-              <a:rPr sz="1800" b="1" i="0">
-                <a:solidFill>
-                  <a:srgbClr val="243A5E"/>
-                </a:solidFill>
-                <a:latin typeface="Segoe UI"/>
-              </a:rPr>
-              <a:t>■  Shared AI Search (next): the knowledge-memory tier — reuse the Lab 03 index · Python parity to follow</a:t>
-            </a:r>
-          </a:p>
-        </p:txBody>
-      </p:sp>
-      <p:sp>
-        <p:nvSpPr>
-          <p:cNvPr id="15" name="Rectangle 14"/>
-          <p:cNvSpPr/>
-          <p:nvPr/>
-        </p:nvSpPr>
-        <p:spPr>
-          <a:xfrm>
-            <a:off x="0" y="6601968"/>
-            <a:ext cx="12192000" cy="256032"/>
-          </a:xfrm>
-          <a:prstGeom prst="rect">
-            <a:avLst/>
-          </a:prstGeom>
-          <a:solidFill>
-            <a:srgbClr val="F3F6FB"/>
-          </a:solidFill>
-          <a:ln>
-            <a:noFill/>
-          </a:ln>
-          <a:effectLst/>
-        </p:spPr>
-        <p:style>
-          <a:lnRef idx="1">
-            <a:schemeClr val="accent1"/>
-          </a:lnRef>
-          <a:fillRef idx="3">
-            <a:schemeClr val="accent1"/>
-          </a:fillRef>
-          <a:effectRef idx="2">
-            <a:schemeClr val="accent1"/>
-          </a:effectRef>
-          <a:fontRef idx="minor">
-            <a:schemeClr val="lt1"/>
-          </a:fontRef>
-        </p:style>
-        <p:txBody>
-          <a:bodyPr rtlCol="0" anchor="ctr"/>
-          <a:lstStyle/>
-          <a:p>
-            <a:pPr algn="ctr"/>
-          </a:p>
-        </p:txBody>
-      </p:sp>
-      <p:sp>
-        <p:nvSpPr>
-          <p:cNvPr id="16" name="TextBox 15"/>
-          <p:cNvSpPr txBox="1"/>
-          <p:nvPr/>
-        </p:nvSpPr>
-        <p:spPr>
-          <a:xfrm>
-            <a:off x="502920" y="6611112"/>
-            <a:ext cx="8229600" cy="228600"/>
-          </a:xfrm>
-          <a:prstGeom prst="rect">
-            <a:avLst/>
-          </a:prstGeom>
-          <a:noFill/>
-        </p:spPr>
-        <p:txBody>
-          <a:bodyPr wrap="square" anchor="ctr" lIns="0" rIns="0" tIns="0" bIns="0">
-            <a:spAutoFit/>
-          </a:bodyPr>
-          <a:lstStyle/>
-          <a:p>
-            <a:pPr algn="l"/>
-            <a:r>
-              <a:rPr sz="900" b="0" i="0">
-                <a:solidFill>
-                  <a:srgbClr val="605E5C"/>
-                </a:solidFill>
-                <a:latin typeface="Segoe UI"/>
-              </a:rPr>
-              <a:t>Agent Modernization Workshops — Lab 06: Agent Memory Strategies   |   Roadmap</a:t>
-            </a:r>
-          </a:p>
-        </p:txBody>
-      </p:sp>
-      <p:sp>
-        <p:nvSpPr>
-          <p:cNvPr id="17" name="TextBox 16"/>
-          <p:cNvSpPr txBox="1"/>
-          <p:nvPr/>
-        </p:nvSpPr>
-        <p:spPr>
-          <a:xfrm>
-            <a:off x="11003280" y="6611112"/>
-            <a:ext cx="731520" cy="228600"/>
-          </a:xfrm>
-          <a:prstGeom prst="rect">
-            <a:avLst/>
-          </a:prstGeom>
-          <a:noFill/>
-        </p:spPr>
-        <p:txBody>
-          <a:bodyPr wrap="square" anchor="ctr" lIns="0" rIns="0" tIns="0" bIns="0">
-            <a:spAutoFit/>
-          </a:bodyPr>
-          <a:lstStyle/>
-          <a:p>
-            <a:pPr algn="r"/>
-            <a:r>
-              <a:rPr sz="900" b="1" i="0">
-                <a:solidFill>
-                  <a:srgbClr val="605E5C"/>
-                </a:solidFill>
-                <a:latin typeface="Segoe UI"/>
-              </a:rPr>
-              <a:t>15</a:t>
+                  <a:srgbClr val="BFD7F0"/>
+                </a:solidFill>
+                <a:latin typeface="Segoe UI"/>
+              </a:rPr>
+              <a:t>Memory changes what the team can answer — seed, then follow up</a:t>
             </a:r>
           </a:p>
         </p:txBody>
@@ -8094,7 +8479,7 @@
                 </a:solidFill>
                 <a:latin typeface="Segoe UI"/>
               </a:rPr>
-              <a:t>GUIDANCE</a:t>
+              <a:t>DEMO</a:t>
             </a:r>
           </a:p>
         </p:txBody>
@@ -8129,7 +8514,7 @@
                 </a:solidFill>
                 <a:latin typeface="Segoe UI"/>
               </a:rPr>
-              <a:t>Design guidance for agent memory</a:t>
+              <a:t>The team remembers — and it shows in the answer</a:t>
             </a:r>
           </a:p>
         </p:txBody>
@@ -8171,7 +8556,7 @@
                 </a:solidFill>
                 <a:latin typeface="Segoe UI"/>
               </a:rPr>
-              <a:t>■  Treat memory as a host concern, not an agent feature</a:t>
+              <a:t>■  Seed one session, then ask a follow-up that omits the details:</a:t>
             </a:r>
           </a:p>
           <a:p>
@@ -8190,9 +8575,89 @@
                 </a:solidFill>
                 <a:latin typeface="Segoe UI"/>
               </a:rPr>
-              <a:t>–  Same seam as skills — inject on read, compact on write</a:t>
-            </a:r>
-          </a:p>
+              <a:t>–  Run 1  —  seed · --memory local  →  prepares the $25,000 / 60-mo offer, SAVES the facts</a:t>
+            </a:r>
+          </a:p>
+          <a:p>
+            <a:pPr algn="l">
+              <a:spcBef>
+                <a:spcPts val="0"/>
+              </a:spcBef>
+              <a:spcAft>
+                <a:spcPts val="300"/>
+              </a:spcAft>
+            </a:pPr>
+            <a:r>
+              <a:rPr sz="1500" b="0" i="0">
+                <a:solidFill>
+                  <a:srgbClr val="201F1E"/>
+                </a:solidFill>
+                <a:latin typeface="Segoe UI"/>
+              </a:rPr>
+              <a:t>–  Run 2  —  follow-up · --memory local  →  “finalize the loan we discussed” → recalls $25,000 · 60-mo · 4.99%</a:t>
+            </a:r>
+          </a:p>
+          <a:p>
+            <a:pPr algn="l">
+              <a:spcBef>
+                <a:spcPts val="0"/>
+              </a:spcBef>
+              <a:spcAft>
+                <a:spcPts val="300"/>
+              </a:spcAft>
+            </a:pPr>
+            <a:r>
+              <a:rPr sz="1500" b="0" i="0">
+                <a:solidFill>
+                  <a:srgbClr val="201F1E"/>
+                </a:solidFill>
+                <a:latin typeface="Segoe UI"/>
+              </a:rPr>
+              <a:t>–  Run 3  —  same follow-up · --memory off  →  “which loan? please re-supply the details”</a:t>
+            </a:r>
+          </a:p>
+          <a:p>
+            <a:pPr algn="l">
+              <a:spcBef>
+                <a:spcPts val="0"/>
+              </a:spcBef>
+              <a:spcAft>
+                <a:spcPts val="500"/>
+              </a:spcAft>
+            </a:pPr>
+            <a:r>
+              <a:rPr sz="1800" b="0" i="0">
+                <a:solidFill>
+                  <a:srgbClr val="107C10"/>
+                </a:solidFill>
+                <a:latin typeface="Segoe UI"/>
+              </a:rPr>
+              <a:t>✓  Same question — memory ON answers it, memory OFF can’t. That’s the difference</a:t>
+            </a:r>
+          </a:p>
+        </p:txBody>
+      </p:sp>
+      <p:sp>
+        <p:nvSpPr>
+          <p:cNvPr id="7" name="TextBox 6"/>
+          <p:cNvSpPr txBox="1"/>
+          <p:nvPr/>
+        </p:nvSpPr>
+        <p:spPr>
+          <a:xfrm>
+            <a:off x="5989320" y="1325880"/>
+            <a:ext cx="5212080" cy="4572000"/>
+          </a:xfrm>
+          <a:prstGeom prst="rect">
+            <a:avLst/>
+          </a:prstGeom>
+          <a:noFill/>
+        </p:spPr>
+        <p:txBody>
+          <a:bodyPr wrap="square" anchor="t" lIns="0" rIns="0" tIns="0" bIns="0">
+            <a:spAutoFit/>
+          </a:bodyPr>
+          <a:lstStyle/>
           <a:p>
             <a:pPr algn="l">
               <a:spcBef>
@@ -8209,7 +8674,7 @@
                 </a:solidFill>
                 <a:latin typeface="Segoe UI"/>
               </a:rPr>
-              <a:t>■  Use tiers — don't force one store to do all four</a:t>
+              <a:t>■  Point out</a:t>
             </a:r>
           </a:p>
           <a:p>
@@ -8228,68 +8693,7 @@
                 </a:solidFill>
                 <a:latin typeface="Segoe UI"/>
               </a:rPr>
-              <a:t>–  Conversation ≠ user memory ≠ state ≠ knowledge</a:t>
-            </a:r>
-          </a:p>
-          <a:p>
-            <a:pPr algn="l">
-              <a:spcBef>
-                <a:spcPts val="400"/>
-              </a:spcBef>
-              <a:spcAft>
-                <a:spcPts val="500"/>
-              </a:spcAft>
-            </a:pPr>
-            <a:r>
-              <a:rPr sz="1800" b="1" i="0">
-                <a:solidFill>
-                  <a:srgbClr val="243A5E"/>
-                </a:solidFill>
-                <a:latin typeface="Segoe UI"/>
-              </a:rPr>
-              <a:t>■  Compact to { summary, facts, decisions, pending } — not a chat log</a:t>
-            </a:r>
-          </a:p>
-        </p:txBody>
-      </p:sp>
-      <p:sp>
-        <p:nvSpPr>
-          <p:cNvPr id="7" name="TextBox 6"/>
-          <p:cNvSpPr txBox="1"/>
-          <p:nvPr/>
-        </p:nvSpPr>
-        <p:spPr>
-          <a:xfrm>
-            <a:off x="5989320" y="1325880"/>
-            <a:ext cx="5212080" cy="4572000"/>
-          </a:xfrm>
-          <a:prstGeom prst="rect">
-            <a:avLst/>
-          </a:prstGeom>
-          <a:noFill/>
-        </p:spPr>
-        <p:txBody>
-          <a:bodyPr wrap="square" anchor="t" lIns="0" rIns="0" tIns="0" bIns="0">
-            <a:spAutoFit/>
-          </a:bodyPr>
-          <a:lstStyle/>
-          <a:p>
-            <a:pPr algn="l">
-              <a:spcBef>
-                <a:spcPts val="400"/>
-              </a:spcBef>
-              <a:spcAft>
-                <a:spcPts val="500"/>
-              </a:spcAft>
-            </a:pPr>
-            <a:r>
-              <a:rPr sz="1800" b="1" i="0">
-                <a:solidFill>
-                  <a:srgbClr val="243A5E"/>
-                </a:solidFill>
-                <a:latin typeface="Segoe UI"/>
-              </a:rPr>
-              <a:t>■  Scope by user — separate from thread</a:t>
+              <a:t>–  The follow-up OMITS the numbers — that’s why recall matters</a:t>
             </a:r>
           </a:p>
           <a:p>
@@ -8308,26 +8712,7 @@
                 </a:solidFill>
                 <a:latin typeface="Segoe UI"/>
               </a:rPr>
-              <a:t>–  customerId persists; threadId is per-run</a:t>
-            </a:r>
-          </a:p>
-          <a:p>
-            <a:pPr algn="l">
-              <a:spcBef>
-                <a:spcPts val="400"/>
-              </a:spcBef>
-              <a:spcAft>
-                <a:spcPts val="500"/>
-              </a:spcAft>
-            </a:pPr>
-            <a:r>
-              <a:rPr sz="1800" b="1" i="0">
-                <a:solidFill>
-                  <a:srgbClr val="243A5E"/>
-                </a:solidFill>
-                <a:latin typeface="Segoe UI"/>
-              </a:rPr>
-              <a:t>■  Store decisions + facts, not raw PII</a:t>
+              <a:t>–  Memory OFF signals absence (asks for details) — it doesn’t bluff</a:t>
             </a:r>
           </a:p>
           <a:p>
@@ -8346,26 +8731,7 @@
                 </a:solidFill>
                 <a:latin typeface="Segoe UI"/>
               </a:rPr>
-              <a:t>–  Minimize what's durable — least data that gives continuity</a:t>
-            </a:r>
-          </a:p>
-          <a:p>
-            <a:pPr algn="l">
-              <a:spcBef>
-                <a:spcPts val="400"/>
-              </a:spcBef>
-              <a:spcAft>
-                <a:spcPts val="500"/>
-              </a:spcAft>
-            </a:pPr>
-            <a:r>
-              <a:rPr sz="1800" b="1" i="0">
-                <a:solidFill>
-                  <a:srgbClr val="243A5E"/>
-                </a:solidFill>
-                <a:latin typeface="Segoe UI"/>
-              </a:rPr>
-              <a:t>■  Default OFF — memory is an explicit choice</a:t>
+              <a:t>–  The store is a plain JSON file under .memory/ — open it and show it</a:t>
             </a:r>
           </a:p>
           <a:p>
@@ -8374,25 +8740,6 @@
                 <a:spcPts val="0"/>
               </a:spcBef>
               <a:spcAft>
-                <a:spcPts val="300"/>
-              </a:spcAft>
-            </a:pPr>
-            <a:r>
-              <a:rPr sz="1500" b="0" i="0">
-                <a:solidFill>
-                  <a:srgbClr val="201F1E"/>
-                </a:solidFill>
-                <a:latin typeface="Segoe UI"/>
-              </a:rPr>
-              <a:t>–  Keeps stateless demos deterministic + auditable</a:t>
-            </a:r>
-          </a:p>
-          <a:p>
-            <a:pPr algn="l">
-              <a:spcBef>
-                <a:spcPts val="0"/>
-              </a:spcBef>
-              <a:spcAft>
                 <a:spcPts val="500"/>
               </a:spcAft>
             </a:pPr>
@@ -8403,7 +8750,7 @@
                 </a:solidFill>
                 <a:latin typeface="Segoe UI"/>
               </a:rPr>
-              <a:t>✓  BYO-first → managed when you want platform retrieval</a:t>
+              <a:t>✓  Validated live — .NET on Foundry gpt-4o</a:t>
             </a:r>
           </a:p>
         </p:txBody>
@@ -8482,7 +8829,7 @@
                 </a:solidFill>
                 <a:latin typeface="Segoe UI"/>
               </a:rPr>
-              <a:t>Agent Modernization Workshops — Lab 06: Agent Memory Strategies   |   Guidance</a:t>
+              <a:t>Agent Modernization Workshops — Lab 06: Agent Memory Strategies   |   Demo</a:t>
             </a:r>
           </a:p>
         </p:txBody>
@@ -8518,6 +8865,122 @@
                 <a:latin typeface="Segoe UI"/>
               </a:rPr>
               <a:t>16</a:t>
+            </a:r>
+          </a:p>
+        </p:txBody>
+      </p:sp>
+      <p:sp>
+        <p:nvSpPr>
+          <p:cNvPr id="11" name="Rounded Rectangle 10"/>
+          <p:cNvSpPr/>
+          <p:nvPr/>
+        </p:nvSpPr>
+        <p:spPr>
+          <a:xfrm>
+            <a:off x="502920" y="5961888"/>
+            <a:ext cx="10332720" cy="530352"/>
+          </a:xfrm>
+          <a:prstGeom prst="roundRect">
+            <a:avLst/>
+          </a:prstGeom>
+          <a:solidFill>
+            <a:srgbClr val="E3F3F6"/>
+          </a:solidFill>
+          <a:ln w="15875">
+            <a:solidFill>
+              <a:srgbClr val="00B7C3"/>
+            </a:solidFill>
+          </a:ln>
+          <a:effectLst/>
+        </p:spPr>
+        <p:style>
+          <a:lnRef idx="1">
+            <a:schemeClr val="accent1"/>
+          </a:lnRef>
+          <a:fillRef idx="3">
+            <a:schemeClr val="accent1"/>
+          </a:fillRef>
+          <a:effectRef idx="2">
+            <a:schemeClr val="accent1"/>
+          </a:effectRef>
+          <a:fontRef idx="minor">
+            <a:schemeClr val="lt1"/>
+          </a:fontRef>
+        </p:style>
+        <p:txBody>
+          <a:bodyPr rtlCol="0" anchor="ctr"/>
+          <a:lstStyle/>
+          <a:p>
+            <a:pPr algn="ctr"/>
+          </a:p>
+        </p:txBody>
+      </p:sp>
+      <p:sp>
+        <p:nvSpPr>
+          <p:cNvPr id="12" name="TextBox 11"/>
+          <p:cNvSpPr txBox="1"/>
+          <p:nvPr/>
+        </p:nvSpPr>
+        <p:spPr>
+          <a:xfrm>
+            <a:off x="704088" y="5961888"/>
+            <a:ext cx="1417320" cy="530352"/>
+          </a:xfrm>
+          <a:prstGeom prst="rect">
+            <a:avLst/>
+          </a:prstGeom>
+          <a:noFill/>
+        </p:spPr>
+        <p:txBody>
+          <a:bodyPr wrap="square" anchor="ctr" lIns="0" rIns="0" tIns="0" bIns="0">
+            <a:spAutoFit/>
+          </a:bodyPr>
+          <a:lstStyle/>
+          <a:p>
+            <a:pPr algn="l"/>
+            <a:r>
+              <a:rPr sz="1400" b="1" i="0">
+                <a:solidFill>
+                  <a:srgbClr val="00B7C3"/>
+                </a:solidFill>
+                <a:latin typeface="Segoe UI"/>
+              </a:rPr>
+              <a:t>▶ DEMO</a:t>
+            </a:r>
+          </a:p>
+        </p:txBody>
+      </p:sp>
+      <p:sp>
+        <p:nvSpPr>
+          <p:cNvPr id="13" name="TextBox 12"/>
+          <p:cNvSpPr txBox="1"/>
+          <p:nvPr/>
+        </p:nvSpPr>
+        <p:spPr>
+          <a:xfrm>
+            <a:off x="2057400" y="5961888"/>
+            <a:ext cx="8595360" cy="530352"/>
+          </a:xfrm>
+          <a:prstGeom prst="rect">
+            <a:avLst/>
+          </a:prstGeom>
+          <a:noFill/>
+        </p:spPr>
+        <p:txBody>
+          <a:bodyPr wrap="square" anchor="ctr" lIns="0" rIns="0" tIns="0" bIns="0">
+            <a:spAutoFit/>
+          </a:bodyPr>
+          <a:lstStyle/>
+          <a:p>
+            <a:pPr algn="l"/>
+            <a:r>
+              <a:rPr sz="1300" b="1" i="0">
+                <a:solidFill>
+                  <a:srgbClr val="243A5E"/>
+                </a:solidFill>
+                <a:latin typeface="Segoe UI"/>
+              </a:rPr>
+              <a:t>seed → --memory local  (team recalls the loan)   vs   --memory off  (team has to ask)</a:t>
             </a:r>
           </a:p>
         </p:txBody>
@@ -8658,7 +9121,7 @@
                 </a:solidFill>
                 <a:latin typeface="Segoe UI"/>
               </a:rPr>
-              <a:t>WRAP</a:t>
+              <a:t>HOW</a:t>
             </a:r>
           </a:p>
         </p:txBody>
@@ -8693,7 +9156,7 @@
                 </a:solidFill>
                 <a:latin typeface="Segoe UI"/>
               </a:rPr>
-              <a:t>Take-aways &amp; where to next</a:t>
+              <a:t>--memory: four modes, two memory models</a:t>
             </a:r>
           </a:p>
         </p:txBody>
@@ -8735,7 +9198,7 @@
                 </a:solidFill>
                 <a:latin typeface="Segoe UI"/>
               </a:rPr>
-              <a:t>■  What we added this session:</a:t>
+              <a:t>■  off   —  default; clean, stateless runs (every other demo)</a:t>
             </a:r>
           </a:p>
           <a:p>
@@ -8744,17 +9207,17 @@
                 <a:spcPts val="0"/>
               </a:spcBef>
               <a:spcAft>
-                <a:spcPts val="300"/>
-              </a:spcAft>
-            </a:pPr>
-            <a:r>
-              <a:rPr sz="1500" b="0" i="0">
+                <a:spcPts val="500"/>
+              </a:spcAft>
+            </a:pPr>
+            <a:r>
+              <a:rPr sz="1800" b="0" i="0">
                 <a:solidFill>
                   <a:srgbClr val="107C10"/>
                 </a:solidFill>
                 <a:latin typeface="Segoe UI"/>
               </a:rPr>
-              <a:t>✓  Cross-session memory on the SAME seams — recall→inject, record→compact→save</a:t>
+              <a:t>✓  local —  BYO file store, no Azure  —  verified live</a:t>
             </a:r>
           </a:p>
           <a:p>
@@ -8763,17 +9226,17 @@
                 <a:spcPts val="0"/>
               </a:spcBef>
               <a:spcAft>
-                <a:spcPts val="300"/>
-              </a:spcAft>
-            </a:pPr>
-            <a:r>
-              <a:rPr sz="1500" b="0" i="0">
+                <a:spcPts val="500"/>
+              </a:spcAft>
+            </a:pPr>
+            <a:r>
+              <a:rPr sz="1800" b="0" i="0">
                 <a:solidFill>
                   <a:srgbClr val="107C10"/>
                 </a:solidFill>
                 <a:latin typeface="Segoe UI"/>
               </a:rPr>
-              <a:t>✓  All three tiers verified live — local + cosmos (BYO) and foundry (platform-managed)</a:t>
+              <a:t>✓  cosmos —  BYO managed store (Cosmos DB)  —  verified live</a:t>
             </a:r>
           </a:p>
           <a:p>
@@ -8782,17 +9245,59 @@
                 <a:spcPts val="0"/>
               </a:spcBef>
               <a:spcAft>
-                <a:spcPts val="300"/>
-              </a:spcAft>
-            </a:pPr>
-            <a:r>
-              <a:rPr sz="1500" b="0" i="0">
+                <a:spcPts val="500"/>
+              </a:spcAft>
+            </a:pPr>
+            <a:r>
+              <a:rPr sz="1800" b="0" i="0">
                 <a:solidFill>
                   <a:srgbClr val="107C10"/>
                 </a:solidFill>
                 <a:latin typeface="Segoe UI"/>
               </a:rPr>
-              <a:t>✓  Deterministic compaction — keep facts / decisions / pending, not transcripts</a:t>
+              <a:t>✓  foundry — platform-managed Memory (preview)  —  verified live</a:t>
+            </a:r>
+          </a:p>
+        </p:txBody>
+      </p:sp>
+      <p:sp>
+        <p:nvSpPr>
+          <p:cNvPr id="7" name="TextBox 6"/>
+          <p:cNvSpPr txBox="1"/>
+          <p:nvPr/>
+        </p:nvSpPr>
+        <p:spPr>
+          <a:xfrm>
+            <a:off x="5989320" y="1325880"/>
+            <a:ext cx="5212080" cy="4572000"/>
+          </a:xfrm>
+          <a:prstGeom prst="rect">
+            <a:avLst/>
+          </a:prstGeom>
+          <a:noFill/>
+        </p:spPr>
+        <p:txBody>
+          <a:bodyPr wrap="square" anchor="t" lIns="0" rIns="0" tIns="0" bIns="0">
+            <a:spAutoFit/>
+          </a:bodyPr>
+          <a:lstStyle/>
+          <a:p>
+            <a:pPr algn="l">
+              <a:spcBef>
+                <a:spcPts val="400"/>
+              </a:spcBef>
+              <a:spcAft>
+                <a:spcPts val="500"/>
+              </a:spcAft>
+            </a:pPr>
+            <a:r>
+              <a:rPr sz="1800" b="1" i="0">
+                <a:solidFill>
+                  <a:srgbClr val="243A5E"/>
+                </a:solidFill>
+                <a:latin typeface="Segoe UI"/>
+              </a:rPr>
+              <a:t>■  BYO tiers (local + cosmos)</a:t>
             </a:r>
           </a:p>
           <a:p>
@@ -8807,36 +9312,32 @@
             <a:r>
               <a:rPr sz="1500" b="0" i="0">
                 <a:solidFill>
-                  <a:srgbClr val="107C10"/>
-                </a:solidFill>
-                <a:latin typeface="Segoe UI"/>
-              </a:rPr>
-              <a:t>✓  New memory tiers + IaC (Cosmos + Foundry role grant) — no agent or workflow rewrites</a:t>
-            </a:r>
-          </a:p>
-        </p:txBody>
-      </p:sp>
-      <p:sp>
-        <p:nvSpPr>
-          <p:cNvPr id="7" name="TextBox 6"/>
-          <p:cNvSpPr txBox="1"/>
-          <p:nvPr/>
-        </p:nvSpPr>
-        <p:spPr>
-          <a:xfrm>
-            <a:off x="5989320" y="1325880"/>
-            <a:ext cx="5212080" cy="4572000"/>
-          </a:xfrm>
-          <a:prstGeom prst="rect">
-            <a:avLst/>
-          </a:prstGeom>
-          <a:noFill/>
-        </p:spPr>
-        <p:txBody>
-          <a:bodyPr wrap="square" anchor="t" lIns="0" rIns="0" tIns="0" bIns="0">
-            <a:spAutoFit/>
-          </a:bodyPr>
-          <a:lstStyle/>
+                  <a:srgbClr val="201F1E"/>
+                </a:solidFill>
+                <a:latin typeface="Segoe UI"/>
+              </a:rPr>
+              <a:t>–  One contract: IMemoryStore — Load / Save / Describe</a:t>
+            </a:r>
+          </a:p>
+          <a:p>
+            <a:pPr algn="l">
+              <a:spcBef>
+                <a:spcPts val="0"/>
+              </a:spcBef>
+              <a:spcAft>
+                <a:spcPts val="300"/>
+              </a:spcAft>
+            </a:pPr>
+            <a:r>
+              <a:rPr sz="1500" b="0" i="0">
+                <a:solidFill>
+                  <a:srgbClr val="201F1E"/>
+                </a:solidFill>
+                <a:latin typeface="Segoe UI"/>
+              </a:rPr>
+              <a:t>–  Swap the store — app, agents, and workflow stay identical</a:t>
+            </a:r>
+          </a:p>
           <a:p>
             <a:pPr algn="l">
               <a:spcBef>
@@ -8853,7 +9354,7 @@
                 </a:solidFill>
                 <a:latin typeface="Segoe UI"/>
               </a:rPr>
-              <a:t>■  Where to next</a:t>
+              <a:t>■  Managed tier (foundry)</a:t>
             </a:r>
           </a:p>
           <a:p>
@@ -8872,7 +9373,7 @@
                 </a:solidFill>
                 <a:latin typeface="Segoe UI"/>
               </a:rPr>
-              <a:t>–  Cosmos BYO store + IaC — done (keyless, serverless, /userId)</a:t>
+              <a:t>–  FoundryMemoryProvider on a single agent + session — platform extracts/embeds/recalls</a:t>
             </a:r>
           </a:p>
           <a:p>
@@ -8881,112 +9382,17 @@
                 <a:spcPts val="0"/>
               </a:spcBef>
               <a:spcAft>
-                <a:spcPts val="300"/>
-              </a:spcAft>
-            </a:pPr>
-            <a:r>
-              <a:rPr sz="1500" b="0" i="0">
-                <a:solidFill>
-                  <a:srgbClr val="201F1E"/>
-                </a:solidFill>
-                <a:latin typeface="Segoe UI"/>
-              </a:rPr>
-              <a:t>–  Foundry-managed Memory — done (embedding + preview + MI role)</a:t>
-            </a:r>
-          </a:p>
-          <a:p>
-            <a:pPr algn="l">
-              <a:spcBef>
-                <a:spcPts val="0"/>
-              </a:spcBef>
-              <a:spcAft>
-                <a:spcPts val="300"/>
-              </a:spcAft>
-            </a:pPr>
-            <a:r>
-              <a:rPr sz="1500" b="0" i="0">
-                <a:solidFill>
-                  <a:srgbClr val="201F1E"/>
-                </a:solidFill>
-                <a:latin typeface="Segoe UI"/>
-              </a:rPr>
-              <a:t>–  Shared AI Search knowledge tier + Python parity</a:t>
-            </a:r>
-          </a:p>
-          <a:p>
-            <a:pPr algn="l">
-              <a:spcBef>
-                <a:spcPts val="400"/>
-              </a:spcBef>
-              <a:spcAft>
                 <a:spcPts val="500"/>
               </a:spcAft>
             </a:pPr>
             <a:r>
-              <a:rPr sz="1800" b="1" i="0">
-                <a:solidFill>
-                  <a:srgbClr val="243A5E"/>
-                </a:solidFill>
-                <a:latin typeface="Segoe UI"/>
-              </a:rPr>
-              <a:t>■  Take-away</a:t>
-            </a:r>
-          </a:p>
-          <a:p>
-            <a:pPr algn="l">
-              <a:spcBef>
-                <a:spcPts val="0"/>
-              </a:spcBef>
-              <a:spcAft>
-                <a:spcPts val="300"/>
-              </a:spcAft>
-            </a:pPr>
-            <a:r>
-              <a:rPr sz="1500" b="0" i="0">
-                <a:solidFill>
-                  <a:srgbClr val="201F1E"/>
-                </a:solidFill>
-                <a:latin typeface="Segoe UI"/>
-              </a:rPr>
-              <a:t>–  Memory is a host concern — add it on seams, not rewrites</a:t>
-            </a:r>
-          </a:p>
-          <a:p>
-            <a:pPr algn="l">
-              <a:spcBef>
-                <a:spcPts val="400"/>
-              </a:spcBef>
-              <a:spcAft>
-                <a:spcPts val="500"/>
-              </a:spcAft>
-            </a:pPr>
-            <a:r>
-              <a:rPr sz="1800" b="1" i="0">
-                <a:solidFill>
-                  <a:srgbClr val="243A5E"/>
-                </a:solidFill>
-                <a:latin typeface="Segoe UI"/>
-              </a:rPr>
-              <a:t>■  github.com/bradrlaw/agent-modernization-workshops</a:t>
-            </a:r>
-          </a:p>
-          <a:p>
-            <a:pPr algn="l">
-              <a:spcBef>
-                <a:spcPts val="0"/>
-              </a:spcBef>
-              <a:spcAft>
-                <a:spcPts val="300"/>
-              </a:spcAft>
-            </a:pPr>
-            <a:r>
-              <a:rPr sz="1500" b="0" i="0">
-                <a:solidFill>
-                  <a:srgbClr val="201F1E"/>
-                </a:solidFill>
-                <a:latin typeface="Segoe UI"/>
-              </a:rPr>
-              <a:t>–  Brad.Lawrence@microsoft.com</a:t>
+              <a:rPr sz="1800" b="0" i="0">
+                <a:solidFill>
+                  <a:srgbClr val="107C10"/>
+                </a:solidFill>
+                <a:latin typeface="Segoe UI"/>
+              </a:rPr>
+              <a:t>✓  Honest status banner — prints the backend it truly used</a:t>
             </a:r>
           </a:p>
         </p:txBody>
@@ -9065,7 +9471,7 @@
                 </a:solidFill>
                 <a:latin typeface="Segoe UI"/>
               </a:rPr>
-              <a:t>Agent Modernization Workshops — Lab 06: Agent Memory Strategies   |   Wrap</a:t>
+              <a:t>Agent Modernization Workshops — Lab 06: Agent Memory Strategies   |   How</a:t>
             </a:r>
           </a:p>
         </p:txBody>
@@ -9101,6 +9507,1375 @@
                 <a:latin typeface="Segoe UI"/>
               </a:rPr>
               <a:t>17</a:t>
+            </a:r>
+          </a:p>
+        </p:txBody>
+      </p:sp>
+    </p:spTree>
+  </p:cSld>
+  <p:clrMapOvr>
+    <a:masterClrMapping/>
+  </p:clrMapOvr>
+</p:sld>
+</file>
+
+<file path=ppt/slides/slide18.xml><?xml version="1.0" encoding="utf-8"?>
+<p:sld xmlns:a="http://schemas.openxmlformats.org/drawingml/2006/main" xmlns:p="http://schemas.openxmlformats.org/presentationml/2006/main" xmlns:r="http://schemas.openxmlformats.org/officeDocument/2006/relationships">
+  <p:cSld>
+    <p:spTree>
+      <p:nvGrpSpPr>
+        <p:cNvPr id="1" name=""/>
+        <p:cNvGrpSpPr/>
+        <p:nvPr/>
+      </p:nvGrpSpPr>
+      <p:grpSpPr/>
+      <p:sp>
+        <p:nvSpPr>
+          <p:cNvPr id="2" name="Rectangle 1"/>
+          <p:cNvSpPr/>
+          <p:nvPr/>
+        </p:nvSpPr>
+        <p:spPr>
+          <a:xfrm>
+            <a:off x="0" y="0"/>
+            <a:ext cx="12192000" cy="1051560"/>
+          </a:xfrm>
+          <a:prstGeom prst="rect">
+            <a:avLst/>
+          </a:prstGeom>
+          <a:solidFill>
+            <a:srgbClr val="243A5E"/>
+          </a:solidFill>
+          <a:ln>
+            <a:noFill/>
+          </a:ln>
+          <a:effectLst/>
+        </p:spPr>
+        <p:style>
+          <a:lnRef idx="1">
+            <a:schemeClr val="accent1"/>
+          </a:lnRef>
+          <a:fillRef idx="3">
+            <a:schemeClr val="accent1"/>
+          </a:fillRef>
+          <a:effectRef idx="2">
+            <a:schemeClr val="accent1"/>
+          </a:effectRef>
+          <a:fontRef idx="minor">
+            <a:schemeClr val="lt1"/>
+          </a:fontRef>
+        </p:style>
+        <p:txBody>
+          <a:bodyPr rtlCol="0" anchor="ctr"/>
+          <a:lstStyle/>
+          <a:p>
+            <a:pPr algn="ctr"/>
+          </a:p>
+        </p:txBody>
+      </p:sp>
+      <p:sp>
+        <p:nvSpPr>
+          <p:cNvPr id="3" name="Rectangle 2"/>
+          <p:cNvSpPr/>
+          <p:nvPr/>
+        </p:nvSpPr>
+        <p:spPr>
+          <a:xfrm>
+            <a:off x="0" y="1051560"/>
+            <a:ext cx="12192000" cy="54864"/>
+          </a:xfrm>
+          <a:prstGeom prst="rect">
+            <a:avLst/>
+          </a:prstGeom>
+          <a:solidFill>
+            <a:srgbClr val="00B7C3"/>
+          </a:solidFill>
+          <a:ln>
+            <a:noFill/>
+          </a:ln>
+          <a:effectLst/>
+        </p:spPr>
+        <p:style>
+          <a:lnRef idx="1">
+            <a:schemeClr val="accent1"/>
+          </a:lnRef>
+          <a:fillRef idx="3">
+            <a:schemeClr val="accent1"/>
+          </a:fillRef>
+          <a:effectRef idx="2">
+            <a:schemeClr val="accent1"/>
+          </a:effectRef>
+          <a:fontRef idx="minor">
+            <a:schemeClr val="lt1"/>
+          </a:fontRef>
+        </p:style>
+        <p:txBody>
+          <a:bodyPr rtlCol="0" anchor="ctr"/>
+          <a:lstStyle/>
+          <a:p>
+            <a:pPr algn="ctr"/>
+          </a:p>
+        </p:txBody>
+      </p:sp>
+      <p:sp>
+        <p:nvSpPr>
+          <p:cNvPr id="4" name="TextBox 3"/>
+          <p:cNvSpPr txBox="1"/>
+          <p:nvPr/>
+        </p:nvSpPr>
+        <p:spPr>
+          <a:xfrm>
+            <a:off x="502920" y="164592"/>
+            <a:ext cx="10058400" cy="274320"/>
+          </a:xfrm>
+          <a:prstGeom prst="rect">
+            <a:avLst/>
+          </a:prstGeom>
+          <a:noFill/>
+        </p:spPr>
+        <p:txBody>
+          <a:bodyPr wrap="square" anchor="t" lIns="0" rIns="0" tIns="0" bIns="0">
+            <a:spAutoFit/>
+          </a:bodyPr>
+          <a:lstStyle/>
+          <a:p>
+            <a:pPr algn="l"/>
+            <a:r>
+              <a:rPr sz="1200" b="1" i="0">
+                <a:solidFill>
+                  <a:srgbClr val="00B7C3"/>
+                </a:solidFill>
+                <a:latin typeface="Segoe UI"/>
+              </a:rPr>
+              <a:t>ROADMAP</a:t>
+            </a:r>
+          </a:p>
+        </p:txBody>
+      </p:sp>
+      <p:sp>
+        <p:nvSpPr>
+          <p:cNvPr id="5" name="TextBox 4"/>
+          <p:cNvSpPr txBox="1"/>
+          <p:nvPr/>
+        </p:nvSpPr>
+        <p:spPr>
+          <a:xfrm>
+            <a:off x="502920" y="420624"/>
+            <a:ext cx="10972800" cy="566928"/>
+          </a:xfrm>
+          <a:prstGeom prst="rect">
+            <a:avLst/>
+          </a:prstGeom>
+          <a:noFill/>
+        </p:spPr>
+        <p:txBody>
+          <a:bodyPr wrap="square" anchor="ctr" lIns="0" rIns="0" tIns="0" bIns="0">
+            <a:spAutoFit/>
+          </a:bodyPr>
+          <a:lstStyle/>
+          <a:p>
+            <a:pPr algn="l"/>
+            <a:r>
+              <a:rPr sz="2600" b="1" i="0">
+                <a:solidFill>
+                  <a:srgbClr val="FFFFFF"/>
+                </a:solidFill>
+                <a:latin typeface="Segoe UI"/>
+              </a:rPr>
+              <a:t>From file, to Cosmos, to platform-managed</a:t>
+            </a:r>
+          </a:p>
+        </p:txBody>
+      </p:sp>
+      <p:sp>
+        <p:nvSpPr>
+          <p:cNvPr id="6" name="Rounded Rectangle 5"/>
+          <p:cNvSpPr/>
+          <p:nvPr/>
+        </p:nvSpPr>
+        <p:spPr>
+          <a:xfrm>
+            <a:off x="502920" y="1783080"/>
+            <a:ext cx="2343150" cy="868680"/>
+          </a:xfrm>
+          <a:prstGeom prst="roundRect">
+            <a:avLst/>
+          </a:prstGeom>
+          <a:solidFill>
+            <a:srgbClr val="FFFFFF"/>
+          </a:solidFill>
+          <a:ln w="19050">
+            <a:solidFill>
+              <a:srgbClr val="0078D4"/>
+            </a:solidFill>
+          </a:ln>
+          <a:effectLst/>
+        </p:spPr>
+        <p:style>
+          <a:lnRef idx="1">
+            <a:schemeClr val="accent1"/>
+          </a:lnRef>
+          <a:fillRef idx="3">
+            <a:schemeClr val="accent1"/>
+          </a:fillRef>
+          <a:effectRef idx="2">
+            <a:schemeClr val="accent1"/>
+          </a:effectRef>
+          <a:fontRef idx="minor">
+            <a:schemeClr val="lt1"/>
+          </a:fontRef>
+        </p:style>
+        <p:txBody>
+          <a:bodyPr rtlCol="0" anchor="ctr" wrap="square"/>
+          <a:lstStyle/>
+          <a:p>
+            <a:pPr algn="ctr"/>
+            <a:r>
+              <a:rPr sz="1200" b="1" i="0">
+                <a:solidFill>
+                  <a:srgbClr val="243A5E"/>
+                </a:solidFill>
+                <a:latin typeface="Segoe UI"/>
+              </a:rPr>
+              <a:t>local file</a:t>
+            </a:r>
+          </a:p>
+          <a:p>
+            <a:pPr algn="ctr"/>
+            <a:r>
+              <a:rPr sz="1000" b="0" i="0">
+                <a:solidFill>
+                  <a:srgbClr val="605E5C"/>
+                </a:solidFill>
+                <a:latin typeface="Segoe UI"/>
+              </a:rPr>
+              <a:t>(done)</a:t>
+            </a:r>
+          </a:p>
+        </p:txBody>
+      </p:sp>
+      <p:sp>
+        <p:nvSpPr>
+          <p:cNvPr id="7" name="Right Arrow 6"/>
+          <p:cNvSpPr/>
+          <p:nvPr/>
+        </p:nvSpPr>
+        <p:spPr>
+          <a:xfrm>
+            <a:off x="2827782" y="2162556"/>
+            <a:ext cx="374904" cy="109728"/>
+          </a:xfrm>
+          <a:prstGeom prst="rightArrow">
+            <a:avLst/>
+          </a:prstGeom>
+          <a:solidFill>
+            <a:srgbClr val="00B7C3"/>
+          </a:solidFill>
+          <a:ln>
+            <a:noFill/>
+          </a:ln>
+          <a:effectLst/>
+        </p:spPr>
+        <p:style>
+          <a:lnRef idx="1">
+            <a:schemeClr val="accent1"/>
+          </a:lnRef>
+          <a:fillRef idx="3">
+            <a:schemeClr val="accent1"/>
+          </a:fillRef>
+          <a:effectRef idx="2">
+            <a:schemeClr val="accent1"/>
+          </a:effectRef>
+          <a:fontRef idx="minor">
+            <a:schemeClr val="lt1"/>
+          </a:fontRef>
+        </p:style>
+        <p:txBody>
+          <a:bodyPr rtlCol="0" anchor="ctr"/>
+          <a:lstStyle/>
+          <a:p>
+            <a:pPr algn="ctr"/>
+          </a:p>
+        </p:txBody>
+      </p:sp>
+      <p:sp>
+        <p:nvSpPr>
+          <p:cNvPr id="8" name="Rounded Rectangle 7"/>
+          <p:cNvSpPr/>
+          <p:nvPr/>
+        </p:nvSpPr>
+        <p:spPr>
+          <a:xfrm>
+            <a:off x="3166110" y="1783080"/>
+            <a:ext cx="2343150" cy="868680"/>
+          </a:xfrm>
+          <a:prstGeom prst="roundRect">
+            <a:avLst/>
+          </a:prstGeom>
+          <a:solidFill>
+            <a:srgbClr val="FFFFFF"/>
+          </a:solidFill>
+          <a:ln w="19050">
+            <a:solidFill>
+              <a:srgbClr val="0078D4"/>
+            </a:solidFill>
+          </a:ln>
+          <a:effectLst/>
+        </p:spPr>
+        <p:style>
+          <a:lnRef idx="1">
+            <a:schemeClr val="accent1"/>
+          </a:lnRef>
+          <a:fillRef idx="3">
+            <a:schemeClr val="accent1"/>
+          </a:fillRef>
+          <a:effectRef idx="2">
+            <a:schemeClr val="accent1"/>
+          </a:effectRef>
+          <a:fontRef idx="minor">
+            <a:schemeClr val="lt1"/>
+          </a:fontRef>
+        </p:style>
+        <p:txBody>
+          <a:bodyPr rtlCol="0" anchor="ctr" wrap="square"/>
+          <a:lstStyle/>
+          <a:p>
+            <a:pPr algn="ctr"/>
+            <a:r>
+              <a:rPr sz="1200" b="1" i="0">
+                <a:solidFill>
+                  <a:srgbClr val="243A5E"/>
+                </a:solidFill>
+                <a:latin typeface="Segoe UI"/>
+              </a:rPr>
+              <a:t>Cosmos DB</a:t>
+            </a:r>
+          </a:p>
+          <a:p>
+            <a:pPr algn="ctr"/>
+            <a:r>
+              <a:rPr sz="1000" b="0" i="0">
+                <a:solidFill>
+                  <a:srgbClr val="605E5C"/>
+                </a:solidFill>
+                <a:latin typeface="Segoe UI"/>
+              </a:rPr>
+              <a:t>(done)</a:t>
+            </a:r>
+          </a:p>
+        </p:txBody>
+      </p:sp>
+      <p:sp>
+        <p:nvSpPr>
+          <p:cNvPr id="9" name="Right Arrow 8"/>
+          <p:cNvSpPr/>
+          <p:nvPr/>
+        </p:nvSpPr>
+        <p:spPr>
+          <a:xfrm>
+            <a:off x="5490972" y="2162556"/>
+            <a:ext cx="374904" cy="109728"/>
+          </a:xfrm>
+          <a:prstGeom prst="rightArrow">
+            <a:avLst/>
+          </a:prstGeom>
+          <a:solidFill>
+            <a:srgbClr val="00B7C3"/>
+          </a:solidFill>
+          <a:ln>
+            <a:noFill/>
+          </a:ln>
+          <a:effectLst/>
+        </p:spPr>
+        <p:style>
+          <a:lnRef idx="1">
+            <a:schemeClr val="accent1"/>
+          </a:lnRef>
+          <a:fillRef idx="3">
+            <a:schemeClr val="accent1"/>
+          </a:fillRef>
+          <a:effectRef idx="2">
+            <a:schemeClr val="accent1"/>
+          </a:effectRef>
+          <a:fontRef idx="minor">
+            <a:schemeClr val="lt1"/>
+          </a:fontRef>
+        </p:style>
+        <p:txBody>
+          <a:bodyPr rtlCol="0" anchor="ctr"/>
+          <a:lstStyle/>
+          <a:p>
+            <a:pPr algn="ctr"/>
+          </a:p>
+        </p:txBody>
+      </p:sp>
+      <p:sp>
+        <p:nvSpPr>
+          <p:cNvPr id="10" name="Rounded Rectangle 9"/>
+          <p:cNvSpPr/>
+          <p:nvPr/>
+        </p:nvSpPr>
+        <p:spPr>
+          <a:xfrm>
+            <a:off x="5829300" y="1783080"/>
+            <a:ext cx="2343150" cy="868680"/>
+          </a:xfrm>
+          <a:prstGeom prst="roundRect">
+            <a:avLst/>
+          </a:prstGeom>
+          <a:solidFill>
+            <a:srgbClr val="FFFFFF"/>
+          </a:solidFill>
+          <a:ln w="19050">
+            <a:solidFill>
+              <a:srgbClr val="0078D4"/>
+            </a:solidFill>
+          </a:ln>
+          <a:effectLst/>
+        </p:spPr>
+        <p:style>
+          <a:lnRef idx="1">
+            <a:schemeClr val="accent1"/>
+          </a:lnRef>
+          <a:fillRef idx="3">
+            <a:schemeClr val="accent1"/>
+          </a:fillRef>
+          <a:effectRef idx="2">
+            <a:schemeClr val="accent1"/>
+          </a:effectRef>
+          <a:fontRef idx="minor">
+            <a:schemeClr val="lt1"/>
+          </a:fontRef>
+        </p:style>
+        <p:txBody>
+          <a:bodyPr rtlCol="0" anchor="ctr" wrap="square"/>
+          <a:lstStyle/>
+          <a:p>
+            <a:pPr algn="ctr"/>
+            <a:r>
+              <a:rPr sz="1200" b="1" i="0">
+                <a:solidFill>
+                  <a:srgbClr val="243A5E"/>
+                </a:solidFill>
+                <a:latin typeface="Segoe UI"/>
+              </a:rPr>
+              <a:t>Foundry Memory</a:t>
+            </a:r>
+          </a:p>
+          <a:p>
+            <a:pPr algn="ctr"/>
+            <a:r>
+              <a:rPr sz="1000" b="0" i="0">
+                <a:solidFill>
+                  <a:srgbClr val="605E5C"/>
+                </a:solidFill>
+                <a:latin typeface="Segoe UI"/>
+              </a:rPr>
+              <a:t>(managed, done)</a:t>
+            </a:r>
+          </a:p>
+        </p:txBody>
+      </p:sp>
+      <p:sp>
+        <p:nvSpPr>
+          <p:cNvPr id="11" name="Right Arrow 10"/>
+          <p:cNvSpPr/>
+          <p:nvPr/>
+        </p:nvSpPr>
+        <p:spPr>
+          <a:xfrm>
+            <a:off x="8154162" y="2162556"/>
+            <a:ext cx="374904" cy="109728"/>
+          </a:xfrm>
+          <a:prstGeom prst="rightArrow">
+            <a:avLst/>
+          </a:prstGeom>
+          <a:solidFill>
+            <a:srgbClr val="00B7C3"/>
+          </a:solidFill>
+          <a:ln>
+            <a:noFill/>
+          </a:ln>
+          <a:effectLst/>
+        </p:spPr>
+        <p:style>
+          <a:lnRef idx="1">
+            <a:schemeClr val="accent1"/>
+          </a:lnRef>
+          <a:fillRef idx="3">
+            <a:schemeClr val="accent1"/>
+          </a:fillRef>
+          <a:effectRef idx="2">
+            <a:schemeClr val="accent1"/>
+          </a:effectRef>
+          <a:fontRef idx="minor">
+            <a:schemeClr val="lt1"/>
+          </a:fontRef>
+        </p:style>
+        <p:txBody>
+          <a:bodyPr rtlCol="0" anchor="ctr"/>
+          <a:lstStyle/>
+          <a:p>
+            <a:pPr algn="ctr"/>
+          </a:p>
+        </p:txBody>
+      </p:sp>
+      <p:sp>
+        <p:nvSpPr>
+          <p:cNvPr id="12" name="Rounded Rectangle 11"/>
+          <p:cNvSpPr/>
+          <p:nvPr/>
+        </p:nvSpPr>
+        <p:spPr>
+          <a:xfrm>
+            <a:off x="8492490" y="1783080"/>
+            <a:ext cx="2343150" cy="868680"/>
+          </a:xfrm>
+          <a:prstGeom prst="roundRect">
+            <a:avLst/>
+          </a:prstGeom>
+          <a:solidFill>
+            <a:srgbClr val="FFFFFF"/>
+          </a:solidFill>
+          <a:ln w="19050">
+            <a:solidFill>
+              <a:srgbClr val="0078D4"/>
+            </a:solidFill>
+          </a:ln>
+          <a:effectLst/>
+        </p:spPr>
+        <p:style>
+          <a:lnRef idx="1">
+            <a:schemeClr val="accent1"/>
+          </a:lnRef>
+          <a:fillRef idx="3">
+            <a:schemeClr val="accent1"/>
+          </a:fillRef>
+          <a:effectRef idx="2">
+            <a:schemeClr val="accent1"/>
+          </a:effectRef>
+          <a:fontRef idx="minor">
+            <a:schemeClr val="lt1"/>
+          </a:fontRef>
+        </p:style>
+        <p:txBody>
+          <a:bodyPr rtlCol="0" anchor="ctr" wrap="square"/>
+          <a:lstStyle/>
+          <a:p>
+            <a:pPr algn="ctr"/>
+            <a:r>
+              <a:rPr sz="1200" b="1" i="0">
+                <a:solidFill>
+                  <a:srgbClr val="243A5E"/>
+                </a:solidFill>
+                <a:latin typeface="Segoe UI"/>
+              </a:rPr>
+              <a:t>+ AI Search</a:t>
+            </a:r>
+          </a:p>
+          <a:p>
+            <a:pPr algn="ctr"/>
+            <a:r>
+              <a:rPr sz="1000" b="0" i="0">
+                <a:solidFill>
+                  <a:srgbClr val="605E5C"/>
+                </a:solidFill>
+                <a:latin typeface="Segoe UI"/>
+              </a:rPr>
+              <a:t>(next)</a:t>
+            </a:r>
+          </a:p>
+        </p:txBody>
+      </p:sp>
+      <p:sp>
+        <p:nvSpPr>
+          <p:cNvPr id="13" name="TextBox 12"/>
+          <p:cNvSpPr txBox="1"/>
+          <p:nvPr/>
+        </p:nvSpPr>
+        <p:spPr>
+          <a:xfrm>
+            <a:off x="502920" y="2880360"/>
+            <a:ext cx="10332720" cy="457200"/>
+          </a:xfrm>
+          <a:prstGeom prst="rect">
+            <a:avLst/>
+          </a:prstGeom>
+          <a:noFill/>
+        </p:spPr>
+        <p:txBody>
+          <a:bodyPr wrap="square" anchor="t" lIns="0" rIns="0" tIns="0" bIns="0">
+            <a:spAutoFit/>
+          </a:bodyPr>
+          <a:lstStyle/>
+          <a:p>
+            <a:pPr algn="ctr"/>
+            <a:r>
+              <a:rPr sz="1300" b="0" i="1">
+                <a:solidFill>
+                  <a:srgbClr val="605E5C"/>
+                </a:solidFill>
+                <a:latin typeface="Segoe UI"/>
+              </a:rPr>
+              <a:t>BYO swaps behind one interface · managed is the platform-owned tier · knowledge is next</a:t>
+            </a:r>
+          </a:p>
+        </p:txBody>
+      </p:sp>
+      <p:sp>
+        <p:nvSpPr>
+          <p:cNvPr id="14" name="TextBox 13"/>
+          <p:cNvSpPr txBox="1"/>
+          <p:nvPr/>
+        </p:nvSpPr>
+        <p:spPr>
+          <a:xfrm>
+            <a:off x="502920" y="3474720"/>
+            <a:ext cx="10332720" cy="2286000"/>
+          </a:xfrm>
+          <a:prstGeom prst="rect">
+            <a:avLst/>
+          </a:prstGeom>
+          <a:noFill/>
+        </p:spPr>
+        <p:txBody>
+          <a:bodyPr wrap="square" anchor="t" lIns="0" rIns="0" tIns="0" bIns="0">
+            <a:spAutoFit/>
+          </a:bodyPr>
+          <a:lstStyle/>
+          <a:p>
+            <a:pPr algn="l">
+              <a:spcBef>
+                <a:spcPts val="0"/>
+              </a:spcBef>
+              <a:spcAft>
+                <a:spcPts val="500"/>
+              </a:spcAft>
+            </a:pPr>
+            <a:r>
+              <a:rPr sz="1800" b="0" i="0">
+                <a:solidFill>
+                  <a:srgbClr val="107C10"/>
+                </a:solidFill>
+                <a:latin typeface="Segoe UI"/>
+              </a:rPr>
+              <a:t>✓  Cosmos (done): partition by /userId · keyless Entra RBAC · serverless · infra/provision-cosmos.ps1</a:t>
+            </a:r>
+          </a:p>
+          <a:p>
+            <a:pPr algn="l">
+              <a:spcBef>
+                <a:spcPts val="0"/>
+              </a:spcBef>
+              <a:spcAft>
+                <a:spcPts val="500"/>
+              </a:spcAft>
+            </a:pPr>
+            <a:r>
+              <a:rPr sz="1800" b="0" i="0">
+                <a:solidFill>
+                  <a:srgbClr val="107C10"/>
+                </a:solidFill>
+                <a:latin typeface="Segoe UI"/>
+              </a:rPr>
+              <a:t>✓  Foundry Memory (done): managed provider, scope by user · embedding deploy + preview + MI role · provision-foundry-memory.ps1</a:t>
+            </a:r>
+          </a:p>
+          <a:p>
+            <a:pPr algn="l">
+              <a:spcBef>
+                <a:spcPts val="400"/>
+              </a:spcBef>
+              <a:spcAft>
+                <a:spcPts val="500"/>
+              </a:spcAft>
+            </a:pPr>
+            <a:r>
+              <a:rPr sz="1800" b="1" i="0">
+                <a:solidFill>
+                  <a:srgbClr val="243A5E"/>
+                </a:solidFill>
+                <a:latin typeface="Segoe UI"/>
+              </a:rPr>
+              <a:t>■  Shared AI Search (next): the knowledge-memory tier — reuse the Lab 03 index · Python parity to follow</a:t>
+            </a:r>
+          </a:p>
+        </p:txBody>
+      </p:sp>
+      <p:sp>
+        <p:nvSpPr>
+          <p:cNvPr id="15" name="Rectangle 14"/>
+          <p:cNvSpPr/>
+          <p:nvPr/>
+        </p:nvSpPr>
+        <p:spPr>
+          <a:xfrm>
+            <a:off x="0" y="6601968"/>
+            <a:ext cx="12192000" cy="256032"/>
+          </a:xfrm>
+          <a:prstGeom prst="rect">
+            <a:avLst/>
+          </a:prstGeom>
+          <a:solidFill>
+            <a:srgbClr val="F3F6FB"/>
+          </a:solidFill>
+          <a:ln>
+            <a:noFill/>
+          </a:ln>
+          <a:effectLst/>
+        </p:spPr>
+        <p:style>
+          <a:lnRef idx="1">
+            <a:schemeClr val="accent1"/>
+          </a:lnRef>
+          <a:fillRef idx="3">
+            <a:schemeClr val="accent1"/>
+          </a:fillRef>
+          <a:effectRef idx="2">
+            <a:schemeClr val="accent1"/>
+          </a:effectRef>
+          <a:fontRef idx="minor">
+            <a:schemeClr val="lt1"/>
+          </a:fontRef>
+        </p:style>
+        <p:txBody>
+          <a:bodyPr rtlCol="0" anchor="ctr"/>
+          <a:lstStyle/>
+          <a:p>
+            <a:pPr algn="ctr"/>
+          </a:p>
+        </p:txBody>
+      </p:sp>
+      <p:sp>
+        <p:nvSpPr>
+          <p:cNvPr id="16" name="TextBox 15"/>
+          <p:cNvSpPr txBox="1"/>
+          <p:nvPr/>
+        </p:nvSpPr>
+        <p:spPr>
+          <a:xfrm>
+            <a:off x="502920" y="6611112"/>
+            <a:ext cx="8229600" cy="228600"/>
+          </a:xfrm>
+          <a:prstGeom prst="rect">
+            <a:avLst/>
+          </a:prstGeom>
+          <a:noFill/>
+        </p:spPr>
+        <p:txBody>
+          <a:bodyPr wrap="square" anchor="ctr" lIns="0" rIns="0" tIns="0" bIns="0">
+            <a:spAutoFit/>
+          </a:bodyPr>
+          <a:lstStyle/>
+          <a:p>
+            <a:pPr algn="l"/>
+            <a:r>
+              <a:rPr sz="900" b="0" i="0">
+                <a:solidFill>
+                  <a:srgbClr val="605E5C"/>
+                </a:solidFill>
+                <a:latin typeface="Segoe UI"/>
+              </a:rPr>
+              <a:t>Agent Modernization Workshops — Lab 06: Agent Memory Strategies   |   Roadmap</a:t>
+            </a:r>
+          </a:p>
+        </p:txBody>
+      </p:sp>
+      <p:sp>
+        <p:nvSpPr>
+          <p:cNvPr id="17" name="TextBox 16"/>
+          <p:cNvSpPr txBox="1"/>
+          <p:nvPr/>
+        </p:nvSpPr>
+        <p:spPr>
+          <a:xfrm>
+            <a:off x="11003280" y="6611112"/>
+            <a:ext cx="731520" cy="228600"/>
+          </a:xfrm>
+          <a:prstGeom prst="rect">
+            <a:avLst/>
+          </a:prstGeom>
+          <a:noFill/>
+        </p:spPr>
+        <p:txBody>
+          <a:bodyPr wrap="square" anchor="ctr" lIns="0" rIns="0" tIns="0" bIns="0">
+            <a:spAutoFit/>
+          </a:bodyPr>
+          <a:lstStyle/>
+          <a:p>
+            <a:pPr algn="r"/>
+            <a:r>
+              <a:rPr sz="900" b="1" i="0">
+                <a:solidFill>
+                  <a:srgbClr val="605E5C"/>
+                </a:solidFill>
+                <a:latin typeface="Segoe UI"/>
+              </a:rPr>
+              <a:t>18</a:t>
+            </a:r>
+          </a:p>
+        </p:txBody>
+      </p:sp>
+    </p:spTree>
+  </p:cSld>
+  <p:clrMapOvr>
+    <a:masterClrMapping/>
+  </p:clrMapOvr>
+</p:sld>
+</file>
+
+<file path=ppt/slides/slide19.xml><?xml version="1.0" encoding="utf-8"?>
+<p:sld xmlns:a="http://schemas.openxmlformats.org/drawingml/2006/main" xmlns:p="http://schemas.openxmlformats.org/presentationml/2006/main" xmlns:r="http://schemas.openxmlformats.org/officeDocument/2006/relationships">
+  <p:cSld>
+    <p:spTree>
+      <p:nvGrpSpPr>
+        <p:cNvPr id="1" name=""/>
+        <p:cNvGrpSpPr/>
+        <p:nvPr/>
+      </p:nvGrpSpPr>
+      <p:grpSpPr/>
+      <p:sp>
+        <p:nvSpPr>
+          <p:cNvPr id="2" name="Rectangle 1"/>
+          <p:cNvSpPr/>
+          <p:nvPr/>
+        </p:nvSpPr>
+        <p:spPr>
+          <a:xfrm>
+            <a:off x="0" y="0"/>
+            <a:ext cx="12192000" cy="1051560"/>
+          </a:xfrm>
+          <a:prstGeom prst="rect">
+            <a:avLst/>
+          </a:prstGeom>
+          <a:solidFill>
+            <a:srgbClr val="243A5E"/>
+          </a:solidFill>
+          <a:ln>
+            <a:noFill/>
+          </a:ln>
+          <a:effectLst/>
+        </p:spPr>
+        <p:style>
+          <a:lnRef idx="1">
+            <a:schemeClr val="accent1"/>
+          </a:lnRef>
+          <a:fillRef idx="3">
+            <a:schemeClr val="accent1"/>
+          </a:fillRef>
+          <a:effectRef idx="2">
+            <a:schemeClr val="accent1"/>
+          </a:effectRef>
+          <a:fontRef idx="minor">
+            <a:schemeClr val="lt1"/>
+          </a:fontRef>
+        </p:style>
+        <p:txBody>
+          <a:bodyPr rtlCol="0" anchor="ctr"/>
+          <a:lstStyle/>
+          <a:p>
+            <a:pPr algn="ctr"/>
+          </a:p>
+        </p:txBody>
+      </p:sp>
+      <p:sp>
+        <p:nvSpPr>
+          <p:cNvPr id="3" name="Rectangle 2"/>
+          <p:cNvSpPr/>
+          <p:nvPr/>
+        </p:nvSpPr>
+        <p:spPr>
+          <a:xfrm>
+            <a:off x="0" y="1051560"/>
+            <a:ext cx="12192000" cy="54864"/>
+          </a:xfrm>
+          <a:prstGeom prst="rect">
+            <a:avLst/>
+          </a:prstGeom>
+          <a:solidFill>
+            <a:srgbClr val="00B7C3"/>
+          </a:solidFill>
+          <a:ln>
+            <a:noFill/>
+          </a:ln>
+          <a:effectLst/>
+        </p:spPr>
+        <p:style>
+          <a:lnRef idx="1">
+            <a:schemeClr val="accent1"/>
+          </a:lnRef>
+          <a:fillRef idx="3">
+            <a:schemeClr val="accent1"/>
+          </a:fillRef>
+          <a:effectRef idx="2">
+            <a:schemeClr val="accent1"/>
+          </a:effectRef>
+          <a:fontRef idx="minor">
+            <a:schemeClr val="lt1"/>
+          </a:fontRef>
+        </p:style>
+        <p:txBody>
+          <a:bodyPr rtlCol="0" anchor="ctr"/>
+          <a:lstStyle/>
+          <a:p>
+            <a:pPr algn="ctr"/>
+          </a:p>
+        </p:txBody>
+      </p:sp>
+      <p:sp>
+        <p:nvSpPr>
+          <p:cNvPr id="4" name="TextBox 3"/>
+          <p:cNvSpPr txBox="1"/>
+          <p:nvPr/>
+        </p:nvSpPr>
+        <p:spPr>
+          <a:xfrm>
+            <a:off x="502920" y="164592"/>
+            <a:ext cx="10058400" cy="274320"/>
+          </a:xfrm>
+          <a:prstGeom prst="rect">
+            <a:avLst/>
+          </a:prstGeom>
+          <a:noFill/>
+        </p:spPr>
+        <p:txBody>
+          <a:bodyPr wrap="square" anchor="t" lIns="0" rIns="0" tIns="0" bIns="0">
+            <a:spAutoFit/>
+          </a:bodyPr>
+          <a:lstStyle/>
+          <a:p>
+            <a:pPr algn="l"/>
+            <a:r>
+              <a:rPr sz="1200" b="1" i="0">
+                <a:solidFill>
+                  <a:srgbClr val="00B7C3"/>
+                </a:solidFill>
+                <a:latin typeface="Segoe UI"/>
+              </a:rPr>
+              <a:t>GUIDANCE</a:t>
+            </a:r>
+          </a:p>
+        </p:txBody>
+      </p:sp>
+      <p:sp>
+        <p:nvSpPr>
+          <p:cNvPr id="5" name="TextBox 4"/>
+          <p:cNvSpPr txBox="1"/>
+          <p:nvPr/>
+        </p:nvSpPr>
+        <p:spPr>
+          <a:xfrm>
+            <a:off x="502920" y="420624"/>
+            <a:ext cx="10972800" cy="566928"/>
+          </a:xfrm>
+          <a:prstGeom prst="rect">
+            <a:avLst/>
+          </a:prstGeom>
+          <a:noFill/>
+        </p:spPr>
+        <p:txBody>
+          <a:bodyPr wrap="square" anchor="ctr" lIns="0" rIns="0" tIns="0" bIns="0">
+            <a:spAutoFit/>
+          </a:bodyPr>
+          <a:lstStyle/>
+          <a:p>
+            <a:pPr algn="l"/>
+            <a:r>
+              <a:rPr sz="2600" b="1" i="0">
+                <a:solidFill>
+                  <a:srgbClr val="FFFFFF"/>
+                </a:solidFill>
+                <a:latin typeface="Segoe UI"/>
+              </a:rPr>
+              <a:t>Design guidance for agent memory</a:t>
+            </a:r>
+          </a:p>
+        </p:txBody>
+      </p:sp>
+      <p:sp>
+        <p:nvSpPr>
+          <p:cNvPr id="6" name="TextBox 5"/>
+          <p:cNvSpPr txBox="1"/>
+          <p:nvPr/>
+        </p:nvSpPr>
+        <p:spPr>
+          <a:xfrm>
+            <a:off x="502920" y="1325880"/>
+            <a:ext cx="5212080" cy="4572000"/>
+          </a:xfrm>
+          <a:prstGeom prst="rect">
+            <a:avLst/>
+          </a:prstGeom>
+          <a:noFill/>
+        </p:spPr>
+        <p:txBody>
+          <a:bodyPr wrap="square" anchor="t" lIns="0" rIns="0" tIns="0" bIns="0">
+            <a:spAutoFit/>
+          </a:bodyPr>
+          <a:lstStyle/>
+          <a:p>
+            <a:pPr algn="l">
+              <a:spcBef>
+                <a:spcPts val="400"/>
+              </a:spcBef>
+              <a:spcAft>
+                <a:spcPts val="500"/>
+              </a:spcAft>
+            </a:pPr>
+            <a:r>
+              <a:rPr sz="1800" b="1" i="0">
+                <a:solidFill>
+                  <a:srgbClr val="243A5E"/>
+                </a:solidFill>
+                <a:latin typeface="Segoe UI"/>
+              </a:rPr>
+              <a:t>■  Treat memory as a host concern, not an agent feature</a:t>
+            </a:r>
+          </a:p>
+          <a:p>
+            <a:pPr algn="l">
+              <a:spcBef>
+                <a:spcPts val="0"/>
+              </a:spcBef>
+              <a:spcAft>
+                <a:spcPts val="300"/>
+              </a:spcAft>
+            </a:pPr>
+            <a:r>
+              <a:rPr sz="1500" b="0" i="0">
+                <a:solidFill>
+                  <a:srgbClr val="201F1E"/>
+                </a:solidFill>
+                <a:latin typeface="Segoe UI"/>
+              </a:rPr>
+              <a:t>–  Same seam as skills — inject on read, compact on write</a:t>
+            </a:r>
+          </a:p>
+          <a:p>
+            <a:pPr algn="l">
+              <a:spcBef>
+                <a:spcPts val="400"/>
+              </a:spcBef>
+              <a:spcAft>
+                <a:spcPts val="500"/>
+              </a:spcAft>
+            </a:pPr>
+            <a:r>
+              <a:rPr sz="1800" b="1" i="0">
+                <a:solidFill>
+                  <a:srgbClr val="243A5E"/>
+                </a:solidFill>
+                <a:latin typeface="Segoe UI"/>
+              </a:rPr>
+              <a:t>■  Use tiers — don't force one store to do all four</a:t>
+            </a:r>
+          </a:p>
+          <a:p>
+            <a:pPr algn="l">
+              <a:spcBef>
+                <a:spcPts val="0"/>
+              </a:spcBef>
+              <a:spcAft>
+                <a:spcPts val="300"/>
+              </a:spcAft>
+            </a:pPr>
+            <a:r>
+              <a:rPr sz="1500" b="0" i="0">
+                <a:solidFill>
+                  <a:srgbClr val="201F1E"/>
+                </a:solidFill>
+                <a:latin typeface="Segoe UI"/>
+              </a:rPr>
+              <a:t>–  Conversation ≠ user memory ≠ state ≠ knowledge</a:t>
+            </a:r>
+          </a:p>
+          <a:p>
+            <a:pPr algn="l">
+              <a:spcBef>
+                <a:spcPts val="400"/>
+              </a:spcBef>
+              <a:spcAft>
+                <a:spcPts val="500"/>
+              </a:spcAft>
+            </a:pPr>
+            <a:r>
+              <a:rPr sz="1800" b="1" i="0">
+                <a:solidFill>
+                  <a:srgbClr val="243A5E"/>
+                </a:solidFill>
+                <a:latin typeface="Segoe UI"/>
+              </a:rPr>
+              <a:t>■  Compact to { summary, facts, decisions, pending } — not a chat log</a:t>
+            </a:r>
+          </a:p>
+        </p:txBody>
+      </p:sp>
+      <p:sp>
+        <p:nvSpPr>
+          <p:cNvPr id="7" name="TextBox 6"/>
+          <p:cNvSpPr txBox="1"/>
+          <p:nvPr/>
+        </p:nvSpPr>
+        <p:spPr>
+          <a:xfrm>
+            <a:off x="5989320" y="1325880"/>
+            <a:ext cx="5212080" cy="4572000"/>
+          </a:xfrm>
+          <a:prstGeom prst="rect">
+            <a:avLst/>
+          </a:prstGeom>
+          <a:noFill/>
+        </p:spPr>
+        <p:txBody>
+          <a:bodyPr wrap="square" anchor="t" lIns="0" rIns="0" tIns="0" bIns="0">
+            <a:spAutoFit/>
+          </a:bodyPr>
+          <a:lstStyle/>
+          <a:p>
+            <a:pPr algn="l">
+              <a:spcBef>
+                <a:spcPts val="400"/>
+              </a:spcBef>
+              <a:spcAft>
+                <a:spcPts val="500"/>
+              </a:spcAft>
+            </a:pPr>
+            <a:r>
+              <a:rPr sz="1800" b="1" i="0">
+                <a:solidFill>
+                  <a:srgbClr val="243A5E"/>
+                </a:solidFill>
+                <a:latin typeface="Segoe UI"/>
+              </a:rPr>
+              <a:t>■  Scope by user — separate from thread</a:t>
+            </a:r>
+          </a:p>
+          <a:p>
+            <a:pPr algn="l">
+              <a:spcBef>
+                <a:spcPts val="0"/>
+              </a:spcBef>
+              <a:spcAft>
+                <a:spcPts val="300"/>
+              </a:spcAft>
+            </a:pPr>
+            <a:r>
+              <a:rPr sz="1500" b="0" i="0">
+                <a:solidFill>
+                  <a:srgbClr val="201F1E"/>
+                </a:solidFill>
+                <a:latin typeface="Segoe UI"/>
+              </a:rPr>
+              <a:t>–  customerId persists; threadId is per-run</a:t>
+            </a:r>
+          </a:p>
+          <a:p>
+            <a:pPr algn="l">
+              <a:spcBef>
+                <a:spcPts val="400"/>
+              </a:spcBef>
+              <a:spcAft>
+                <a:spcPts val="500"/>
+              </a:spcAft>
+            </a:pPr>
+            <a:r>
+              <a:rPr sz="1800" b="1" i="0">
+                <a:solidFill>
+                  <a:srgbClr val="243A5E"/>
+                </a:solidFill>
+                <a:latin typeface="Segoe UI"/>
+              </a:rPr>
+              <a:t>■  Store decisions + facts, not raw PII</a:t>
+            </a:r>
+          </a:p>
+          <a:p>
+            <a:pPr algn="l">
+              <a:spcBef>
+                <a:spcPts val="0"/>
+              </a:spcBef>
+              <a:spcAft>
+                <a:spcPts val="300"/>
+              </a:spcAft>
+            </a:pPr>
+            <a:r>
+              <a:rPr sz="1500" b="0" i="0">
+                <a:solidFill>
+                  <a:srgbClr val="201F1E"/>
+                </a:solidFill>
+                <a:latin typeface="Segoe UI"/>
+              </a:rPr>
+              <a:t>–  Minimize what's durable — least data that gives continuity</a:t>
+            </a:r>
+          </a:p>
+          <a:p>
+            <a:pPr algn="l">
+              <a:spcBef>
+                <a:spcPts val="400"/>
+              </a:spcBef>
+              <a:spcAft>
+                <a:spcPts val="500"/>
+              </a:spcAft>
+            </a:pPr>
+            <a:r>
+              <a:rPr sz="1800" b="1" i="0">
+                <a:solidFill>
+                  <a:srgbClr val="243A5E"/>
+                </a:solidFill>
+                <a:latin typeface="Segoe UI"/>
+              </a:rPr>
+              <a:t>■  Default OFF — memory is an explicit choice</a:t>
+            </a:r>
+          </a:p>
+          <a:p>
+            <a:pPr algn="l">
+              <a:spcBef>
+                <a:spcPts val="0"/>
+              </a:spcBef>
+              <a:spcAft>
+                <a:spcPts val="300"/>
+              </a:spcAft>
+            </a:pPr>
+            <a:r>
+              <a:rPr sz="1500" b="0" i="0">
+                <a:solidFill>
+                  <a:srgbClr val="201F1E"/>
+                </a:solidFill>
+                <a:latin typeface="Segoe UI"/>
+              </a:rPr>
+              <a:t>–  Keeps stateless demos deterministic + auditable</a:t>
+            </a:r>
+          </a:p>
+          <a:p>
+            <a:pPr algn="l">
+              <a:spcBef>
+                <a:spcPts val="0"/>
+              </a:spcBef>
+              <a:spcAft>
+                <a:spcPts val="500"/>
+              </a:spcAft>
+            </a:pPr>
+            <a:r>
+              <a:rPr sz="1800" b="0" i="0">
+                <a:solidFill>
+                  <a:srgbClr val="107C10"/>
+                </a:solidFill>
+                <a:latin typeface="Segoe UI"/>
+              </a:rPr>
+              <a:t>✓  BYO-first → managed when you want platform retrieval</a:t>
+            </a:r>
+          </a:p>
+        </p:txBody>
+      </p:sp>
+      <p:sp>
+        <p:nvSpPr>
+          <p:cNvPr id="8" name="Rectangle 7"/>
+          <p:cNvSpPr/>
+          <p:nvPr/>
+        </p:nvSpPr>
+        <p:spPr>
+          <a:xfrm>
+            <a:off x="0" y="6601968"/>
+            <a:ext cx="12192000" cy="256032"/>
+          </a:xfrm>
+          <a:prstGeom prst="rect">
+            <a:avLst/>
+          </a:prstGeom>
+          <a:solidFill>
+            <a:srgbClr val="F3F6FB"/>
+          </a:solidFill>
+          <a:ln>
+            <a:noFill/>
+          </a:ln>
+          <a:effectLst/>
+        </p:spPr>
+        <p:style>
+          <a:lnRef idx="1">
+            <a:schemeClr val="accent1"/>
+          </a:lnRef>
+          <a:fillRef idx="3">
+            <a:schemeClr val="accent1"/>
+          </a:fillRef>
+          <a:effectRef idx="2">
+            <a:schemeClr val="accent1"/>
+          </a:effectRef>
+          <a:fontRef idx="minor">
+            <a:schemeClr val="lt1"/>
+          </a:fontRef>
+        </p:style>
+        <p:txBody>
+          <a:bodyPr rtlCol="0" anchor="ctr"/>
+          <a:lstStyle/>
+          <a:p>
+            <a:pPr algn="ctr"/>
+          </a:p>
+        </p:txBody>
+      </p:sp>
+      <p:sp>
+        <p:nvSpPr>
+          <p:cNvPr id="9" name="TextBox 8"/>
+          <p:cNvSpPr txBox="1"/>
+          <p:nvPr/>
+        </p:nvSpPr>
+        <p:spPr>
+          <a:xfrm>
+            <a:off x="502920" y="6611112"/>
+            <a:ext cx="8229600" cy="228600"/>
+          </a:xfrm>
+          <a:prstGeom prst="rect">
+            <a:avLst/>
+          </a:prstGeom>
+          <a:noFill/>
+        </p:spPr>
+        <p:txBody>
+          <a:bodyPr wrap="square" anchor="ctr" lIns="0" rIns="0" tIns="0" bIns="0">
+            <a:spAutoFit/>
+          </a:bodyPr>
+          <a:lstStyle/>
+          <a:p>
+            <a:pPr algn="l"/>
+            <a:r>
+              <a:rPr sz="900" b="0" i="0">
+                <a:solidFill>
+                  <a:srgbClr val="605E5C"/>
+                </a:solidFill>
+                <a:latin typeface="Segoe UI"/>
+              </a:rPr>
+              <a:t>Agent Modernization Workshops — Lab 06: Agent Memory Strategies   |   Guidance</a:t>
+            </a:r>
+          </a:p>
+        </p:txBody>
+      </p:sp>
+      <p:sp>
+        <p:nvSpPr>
+          <p:cNvPr id="10" name="TextBox 9"/>
+          <p:cNvSpPr txBox="1"/>
+          <p:nvPr/>
+        </p:nvSpPr>
+        <p:spPr>
+          <a:xfrm>
+            <a:off x="11003280" y="6611112"/>
+            <a:ext cx="731520" cy="228600"/>
+          </a:xfrm>
+          <a:prstGeom prst="rect">
+            <a:avLst/>
+          </a:prstGeom>
+          <a:noFill/>
+        </p:spPr>
+        <p:txBody>
+          <a:bodyPr wrap="square" anchor="ctr" lIns="0" rIns="0" tIns="0" bIns="0">
+            <a:spAutoFit/>
+          </a:bodyPr>
+          <a:lstStyle/>
+          <a:p>
+            <a:pPr algn="r"/>
+            <a:r>
+              <a:rPr sz="900" b="1" i="0">
+                <a:solidFill>
+                  <a:srgbClr val="605E5C"/>
+                </a:solidFill>
+                <a:latin typeface="Segoe UI"/>
+              </a:rPr>
+              <a:t>19</a:t>
             </a:r>
           </a:p>
         </p:txBody>
@@ -9528,6 +11303,589 @@
                 <a:latin typeface="Segoe UI"/>
               </a:rPr>
               <a:t>2</a:t>
+            </a:r>
+          </a:p>
+        </p:txBody>
+      </p:sp>
+    </p:spTree>
+  </p:cSld>
+  <p:clrMapOvr>
+    <a:masterClrMapping/>
+  </p:clrMapOvr>
+</p:sld>
+</file>
+
+<file path=ppt/slides/slide20.xml><?xml version="1.0" encoding="utf-8"?>
+<p:sld xmlns:a="http://schemas.openxmlformats.org/drawingml/2006/main" xmlns:p="http://schemas.openxmlformats.org/presentationml/2006/main" xmlns:r="http://schemas.openxmlformats.org/officeDocument/2006/relationships">
+  <p:cSld>
+    <p:spTree>
+      <p:nvGrpSpPr>
+        <p:cNvPr id="1" name=""/>
+        <p:cNvGrpSpPr/>
+        <p:nvPr/>
+      </p:nvGrpSpPr>
+      <p:grpSpPr/>
+      <p:sp>
+        <p:nvSpPr>
+          <p:cNvPr id="2" name="Rectangle 1"/>
+          <p:cNvSpPr/>
+          <p:nvPr/>
+        </p:nvSpPr>
+        <p:spPr>
+          <a:xfrm>
+            <a:off x="0" y="0"/>
+            <a:ext cx="12192000" cy="1051560"/>
+          </a:xfrm>
+          <a:prstGeom prst="rect">
+            <a:avLst/>
+          </a:prstGeom>
+          <a:solidFill>
+            <a:srgbClr val="243A5E"/>
+          </a:solidFill>
+          <a:ln>
+            <a:noFill/>
+          </a:ln>
+          <a:effectLst/>
+        </p:spPr>
+        <p:style>
+          <a:lnRef idx="1">
+            <a:schemeClr val="accent1"/>
+          </a:lnRef>
+          <a:fillRef idx="3">
+            <a:schemeClr val="accent1"/>
+          </a:fillRef>
+          <a:effectRef idx="2">
+            <a:schemeClr val="accent1"/>
+          </a:effectRef>
+          <a:fontRef idx="minor">
+            <a:schemeClr val="lt1"/>
+          </a:fontRef>
+        </p:style>
+        <p:txBody>
+          <a:bodyPr rtlCol="0" anchor="ctr"/>
+          <a:lstStyle/>
+          <a:p>
+            <a:pPr algn="ctr"/>
+          </a:p>
+        </p:txBody>
+      </p:sp>
+      <p:sp>
+        <p:nvSpPr>
+          <p:cNvPr id="3" name="Rectangle 2"/>
+          <p:cNvSpPr/>
+          <p:nvPr/>
+        </p:nvSpPr>
+        <p:spPr>
+          <a:xfrm>
+            <a:off x="0" y="1051560"/>
+            <a:ext cx="12192000" cy="54864"/>
+          </a:xfrm>
+          <a:prstGeom prst="rect">
+            <a:avLst/>
+          </a:prstGeom>
+          <a:solidFill>
+            <a:srgbClr val="00B7C3"/>
+          </a:solidFill>
+          <a:ln>
+            <a:noFill/>
+          </a:ln>
+          <a:effectLst/>
+        </p:spPr>
+        <p:style>
+          <a:lnRef idx="1">
+            <a:schemeClr val="accent1"/>
+          </a:lnRef>
+          <a:fillRef idx="3">
+            <a:schemeClr val="accent1"/>
+          </a:fillRef>
+          <a:effectRef idx="2">
+            <a:schemeClr val="accent1"/>
+          </a:effectRef>
+          <a:fontRef idx="minor">
+            <a:schemeClr val="lt1"/>
+          </a:fontRef>
+        </p:style>
+        <p:txBody>
+          <a:bodyPr rtlCol="0" anchor="ctr"/>
+          <a:lstStyle/>
+          <a:p>
+            <a:pPr algn="ctr"/>
+          </a:p>
+        </p:txBody>
+      </p:sp>
+      <p:sp>
+        <p:nvSpPr>
+          <p:cNvPr id="4" name="TextBox 3"/>
+          <p:cNvSpPr txBox="1"/>
+          <p:nvPr/>
+        </p:nvSpPr>
+        <p:spPr>
+          <a:xfrm>
+            <a:off x="502920" y="164592"/>
+            <a:ext cx="10058400" cy="274320"/>
+          </a:xfrm>
+          <a:prstGeom prst="rect">
+            <a:avLst/>
+          </a:prstGeom>
+          <a:noFill/>
+        </p:spPr>
+        <p:txBody>
+          <a:bodyPr wrap="square" anchor="t" lIns="0" rIns="0" tIns="0" bIns="0">
+            <a:spAutoFit/>
+          </a:bodyPr>
+          <a:lstStyle/>
+          <a:p>
+            <a:pPr algn="l"/>
+            <a:r>
+              <a:rPr sz="1200" b="1" i="0">
+                <a:solidFill>
+                  <a:srgbClr val="00B7C3"/>
+                </a:solidFill>
+                <a:latin typeface="Segoe UI"/>
+              </a:rPr>
+              <a:t>WRAP</a:t>
+            </a:r>
+          </a:p>
+        </p:txBody>
+      </p:sp>
+      <p:sp>
+        <p:nvSpPr>
+          <p:cNvPr id="5" name="TextBox 4"/>
+          <p:cNvSpPr txBox="1"/>
+          <p:nvPr/>
+        </p:nvSpPr>
+        <p:spPr>
+          <a:xfrm>
+            <a:off x="502920" y="420624"/>
+            <a:ext cx="10972800" cy="566928"/>
+          </a:xfrm>
+          <a:prstGeom prst="rect">
+            <a:avLst/>
+          </a:prstGeom>
+          <a:noFill/>
+        </p:spPr>
+        <p:txBody>
+          <a:bodyPr wrap="square" anchor="ctr" lIns="0" rIns="0" tIns="0" bIns="0">
+            <a:spAutoFit/>
+          </a:bodyPr>
+          <a:lstStyle/>
+          <a:p>
+            <a:pPr algn="l"/>
+            <a:r>
+              <a:rPr sz="2600" b="1" i="0">
+                <a:solidFill>
+                  <a:srgbClr val="FFFFFF"/>
+                </a:solidFill>
+                <a:latin typeface="Segoe UI"/>
+              </a:rPr>
+              <a:t>Take-aways &amp; where to next</a:t>
+            </a:r>
+          </a:p>
+        </p:txBody>
+      </p:sp>
+      <p:sp>
+        <p:nvSpPr>
+          <p:cNvPr id="6" name="TextBox 5"/>
+          <p:cNvSpPr txBox="1"/>
+          <p:nvPr/>
+        </p:nvSpPr>
+        <p:spPr>
+          <a:xfrm>
+            <a:off x="502920" y="1325880"/>
+            <a:ext cx="5212080" cy="4572000"/>
+          </a:xfrm>
+          <a:prstGeom prst="rect">
+            <a:avLst/>
+          </a:prstGeom>
+          <a:noFill/>
+        </p:spPr>
+        <p:txBody>
+          <a:bodyPr wrap="square" anchor="t" lIns="0" rIns="0" tIns="0" bIns="0">
+            <a:spAutoFit/>
+          </a:bodyPr>
+          <a:lstStyle/>
+          <a:p>
+            <a:pPr algn="l">
+              <a:spcBef>
+                <a:spcPts val="400"/>
+              </a:spcBef>
+              <a:spcAft>
+                <a:spcPts val="500"/>
+              </a:spcAft>
+            </a:pPr>
+            <a:r>
+              <a:rPr sz="1800" b="1" i="0">
+                <a:solidFill>
+                  <a:srgbClr val="243A5E"/>
+                </a:solidFill>
+                <a:latin typeface="Segoe UI"/>
+              </a:rPr>
+              <a:t>■  What we added this session:</a:t>
+            </a:r>
+          </a:p>
+          <a:p>
+            <a:pPr algn="l">
+              <a:spcBef>
+                <a:spcPts val="0"/>
+              </a:spcBef>
+              <a:spcAft>
+                <a:spcPts val="300"/>
+              </a:spcAft>
+            </a:pPr>
+            <a:r>
+              <a:rPr sz="1500" b="0" i="0">
+                <a:solidFill>
+                  <a:srgbClr val="107C10"/>
+                </a:solidFill>
+                <a:latin typeface="Segoe UI"/>
+              </a:rPr>
+              <a:t>✓  Cross-session memory on the SAME seams — recall→inject, record→compact→save</a:t>
+            </a:r>
+          </a:p>
+          <a:p>
+            <a:pPr algn="l">
+              <a:spcBef>
+                <a:spcPts val="0"/>
+              </a:spcBef>
+              <a:spcAft>
+                <a:spcPts val="300"/>
+              </a:spcAft>
+            </a:pPr>
+            <a:r>
+              <a:rPr sz="1500" b="0" i="0">
+                <a:solidFill>
+                  <a:srgbClr val="107C10"/>
+                </a:solidFill>
+                <a:latin typeface="Segoe UI"/>
+              </a:rPr>
+              <a:t>✓  All three tiers verified live — local + cosmos (BYO) and foundry (platform-managed)</a:t>
+            </a:r>
+          </a:p>
+          <a:p>
+            <a:pPr algn="l">
+              <a:spcBef>
+                <a:spcPts val="0"/>
+              </a:spcBef>
+              <a:spcAft>
+                <a:spcPts val="300"/>
+              </a:spcAft>
+            </a:pPr>
+            <a:r>
+              <a:rPr sz="1500" b="0" i="0">
+                <a:solidFill>
+                  <a:srgbClr val="107C10"/>
+                </a:solidFill>
+                <a:latin typeface="Segoe UI"/>
+              </a:rPr>
+              <a:t>✓  Deterministic compaction — keep facts / decisions / pending, not transcripts</a:t>
+            </a:r>
+          </a:p>
+          <a:p>
+            <a:pPr algn="l">
+              <a:spcBef>
+                <a:spcPts val="0"/>
+              </a:spcBef>
+              <a:spcAft>
+                <a:spcPts val="300"/>
+              </a:spcAft>
+            </a:pPr>
+            <a:r>
+              <a:rPr sz="1500" b="0" i="0">
+                <a:solidFill>
+                  <a:srgbClr val="107C10"/>
+                </a:solidFill>
+                <a:latin typeface="Segoe UI"/>
+              </a:rPr>
+              <a:t>✓  New memory tiers + IaC (Cosmos + Foundry role grant) — no agent or workflow rewrites</a:t>
+            </a:r>
+          </a:p>
+        </p:txBody>
+      </p:sp>
+      <p:sp>
+        <p:nvSpPr>
+          <p:cNvPr id="7" name="TextBox 6"/>
+          <p:cNvSpPr txBox="1"/>
+          <p:nvPr/>
+        </p:nvSpPr>
+        <p:spPr>
+          <a:xfrm>
+            <a:off x="5989320" y="1325880"/>
+            <a:ext cx="5212080" cy="4572000"/>
+          </a:xfrm>
+          <a:prstGeom prst="rect">
+            <a:avLst/>
+          </a:prstGeom>
+          <a:noFill/>
+        </p:spPr>
+        <p:txBody>
+          <a:bodyPr wrap="square" anchor="t" lIns="0" rIns="0" tIns="0" bIns="0">
+            <a:spAutoFit/>
+          </a:bodyPr>
+          <a:lstStyle/>
+          <a:p>
+            <a:pPr algn="l">
+              <a:spcBef>
+                <a:spcPts val="400"/>
+              </a:spcBef>
+              <a:spcAft>
+                <a:spcPts val="500"/>
+              </a:spcAft>
+            </a:pPr>
+            <a:r>
+              <a:rPr sz="1800" b="1" i="0">
+                <a:solidFill>
+                  <a:srgbClr val="243A5E"/>
+                </a:solidFill>
+                <a:latin typeface="Segoe UI"/>
+              </a:rPr>
+              <a:t>■  Where to next</a:t>
+            </a:r>
+          </a:p>
+          <a:p>
+            <a:pPr algn="l">
+              <a:spcBef>
+                <a:spcPts val="0"/>
+              </a:spcBef>
+              <a:spcAft>
+                <a:spcPts val="300"/>
+              </a:spcAft>
+            </a:pPr>
+            <a:r>
+              <a:rPr sz="1500" b="0" i="0">
+                <a:solidFill>
+                  <a:srgbClr val="201F1E"/>
+                </a:solidFill>
+                <a:latin typeface="Segoe UI"/>
+              </a:rPr>
+              <a:t>–  Cosmos BYO store + IaC — done (keyless, serverless, /userId)</a:t>
+            </a:r>
+          </a:p>
+          <a:p>
+            <a:pPr algn="l">
+              <a:spcBef>
+                <a:spcPts val="0"/>
+              </a:spcBef>
+              <a:spcAft>
+                <a:spcPts val="300"/>
+              </a:spcAft>
+            </a:pPr>
+            <a:r>
+              <a:rPr sz="1500" b="0" i="0">
+                <a:solidFill>
+                  <a:srgbClr val="201F1E"/>
+                </a:solidFill>
+                <a:latin typeface="Segoe UI"/>
+              </a:rPr>
+              <a:t>–  Foundry-managed Memory — done (embedding + preview + MI role)</a:t>
+            </a:r>
+          </a:p>
+          <a:p>
+            <a:pPr algn="l">
+              <a:spcBef>
+                <a:spcPts val="0"/>
+              </a:spcBef>
+              <a:spcAft>
+                <a:spcPts val="300"/>
+              </a:spcAft>
+            </a:pPr>
+            <a:r>
+              <a:rPr sz="1500" b="0" i="0">
+                <a:solidFill>
+                  <a:srgbClr val="201F1E"/>
+                </a:solidFill>
+                <a:latin typeface="Segoe UI"/>
+              </a:rPr>
+              <a:t>–  Shared AI Search knowledge tier + Python parity</a:t>
+            </a:r>
+          </a:p>
+          <a:p>
+            <a:pPr algn="l">
+              <a:spcBef>
+                <a:spcPts val="400"/>
+              </a:spcBef>
+              <a:spcAft>
+                <a:spcPts val="500"/>
+              </a:spcAft>
+            </a:pPr>
+            <a:r>
+              <a:rPr sz="1800" b="1" i="0">
+                <a:solidFill>
+                  <a:srgbClr val="243A5E"/>
+                </a:solidFill>
+                <a:latin typeface="Segoe UI"/>
+              </a:rPr>
+              <a:t>■  Take-away</a:t>
+            </a:r>
+          </a:p>
+          <a:p>
+            <a:pPr algn="l">
+              <a:spcBef>
+                <a:spcPts val="0"/>
+              </a:spcBef>
+              <a:spcAft>
+                <a:spcPts val="300"/>
+              </a:spcAft>
+            </a:pPr>
+            <a:r>
+              <a:rPr sz="1500" b="0" i="0">
+                <a:solidFill>
+                  <a:srgbClr val="201F1E"/>
+                </a:solidFill>
+                <a:latin typeface="Segoe UI"/>
+              </a:rPr>
+              <a:t>–  Memory is a host concern — add it on seams, not rewrites</a:t>
+            </a:r>
+          </a:p>
+          <a:p>
+            <a:pPr algn="l">
+              <a:spcBef>
+                <a:spcPts val="400"/>
+              </a:spcBef>
+              <a:spcAft>
+                <a:spcPts val="500"/>
+              </a:spcAft>
+            </a:pPr>
+            <a:r>
+              <a:rPr sz="1800" b="1" i="0">
+                <a:solidFill>
+                  <a:srgbClr val="243A5E"/>
+                </a:solidFill>
+                <a:latin typeface="Segoe UI"/>
+              </a:rPr>
+              <a:t>■  github.com/bradrlaw/agent-modernization-workshops</a:t>
+            </a:r>
+          </a:p>
+          <a:p>
+            <a:pPr algn="l">
+              <a:spcBef>
+                <a:spcPts val="0"/>
+              </a:spcBef>
+              <a:spcAft>
+                <a:spcPts val="300"/>
+              </a:spcAft>
+            </a:pPr>
+            <a:r>
+              <a:rPr sz="1500" b="0" i="0">
+                <a:solidFill>
+                  <a:srgbClr val="201F1E"/>
+                </a:solidFill>
+                <a:latin typeface="Segoe UI"/>
+              </a:rPr>
+              <a:t>–  Brad.Lawrence@microsoft.com</a:t>
+            </a:r>
+          </a:p>
+        </p:txBody>
+      </p:sp>
+      <p:sp>
+        <p:nvSpPr>
+          <p:cNvPr id="8" name="Rectangle 7"/>
+          <p:cNvSpPr/>
+          <p:nvPr/>
+        </p:nvSpPr>
+        <p:spPr>
+          <a:xfrm>
+            <a:off x="0" y="6601968"/>
+            <a:ext cx="12192000" cy="256032"/>
+          </a:xfrm>
+          <a:prstGeom prst="rect">
+            <a:avLst/>
+          </a:prstGeom>
+          <a:solidFill>
+            <a:srgbClr val="F3F6FB"/>
+          </a:solidFill>
+          <a:ln>
+            <a:noFill/>
+          </a:ln>
+          <a:effectLst/>
+        </p:spPr>
+        <p:style>
+          <a:lnRef idx="1">
+            <a:schemeClr val="accent1"/>
+          </a:lnRef>
+          <a:fillRef idx="3">
+            <a:schemeClr val="accent1"/>
+          </a:fillRef>
+          <a:effectRef idx="2">
+            <a:schemeClr val="accent1"/>
+          </a:effectRef>
+          <a:fontRef idx="minor">
+            <a:schemeClr val="lt1"/>
+          </a:fontRef>
+        </p:style>
+        <p:txBody>
+          <a:bodyPr rtlCol="0" anchor="ctr"/>
+          <a:lstStyle/>
+          <a:p>
+            <a:pPr algn="ctr"/>
+          </a:p>
+        </p:txBody>
+      </p:sp>
+      <p:sp>
+        <p:nvSpPr>
+          <p:cNvPr id="9" name="TextBox 8"/>
+          <p:cNvSpPr txBox="1"/>
+          <p:nvPr/>
+        </p:nvSpPr>
+        <p:spPr>
+          <a:xfrm>
+            <a:off x="502920" y="6611112"/>
+            <a:ext cx="8229600" cy="228600"/>
+          </a:xfrm>
+          <a:prstGeom prst="rect">
+            <a:avLst/>
+          </a:prstGeom>
+          <a:noFill/>
+        </p:spPr>
+        <p:txBody>
+          <a:bodyPr wrap="square" anchor="ctr" lIns="0" rIns="0" tIns="0" bIns="0">
+            <a:spAutoFit/>
+          </a:bodyPr>
+          <a:lstStyle/>
+          <a:p>
+            <a:pPr algn="l"/>
+            <a:r>
+              <a:rPr sz="900" b="0" i="0">
+                <a:solidFill>
+                  <a:srgbClr val="605E5C"/>
+                </a:solidFill>
+                <a:latin typeface="Segoe UI"/>
+              </a:rPr>
+              <a:t>Agent Modernization Workshops — Lab 06: Agent Memory Strategies   |   Wrap</a:t>
+            </a:r>
+          </a:p>
+        </p:txBody>
+      </p:sp>
+      <p:sp>
+        <p:nvSpPr>
+          <p:cNvPr id="10" name="TextBox 9"/>
+          <p:cNvSpPr txBox="1"/>
+          <p:nvPr/>
+        </p:nvSpPr>
+        <p:spPr>
+          <a:xfrm>
+            <a:off x="11003280" y="6611112"/>
+            <a:ext cx="731520" cy="228600"/>
+          </a:xfrm>
+          <a:prstGeom prst="rect">
+            <a:avLst/>
+          </a:prstGeom>
+          <a:noFill/>
+        </p:spPr>
+        <p:txBody>
+          <a:bodyPr wrap="square" anchor="ctr" lIns="0" rIns="0" tIns="0" bIns="0">
+            <a:spAutoFit/>
+          </a:bodyPr>
+          <a:lstStyle/>
+          <a:p>
+            <a:pPr algn="r"/>
+            <a:r>
+              <a:rPr sz="900" b="1" i="0">
+                <a:solidFill>
+                  <a:srgbClr val="605E5C"/>
+                </a:solidFill>
+                <a:latin typeface="Segoe UI"/>
+              </a:rPr>
+              <a:t>20</a:t>
             </a:r>
           </a:p>
         </p:txBody>

--- a/labs/lab06-multi-agent/presentation/Lab06-Agent-Memory-Strategies.pptx
+++ b/labs/lab06-multi-agent/presentation/Lab06-Agent-Memory-Strategies.pptx
@@ -6171,8 +6171,8 @@
         </p:nvSpPr>
         <p:spPr>
           <a:xfrm>
-            <a:off x="502920" y="1371600"/>
-            <a:ext cx="10332720" cy="4160520"/>
+            <a:off x="502920" y="1298448"/>
+            <a:ext cx="10332720" cy="4709160"/>
           </a:xfrm>
           <a:prstGeom prst="roundRect">
             <a:avLst/>
@@ -6215,7 +6215,7 @@
         </p:nvSpPr>
         <p:spPr>
           <a:xfrm>
-            <a:off x="758952" y="1463040"/>
+            <a:off x="758952" y="1389888"/>
             <a:ext cx="9875520" cy="274320"/>
           </a:xfrm>
           <a:prstGeom prst="rect">
@@ -6250,8 +6250,8 @@
         </p:nvSpPr>
         <p:spPr>
           <a:xfrm>
-            <a:off x="758952" y="1828800"/>
-            <a:ext cx="9875520" cy="3566160"/>
+            <a:off x="758952" y="1737360"/>
+            <a:ext cx="9875520" cy="4142232"/>
           </a:xfrm>
           <a:prstGeom prst="rect">
             <a:avLst/>
@@ -6265,12 +6265,15 @@
           <a:lstStyle/>
           <a:p>
             <a:pPr algn="l">
-              <a:spcAft>
-                <a:spcPts val="200"/>
-              </a:spcAft>
-            </a:pPr>
-            <a:r>
-              <a:rPr sz="1300" b="0" i="0">
+              <a:lnSpc>
+                <a:spcPts val="1450"/>
+              </a:lnSpc>
+              <a:spcAft>
+                <a:spcPts val="0"/>
+              </a:spcAft>
+            </a:pPr>
+            <a:r>
+              <a:rPr sz="1200" b="0" i="0">
                 <a:solidFill>
                   <a:srgbClr val="6A9955"/>
                 </a:solidFill>
@@ -6281,12 +6284,15 @@
           </a:p>
           <a:p>
             <a:pPr algn="l">
-              <a:spcAft>
-                <a:spcPts val="200"/>
-              </a:spcAft>
-            </a:pPr>
-            <a:r>
-              <a:rPr sz="1300" b="0" i="0">
+              <a:lnSpc>
+                <a:spcPts val="1450"/>
+              </a:lnSpc>
+              <a:spcAft>
+                <a:spcPts val="0"/>
+              </a:spcAft>
+            </a:pPr>
+            <a:r>
+              <a:rPr sz="1200" b="0" i="0">
                 <a:solidFill>
                   <a:srgbClr val="DCDCDC"/>
                 </a:solidFill>
@@ -6297,12 +6303,15 @@
           </a:p>
           <a:p>
             <a:pPr algn="l">
-              <a:spcAft>
-                <a:spcPts val="200"/>
-              </a:spcAft>
-            </a:pPr>
-            <a:r>
-              <a:rPr sz="1300" b="0" i="0">
+              <a:lnSpc>
+                <a:spcPts val="1450"/>
+              </a:lnSpc>
+              <a:spcAft>
+                <a:spcPts val="0"/>
+              </a:spcAft>
+            </a:pPr>
+            <a:r>
+              <a:rPr sz="1200" b="0" i="0">
                 <a:solidFill>
                   <a:srgbClr val="DCDCDC"/>
                 </a:solidFill>
@@ -6313,12 +6322,15 @@
           </a:p>
           <a:p>
             <a:pPr algn="l">
-              <a:spcAft>
-                <a:spcPts val="200"/>
-              </a:spcAft>
-            </a:pPr>
-            <a:r>
-              <a:rPr sz="1300" b="0" i="0">
+              <a:lnSpc>
+                <a:spcPts val="1450"/>
+              </a:lnSpc>
+              <a:spcAft>
+                <a:spcPts val="0"/>
+              </a:spcAft>
+            </a:pPr>
+            <a:r>
+              <a:rPr sz="1200" b="0" i="0">
                 <a:solidFill>
                   <a:srgbClr val="DCDCDC"/>
                 </a:solidFill>
@@ -6329,12 +6341,15 @@
           </a:p>
           <a:p>
             <a:pPr algn="l">
-              <a:spcAft>
-                <a:spcPts val="200"/>
-              </a:spcAft>
-            </a:pPr>
-            <a:r>
-              <a:rPr sz="1300" b="0" i="0">
+              <a:lnSpc>
+                <a:spcPts val="1450"/>
+              </a:lnSpc>
+              <a:spcAft>
+                <a:spcPts val="0"/>
+              </a:spcAft>
+            </a:pPr>
+            <a:r>
+              <a:rPr sz="1200" b="0" i="0">
                 <a:solidFill>
                   <a:srgbClr val="DCDCDC"/>
                 </a:solidFill>
@@ -6345,12 +6360,15 @@
           </a:p>
           <a:p>
             <a:pPr algn="l">
-              <a:spcAft>
-                <a:spcPts val="200"/>
-              </a:spcAft>
-            </a:pPr>
-            <a:r>
-              <a:rPr sz="1300" b="1" i="0">
+              <a:lnSpc>
+                <a:spcPts val="1450"/>
+              </a:lnSpc>
+              <a:spcAft>
+                <a:spcPts val="0"/>
+              </a:spcAft>
+            </a:pPr>
+            <a:r>
+              <a:rPr sz="1200" b="1" i="0">
                 <a:solidFill>
                   <a:srgbClr val="9CDCFE"/>
                 </a:solidFill>
@@ -6361,12 +6379,15 @@
           </a:p>
           <a:p>
             <a:pPr algn="l">
-              <a:spcAft>
-                <a:spcPts val="200"/>
-              </a:spcAft>
-            </a:pPr>
-            <a:r>
-              <a:rPr sz="1300" b="0" i="0">
+              <a:lnSpc>
+                <a:spcPts val="1450"/>
+              </a:lnSpc>
+              <a:spcAft>
+                <a:spcPts val="0"/>
+              </a:spcAft>
+            </a:pPr>
+            <a:r>
+              <a:rPr sz="1200" b="0" i="0">
                 <a:solidFill>
                   <a:srgbClr val="DCDCDC"/>
                 </a:solidFill>
@@ -6377,8 +6398,11 @@
           </a:p>
           <a:p>
             <a:pPr algn="l">
-              <a:spcAft>
-                <a:spcPts val="200"/>
+              <a:lnSpc>
+                <a:spcPts val="1450"/>
+              </a:lnSpc>
+              <a:spcAft>
+                <a:spcPts val="0"/>
               </a:spcAft>
             </a:pPr>
             <a:r>
@@ -6393,12 +6417,15 @@
           </a:p>
           <a:p>
             <a:pPr algn="l">
-              <a:spcAft>
-                <a:spcPts val="200"/>
-              </a:spcAft>
-            </a:pPr>
-            <a:r>
-              <a:rPr sz="1300" b="0" i="0">
+              <a:lnSpc>
+                <a:spcPts val="1450"/>
+              </a:lnSpc>
+              <a:spcAft>
+                <a:spcPts val="0"/>
+              </a:spcAft>
+            </a:pPr>
+            <a:r>
+              <a:rPr sz="1200" b="0" i="0">
                 <a:solidFill>
                   <a:srgbClr val="6A9955"/>
                 </a:solidFill>
@@ -6409,12 +6436,15 @@
           </a:p>
           <a:p>
             <a:pPr algn="l">
-              <a:spcAft>
-                <a:spcPts val="200"/>
-              </a:spcAft>
-            </a:pPr>
-            <a:r>
-              <a:rPr sz="1300" b="0" i="0">
+              <a:lnSpc>
+                <a:spcPts val="1450"/>
+              </a:lnSpc>
+              <a:spcAft>
+                <a:spcPts val="0"/>
+              </a:spcAft>
+            </a:pPr>
+            <a:r>
+              <a:rPr sz="1200" b="0" i="0">
                 <a:solidFill>
                   <a:srgbClr val="DCDCDC"/>
                 </a:solidFill>
@@ -6425,12 +6455,15 @@
           </a:p>
           <a:p>
             <a:pPr algn="l">
-              <a:spcAft>
-                <a:spcPts val="200"/>
-              </a:spcAft>
-            </a:pPr>
-            <a:r>
-              <a:rPr sz="1300" b="0" i="0">
+              <a:lnSpc>
+                <a:spcPts val="1450"/>
+              </a:lnSpc>
+              <a:spcAft>
+                <a:spcPts val="0"/>
+              </a:spcAft>
+            </a:pPr>
+            <a:r>
+              <a:rPr sz="1200" b="0" i="0">
                 <a:solidFill>
                   <a:srgbClr val="DCDCDC"/>
                 </a:solidFill>
@@ -6441,12 +6474,15 @@
           </a:p>
           <a:p>
             <a:pPr algn="l">
-              <a:spcAft>
-                <a:spcPts val="200"/>
-              </a:spcAft>
-            </a:pPr>
-            <a:r>
-              <a:rPr sz="1300" b="0" i="0">
+              <a:lnSpc>
+                <a:spcPts val="1450"/>
+              </a:lnSpc>
+              <a:spcAft>
+                <a:spcPts val="0"/>
+              </a:spcAft>
+            </a:pPr>
+            <a:r>
+              <a:rPr sz="1200" b="0" i="0">
                 <a:solidFill>
                   <a:srgbClr val="DCDCDC"/>
                 </a:solidFill>
@@ -6457,12 +6493,15 @@
           </a:p>
           <a:p>
             <a:pPr algn="l">
-              <a:spcAft>
-                <a:spcPts val="200"/>
-              </a:spcAft>
-            </a:pPr>
-            <a:r>
-              <a:rPr sz="1300" b="0" i="0">
+              <a:lnSpc>
+                <a:spcPts val="1450"/>
+              </a:lnSpc>
+              <a:spcAft>
+                <a:spcPts val="0"/>
+              </a:spcAft>
+            </a:pPr>
+            <a:r>
+              <a:rPr sz="1200" b="0" i="0">
                 <a:solidFill>
                   <a:srgbClr val="DCDCDC"/>
                 </a:solidFill>
@@ -6473,12 +6512,15 @@
           </a:p>
           <a:p>
             <a:pPr algn="l">
-              <a:spcAft>
-                <a:spcPts val="200"/>
-              </a:spcAft>
-            </a:pPr>
-            <a:r>
-              <a:rPr sz="1300" b="0" i="0">
+              <a:lnSpc>
+                <a:spcPts val="1450"/>
+              </a:lnSpc>
+              <a:spcAft>
+                <a:spcPts val="0"/>
+              </a:spcAft>
+            </a:pPr>
+            <a:r>
+              <a:rPr sz="1200" b="0" i="0">
                 <a:solidFill>
                   <a:srgbClr val="DCDCDC"/>
                 </a:solidFill>
@@ -6489,12 +6531,15 @@
           </a:p>
           <a:p>
             <a:pPr algn="l">
-              <a:spcAft>
-                <a:spcPts val="200"/>
-              </a:spcAft>
-            </a:pPr>
-            <a:r>
-              <a:rPr sz="1300" b="1" i="0">
+              <a:lnSpc>
+                <a:spcPts val="1450"/>
+              </a:lnSpc>
+              <a:spcAft>
+                <a:spcPts val="0"/>
+              </a:spcAft>
+            </a:pPr>
+            <a:r>
+              <a:rPr sz="1200" b="1" i="0">
                 <a:solidFill>
                   <a:srgbClr val="9CDCFE"/>
                 </a:solidFill>
@@ -6505,12 +6550,15 @@
           </a:p>
           <a:p>
             <a:pPr algn="l">
-              <a:spcAft>
-                <a:spcPts val="200"/>
-              </a:spcAft>
-            </a:pPr>
-            <a:r>
-              <a:rPr sz="1300" b="0" i="0">
+              <a:lnSpc>
+                <a:spcPts val="1450"/>
+              </a:lnSpc>
+              <a:spcAft>
+                <a:spcPts val="0"/>
+              </a:spcAft>
+            </a:pPr>
+            <a:r>
+              <a:rPr sz="1200" b="0" i="0">
                 <a:solidFill>
                   <a:srgbClr val="DCDCDC"/>
                 </a:solidFill>
@@ -6521,12 +6569,15 @@
           </a:p>
           <a:p>
             <a:pPr algn="l">
-              <a:spcAft>
-                <a:spcPts val="200"/>
-              </a:spcAft>
-            </a:pPr>
-            <a:r>
-              <a:rPr sz="1300" b="0" i="0">
+              <a:lnSpc>
+                <a:spcPts val="1450"/>
+              </a:lnSpc>
+              <a:spcAft>
+                <a:spcPts val="0"/>
+              </a:spcAft>
+            </a:pPr>
+            <a:r>
+              <a:rPr sz="1200" b="0" i="0">
                 <a:solidFill>
                   <a:srgbClr val="DCDCDC"/>
                 </a:solidFill>
@@ -6537,12 +6588,15 @@
           </a:p>
           <a:p>
             <a:pPr algn="l">
-              <a:spcAft>
-                <a:spcPts val="200"/>
-              </a:spcAft>
-            </a:pPr>
-            <a:r>
-              <a:rPr sz="1300" b="1" i="0">
+              <a:lnSpc>
+                <a:spcPts val="1450"/>
+              </a:lnSpc>
+              <a:spcAft>
+                <a:spcPts val="0"/>
+              </a:spcAft>
+            </a:pPr>
+            <a:r>
+              <a:rPr sz="1200" b="1" i="0">
                 <a:solidFill>
                   <a:srgbClr val="9CDCFE"/>
                 </a:solidFill>
@@ -6553,12 +6607,15 @@
           </a:p>
           <a:p>
             <a:pPr algn="l">
-              <a:spcAft>
-                <a:spcPts val="200"/>
-              </a:spcAft>
-            </a:pPr>
-            <a:r>
-              <a:rPr sz="1300" b="0" i="0">
+              <a:lnSpc>
+                <a:spcPts val="1450"/>
+              </a:lnSpc>
+              <a:spcAft>
+                <a:spcPts val="0"/>
+              </a:spcAft>
+            </a:pPr>
+            <a:r>
+              <a:rPr sz="1200" b="0" i="0">
                 <a:solidFill>
                   <a:srgbClr val="DCDCDC"/>
                 </a:solidFill>
@@ -6577,7 +6634,7 @@
         </p:nvSpPr>
         <p:spPr>
           <a:xfrm>
-            <a:off x="502920" y="5650992"/>
+            <a:off x="502920" y="6089904"/>
             <a:ext cx="10332720" cy="274320"/>
           </a:xfrm>
           <a:prstGeom prst="rect">
@@ -6902,8 +6959,8 @@
         </p:nvSpPr>
         <p:spPr>
           <a:xfrm>
-            <a:off x="502920" y="1371600"/>
-            <a:ext cx="10332720" cy="4160520"/>
+            <a:off x="502920" y="1298448"/>
+            <a:ext cx="10332720" cy="4709160"/>
           </a:xfrm>
           <a:prstGeom prst="roundRect">
             <a:avLst/>
@@ -6946,7 +7003,7 @@
         </p:nvSpPr>
         <p:spPr>
           <a:xfrm>
-            <a:off x="758952" y="1463040"/>
+            <a:off x="758952" y="1389888"/>
             <a:ext cx="9875520" cy="274320"/>
           </a:xfrm>
           <a:prstGeom prst="rect">
@@ -6981,8 +7038,8 @@
         </p:nvSpPr>
         <p:spPr>
           <a:xfrm>
-            <a:off x="758952" y="1828800"/>
-            <a:ext cx="9875520" cy="3566160"/>
+            <a:off x="758952" y="1737360"/>
+            <a:ext cx="9875520" cy="4142232"/>
           </a:xfrm>
           <a:prstGeom prst="rect">
             <a:avLst/>
@@ -6996,12 +7053,15 @@
           <a:lstStyle/>
           <a:p>
             <a:pPr algn="l">
-              <a:spcAft>
-                <a:spcPts val="200"/>
-              </a:spcAft>
-            </a:pPr>
-            <a:r>
-              <a:rPr sz="1300" b="0" i="0">
+              <a:lnSpc>
+                <a:spcPts val="1450"/>
+              </a:lnSpc>
+              <a:spcAft>
+                <a:spcPts val="0"/>
+              </a:spcAft>
+            </a:pPr>
+            <a:r>
+              <a:rPr sz="1200" b="0" i="0">
                 <a:solidFill>
                   <a:srgbClr val="6A9955"/>
                 </a:solidFill>
@@ -7012,12 +7072,15 @@
           </a:p>
           <a:p>
             <a:pPr algn="l">
-              <a:spcAft>
-                <a:spcPts val="200"/>
-              </a:spcAft>
-            </a:pPr>
-            <a:r>
-              <a:rPr sz="1300" b="0" i="0">
+              <a:lnSpc>
+                <a:spcPts val="1450"/>
+              </a:lnSpc>
+              <a:spcAft>
+                <a:spcPts val="0"/>
+              </a:spcAft>
+            </a:pPr>
+            <a:r>
+              <a:rPr sz="1200" b="0" i="0">
                 <a:solidFill>
                   <a:srgbClr val="DCDCDC"/>
                 </a:solidFill>
@@ -7028,12 +7091,15 @@
           </a:p>
           <a:p>
             <a:pPr algn="l">
-              <a:spcAft>
-                <a:spcPts val="200"/>
-              </a:spcAft>
-            </a:pPr>
-            <a:r>
-              <a:rPr sz="1300" b="0" i="0">
+              <a:lnSpc>
+                <a:spcPts val="1450"/>
+              </a:lnSpc>
+              <a:spcAft>
+                <a:spcPts val="0"/>
+              </a:spcAft>
+            </a:pPr>
+            <a:r>
+              <a:rPr sz="1200" b="0" i="0">
                 <a:solidFill>
                   <a:srgbClr val="DCDCDC"/>
                 </a:solidFill>
@@ -7044,12 +7110,15 @@
           </a:p>
           <a:p>
             <a:pPr algn="l">
-              <a:spcAft>
-                <a:spcPts val="200"/>
-              </a:spcAft>
-            </a:pPr>
-            <a:r>
-              <a:rPr sz="1300" b="0" i="0">
+              <a:lnSpc>
+                <a:spcPts val="1450"/>
+              </a:lnSpc>
+              <a:spcAft>
+                <a:spcPts val="0"/>
+              </a:spcAft>
+            </a:pPr>
+            <a:r>
+              <a:rPr sz="1200" b="0" i="0">
                 <a:solidFill>
                   <a:srgbClr val="DCDCDC"/>
                 </a:solidFill>
@@ -7060,12 +7129,15 @@
           </a:p>
           <a:p>
             <a:pPr algn="l">
-              <a:spcAft>
-                <a:spcPts val="200"/>
-              </a:spcAft>
-            </a:pPr>
-            <a:r>
-              <a:rPr sz="1300" b="0" i="0">
+              <a:lnSpc>
+                <a:spcPts val="1450"/>
+              </a:lnSpc>
+              <a:spcAft>
+                <a:spcPts val="0"/>
+              </a:spcAft>
+            </a:pPr>
+            <a:r>
+              <a:rPr sz="1200" b="0" i="0">
                 <a:solidFill>
                   <a:srgbClr val="DCDCDC"/>
                 </a:solidFill>
@@ -7076,12 +7148,15 @@
           </a:p>
           <a:p>
             <a:pPr algn="l">
-              <a:spcAft>
-                <a:spcPts val="200"/>
-              </a:spcAft>
-            </a:pPr>
-            <a:r>
-              <a:rPr sz="1300" b="0" i="0">
+              <a:lnSpc>
+                <a:spcPts val="1450"/>
+              </a:lnSpc>
+              <a:spcAft>
+                <a:spcPts val="0"/>
+              </a:spcAft>
+            </a:pPr>
+            <a:r>
+              <a:rPr sz="1200" b="0" i="0">
                 <a:solidFill>
                   <a:srgbClr val="DCDCDC"/>
                 </a:solidFill>
@@ -7092,12 +7167,15 @@
           </a:p>
           <a:p>
             <a:pPr algn="l">
-              <a:spcAft>
-                <a:spcPts val="200"/>
-              </a:spcAft>
-            </a:pPr>
-            <a:r>
-              <a:rPr sz="1300" b="1" i="0">
+              <a:lnSpc>
+                <a:spcPts val="1450"/>
+              </a:lnSpc>
+              <a:spcAft>
+                <a:spcPts val="0"/>
+              </a:spcAft>
+            </a:pPr>
+            <a:r>
+              <a:rPr sz="1200" b="1" i="0">
                 <a:solidFill>
                   <a:srgbClr val="9CDCFE"/>
                 </a:solidFill>
@@ -7108,12 +7186,15 @@
           </a:p>
           <a:p>
             <a:pPr algn="l">
-              <a:spcAft>
-                <a:spcPts val="200"/>
-              </a:spcAft>
-            </a:pPr>
-            <a:r>
-              <a:rPr sz="1300" b="0" i="0">
+              <a:lnSpc>
+                <a:spcPts val="1450"/>
+              </a:lnSpc>
+              <a:spcAft>
+                <a:spcPts val="0"/>
+              </a:spcAft>
+            </a:pPr>
+            <a:r>
+              <a:rPr sz="1200" b="0" i="0">
                 <a:solidFill>
                   <a:srgbClr val="DCDCDC"/>
                 </a:solidFill>
@@ -7124,8 +7205,11 @@
           </a:p>
           <a:p>
             <a:pPr algn="l">
-              <a:spcAft>
-                <a:spcPts val="200"/>
+              <a:lnSpc>
+                <a:spcPts val="1450"/>
+              </a:lnSpc>
+              <a:spcAft>
+                <a:spcPts val="0"/>
               </a:spcAft>
             </a:pPr>
             <a:r>
@@ -7140,12 +7224,15 @@
           </a:p>
           <a:p>
             <a:pPr algn="l">
-              <a:spcAft>
-                <a:spcPts val="200"/>
-              </a:spcAft>
-            </a:pPr>
-            <a:r>
-              <a:rPr sz="1300" b="0" i="0">
+              <a:lnSpc>
+                <a:spcPts val="1450"/>
+              </a:lnSpc>
+              <a:spcAft>
+                <a:spcPts val="0"/>
+              </a:spcAft>
+            </a:pPr>
+            <a:r>
+              <a:rPr sz="1200" b="0" i="0">
                 <a:solidFill>
                   <a:srgbClr val="6A9955"/>
                 </a:solidFill>
@@ -7156,28 +7243,34 @@
           </a:p>
           <a:p>
             <a:pPr algn="l">
-              <a:spcAft>
-                <a:spcPts val="200"/>
-              </a:spcAft>
-            </a:pPr>
-            <a:r>
-              <a:rPr sz="1300" b="0" i="0">
+              <a:lnSpc>
+                <a:spcPts val="1450"/>
+              </a:lnSpc>
+              <a:spcAft>
+                <a:spcPts val="0"/>
+              </a:spcAft>
+            </a:pPr>
+            <a:r>
+              <a:rPr sz="1200" b="0" i="0">
                 <a:solidFill>
                   <a:srgbClr val="DCDCDC"/>
                 </a:solidFill>
                 <a:latin typeface="Consolas"/>
               </a:rPr>
-              <a:t>var recall = memory is null ? null</a:t>
-            </a:r>
-          </a:p>
-          <a:p>
-            <a:pPr algn="l">
-              <a:spcAft>
-                <a:spcPts val="200"/>
-              </a:spcAft>
-            </a:pPr>
-            <a:r>
-              <a:rPr sz="1300" b="0" i="0">
+              <a:t>Recall? recall = memory is null ? null</a:t>
+            </a:r>
+          </a:p>
+          <a:p>
+            <a:pPr algn="l">
+              <a:lnSpc>
+                <a:spcPts val="1450"/>
+              </a:lnSpc>
+              <a:spcAft>
+                <a:spcPts val="0"/>
+              </a:spcAft>
+            </a:pPr>
+            <a:r>
+              <a:rPr sz="1200" b="0" i="0">
                 <a:solidFill>
                   <a:srgbClr val="DCDCDC"/>
                 </a:solidFill>
@@ -7188,12 +7281,15 @@
           </a:p>
           <a:p>
             <a:pPr algn="l">
-              <a:spcAft>
-                <a:spcPts val="200"/>
-              </a:spcAft>
-            </a:pPr>
-            <a:r>
-              <a:rPr sz="1300" b="0" i="0">
+              <a:lnSpc>
+                <a:spcPts val="1450"/>
+              </a:lnSpc>
+              <a:spcAft>
+                <a:spcPts val="0"/>
+              </a:spcAft>
+            </a:pPr>
+            <a:r>
+              <a:rPr sz="1200" b="0" i="0">
                 <a:solidFill>
                   <a:srgbClr val="DCDCDC"/>
                 </a:solidFill>
@@ -7204,12 +7300,15 @@
           </a:p>
           <a:p>
             <a:pPr algn="l">
-              <a:spcAft>
-                <a:spcPts val="200"/>
-              </a:spcAft>
-            </a:pPr>
-            <a:r>
-              <a:rPr sz="1300" b="1" i="0">
+              <a:lnSpc>
+                <a:spcPts val="1450"/>
+              </a:lnSpc>
+              <a:spcAft>
+                <a:spcPts val="0"/>
+              </a:spcAft>
+            </a:pPr>
+            <a:r>
+              <a:rPr sz="1200" b="1" i="0">
                 <a:solidFill>
                   <a:srgbClr val="9CDCFE"/>
                 </a:solidFill>
@@ -7220,8 +7319,11 @@
           </a:p>
           <a:p>
             <a:pPr algn="l">
-              <a:spcAft>
-                <a:spcPts val="200"/>
+              <a:lnSpc>
+                <a:spcPts val="1450"/>
+              </a:lnSpc>
+              <a:spcAft>
+                <a:spcPts val="0"/>
               </a:spcAft>
             </a:pPr>
             <a:r>
@@ -7236,12 +7338,15 @@
           </a:p>
           <a:p>
             <a:pPr algn="l">
-              <a:spcAft>
-                <a:spcPts val="200"/>
-              </a:spcAft>
-            </a:pPr>
-            <a:r>
-              <a:rPr sz="1300" b="0" i="0">
+              <a:lnSpc>
+                <a:spcPts val="1450"/>
+              </a:lnSpc>
+              <a:spcAft>
+                <a:spcPts val="0"/>
+              </a:spcAft>
+            </a:pPr>
+            <a:r>
+              <a:rPr sz="1200" b="0" i="0">
                 <a:solidFill>
                   <a:srgbClr val="6A9955"/>
                 </a:solidFill>
@@ -7252,12 +7357,15 @@
           </a:p>
           <a:p>
             <a:pPr algn="l">
-              <a:spcAft>
-                <a:spcPts val="200"/>
-              </a:spcAft>
-            </a:pPr>
-            <a:r>
-              <a:rPr sz="1300" b="1" i="0">
+              <a:lnSpc>
+                <a:spcPts val="1450"/>
+              </a:lnSpc>
+              <a:spcAft>
+                <a:spcPts val="0"/>
+              </a:spcAft>
+            </a:pPr>
+            <a:r>
+              <a:rPr sz="1200" b="1" i="0">
                 <a:solidFill>
                   <a:srgbClr val="9CDCFE"/>
                 </a:solidFill>
@@ -7276,7 +7384,7 @@
         </p:nvSpPr>
         <p:spPr>
           <a:xfrm>
-            <a:off x="502920" y="5650992"/>
+            <a:off x="502920" y="6089904"/>
             <a:ext cx="10332720" cy="274320"/>
           </a:xfrm>
           <a:prstGeom prst="rect">
@@ -7601,8 +7709,8 @@
         </p:nvSpPr>
         <p:spPr>
           <a:xfrm>
-            <a:off x="502920" y="1371600"/>
-            <a:ext cx="10332720" cy="4160520"/>
+            <a:off x="502920" y="1298448"/>
+            <a:ext cx="10332720" cy="4709160"/>
           </a:xfrm>
           <a:prstGeom prst="roundRect">
             <a:avLst/>
@@ -7645,7 +7753,7 @@
         </p:nvSpPr>
         <p:spPr>
           <a:xfrm>
-            <a:off x="758952" y="1463040"/>
+            <a:off x="758952" y="1389888"/>
             <a:ext cx="9875520" cy="274320"/>
           </a:xfrm>
           <a:prstGeom prst="rect">
@@ -7680,8 +7788,8 @@
         </p:nvSpPr>
         <p:spPr>
           <a:xfrm>
-            <a:off x="758952" y="1828800"/>
-            <a:ext cx="9875520" cy="3566160"/>
+            <a:off x="758952" y="1737360"/>
+            <a:ext cx="9875520" cy="4142232"/>
           </a:xfrm>
           <a:prstGeom prst="rect">
             <a:avLst/>
@@ -7695,12 +7803,15 @@
           <a:lstStyle/>
           <a:p>
             <a:pPr algn="l">
-              <a:spcAft>
-                <a:spcPts val="200"/>
-              </a:spcAft>
-            </a:pPr>
-            <a:r>
-              <a:rPr sz="1300" b="0" i="0">
+              <a:lnSpc>
+                <a:spcPts val="1450"/>
+              </a:lnSpc>
+              <a:spcAft>
+                <a:spcPts val="0"/>
+              </a:spcAft>
+            </a:pPr>
+            <a:r>
+              <a:rPr sz="1200" b="0" i="0">
                 <a:solidFill>
                   <a:srgbClr val="6A9955"/>
                 </a:solidFill>
@@ -7711,12 +7822,15 @@
           </a:p>
           <a:p>
             <a:pPr algn="l">
-              <a:spcAft>
-                <a:spcPts val="200"/>
-              </a:spcAft>
-            </a:pPr>
-            <a:r>
-              <a:rPr sz="1300" b="0" i="0">
+              <a:lnSpc>
+                <a:spcPts val="1450"/>
+              </a:lnSpc>
+              <a:spcAft>
+                <a:spcPts val="0"/>
+              </a:spcAft>
+            </a:pPr>
+            <a:r>
+              <a:rPr sz="1200" b="0" i="0">
                 <a:solidFill>
                   <a:srgbClr val="6A9955"/>
                 </a:solidFill>
@@ -7727,12 +7841,15 @@
           </a:p>
           <a:p>
             <a:pPr algn="l">
-              <a:spcAft>
-                <a:spcPts val="200"/>
-              </a:spcAft>
-            </a:pPr>
-            <a:r>
-              <a:rPr sz="1300" b="0" i="0">
+              <a:lnSpc>
+                <a:spcPts val="1450"/>
+              </a:lnSpc>
+              <a:spcAft>
+                <a:spcPts val="0"/>
+              </a:spcAft>
+            </a:pPr>
+            <a:r>
+              <a:rPr sz="1200" b="0" i="0">
                 <a:solidFill>
                   <a:srgbClr val="DCDCDC"/>
                 </a:solidFill>
@@ -7743,12 +7860,15 @@
           </a:p>
           <a:p>
             <a:pPr algn="l">
-              <a:spcAft>
-                <a:spcPts val="200"/>
-              </a:spcAft>
-            </a:pPr>
-            <a:r>
-              <a:rPr sz="1300" b="0" i="0">
+              <a:lnSpc>
+                <a:spcPts val="1450"/>
+              </a:lnSpc>
+              <a:spcAft>
+                <a:spcPts val="0"/>
+              </a:spcAft>
+            </a:pPr>
+            <a:r>
+              <a:rPr sz="1200" b="0" i="0">
                 <a:solidFill>
                   <a:srgbClr val="DCDCDC"/>
                 </a:solidFill>
@@ -7759,12 +7879,15 @@
           </a:p>
           <a:p>
             <a:pPr algn="l">
-              <a:spcAft>
-                <a:spcPts val="200"/>
-              </a:spcAft>
-            </a:pPr>
-            <a:r>
-              <a:rPr sz="1300" b="1" i="0">
+              <a:lnSpc>
+                <a:spcPts val="1450"/>
+              </a:lnSpc>
+              <a:spcAft>
+                <a:spcPts val="0"/>
+              </a:spcAft>
+            </a:pPr>
+            <a:r>
+              <a:rPr sz="1200" b="1" i="0">
                 <a:solidFill>
                   <a:srgbClr val="9CDCFE"/>
                 </a:solidFill>
@@ -7775,8 +7898,11 @@
           </a:p>
           <a:p>
             <a:pPr algn="l">
-              <a:spcAft>
-                <a:spcPts val="200"/>
+              <a:lnSpc>
+                <a:spcPts val="1450"/>
+              </a:lnSpc>
+              <a:spcAft>
+                <a:spcPts val="0"/>
               </a:spcAft>
             </a:pPr>
             <a:r>
@@ -7791,12 +7917,15 @@
           </a:p>
           <a:p>
             <a:pPr algn="l">
-              <a:spcAft>
-                <a:spcPts val="200"/>
-              </a:spcAft>
-            </a:pPr>
-            <a:r>
-              <a:rPr sz="1300" b="0" i="0">
+              <a:lnSpc>
+                <a:spcPts val="1450"/>
+              </a:lnSpc>
+              <a:spcAft>
+                <a:spcPts val="0"/>
+              </a:spcAft>
+            </a:pPr>
+            <a:r>
+              <a:rPr sz="1200" b="0" i="0">
                 <a:solidFill>
                   <a:srgbClr val="DCDCDC"/>
                 </a:solidFill>
@@ -7807,12 +7936,15 @@
           </a:p>
           <a:p>
             <a:pPr algn="l">
-              <a:spcAft>
-                <a:spcPts val="200"/>
-              </a:spcAft>
-            </a:pPr>
-            <a:r>
-              <a:rPr sz="1300" b="0" i="0">
+              <a:lnSpc>
+                <a:spcPts val="1450"/>
+              </a:lnSpc>
+              <a:spcAft>
+                <a:spcPts val="0"/>
+              </a:spcAft>
+            </a:pPr>
+            <a:r>
+              <a:rPr sz="1200" b="0" i="0">
                 <a:solidFill>
                   <a:srgbClr val="DCDCDC"/>
                 </a:solidFill>
@@ -7823,12 +7955,15 @@
           </a:p>
           <a:p>
             <a:pPr algn="l">
-              <a:spcAft>
-                <a:spcPts val="200"/>
-              </a:spcAft>
-            </a:pPr>
-            <a:r>
-              <a:rPr sz="1300" b="0" i="0">
+              <a:lnSpc>
+                <a:spcPts val="1450"/>
+              </a:lnSpc>
+              <a:spcAft>
+                <a:spcPts val="0"/>
+              </a:spcAft>
+            </a:pPr>
+            <a:r>
+              <a:rPr sz="1200" b="0" i="0">
                 <a:solidFill>
                   <a:srgbClr val="DCDCDC"/>
                 </a:solidFill>
@@ -7839,12 +7974,15 @@
           </a:p>
           <a:p>
             <a:pPr algn="l">
-              <a:spcAft>
-                <a:spcPts val="200"/>
-              </a:spcAft>
-            </a:pPr>
-            <a:r>
-              <a:rPr sz="1300" b="0" i="0">
+              <a:lnSpc>
+                <a:spcPts val="1450"/>
+              </a:lnSpc>
+              <a:spcAft>
+                <a:spcPts val="0"/>
+              </a:spcAft>
+            </a:pPr>
+            <a:r>
+              <a:rPr sz="1200" b="0" i="0">
                 <a:solidFill>
                   <a:srgbClr val="DCDCDC"/>
                 </a:solidFill>
@@ -7855,12 +7993,15 @@
           </a:p>
           <a:p>
             <a:pPr algn="l">
-              <a:spcAft>
-                <a:spcPts val="200"/>
-              </a:spcAft>
-            </a:pPr>
-            <a:r>
-              <a:rPr sz="1300" b="1" i="0">
+              <a:lnSpc>
+                <a:spcPts val="1450"/>
+              </a:lnSpc>
+              <a:spcAft>
+                <a:spcPts val="0"/>
+              </a:spcAft>
+            </a:pPr>
+            <a:r>
+              <a:rPr sz="1200" b="1" i="0">
                 <a:solidFill>
                   <a:srgbClr val="9CDCFE"/>
                 </a:solidFill>
@@ -7871,12 +8012,15 @@
           </a:p>
           <a:p>
             <a:pPr algn="l">
-              <a:spcAft>
-                <a:spcPts val="200"/>
-              </a:spcAft>
-            </a:pPr>
-            <a:r>
-              <a:rPr sz="1300" b="0" i="0">
+              <a:lnSpc>
+                <a:spcPts val="1450"/>
+              </a:lnSpc>
+              <a:spcAft>
+                <a:spcPts val="0"/>
+              </a:spcAft>
+            </a:pPr>
+            <a:r>
+              <a:rPr sz="1200" b="0" i="0">
                 <a:solidFill>
                   <a:srgbClr val="DCDCDC"/>
                 </a:solidFill>
@@ -7887,8 +8031,11 @@
           </a:p>
           <a:p>
             <a:pPr algn="l">
-              <a:spcAft>
-                <a:spcPts val="200"/>
+              <a:lnSpc>
+                <a:spcPts val="1450"/>
+              </a:lnSpc>
+              <a:spcAft>
+                <a:spcPts val="0"/>
               </a:spcAft>
             </a:pPr>
             <a:r>
@@ -7903,12 +8050,15 @@
           </a:p>
           <a:p>
             <a:pPr algn="l">
-              <a:spcAft>
-                <a:spcPts val="200"/>
-              </a:spcAft>
-            </a:pPr>
-            <a:r>
-              <a:rPr sz="1300" b="0" i="0">
+              <a:lnSpc>
+                <a:spcPts val="1450"/>
+              </a:lnSpc>
+              <a:spcAft>
+                <a:spcPts val="0"/>
+              </a:spcAft>
+            </a:pPr>
+            <a:r>
+              <a:rPr sz="1200" b="0" i="0">
                 <a:solidFill>
                   <a:srgbClr val="DCDCDC"/>
                 </a:solidFill>
@@ -7919,12 +8069,15 @@
           </a:p>
           <a:p>
             <a:pPr algn="l">
-              <a:spcAft>
-                <a:spcPts val="200"/>
-              </a:spcAft>
-            </a:pPr>
-            <a:r>
-              <a:rPr sz="1300" b="0" i="0">
+              <a:lnSpc>
+                <a:spcPts val="1450"/>
+              </a:lnSpc>
+              <a:spcAft>
+                <a:spcPts val="0"/>
+              </a:spcAft>
+            </a:pPr>
+            <a:r>
+              <a:rPr sz="1200" b="0" i="0">
                 <a:solidFill>
                   <a:srgbClr val="DCDCDC"/>
                 </a:solidFill>
@@ -7935,12 +8088,15 @@
           </a:p>
           <a:p>
             <a:pPr algn="l">
-              <a:spcAft>
-                <a:spcPts val="200"/>
-              </a:spcAft>
-            </a:pPr>
-            <a:r>
-              <a:rPr sz="1300" b="0" i="0">
+              <a:lnSpc>
+                <a:spcPts val="1450"/>
+              </a:lnSpc>
+              <a:spcAft>
+                <a:spcPts val="0"/>
+              </a:spcAft>
+            </a:pPr>
+            <a:r>
+              <a:rPr sz="1200" b="0" i="0">
                 <a:solidFill>
                   <a:srgbClr val="DCDCDC"/>
                 </a:solidFill>
@@ -7951,12 +8107,15 @@
           </a:p>
           <a:p>
             <a:pPr algn="l">
-              <a:spcAft>
-                <a:spcPts val="200"/>
-              </a:spcAft>
-            </a:pPr>
-            <a:r>
-              <a:rPr sz="1300" b="0" i="0">
+              <a:lnSpc>
+                <a:spcPts val="1450"/>
+              </a:lnSpc>
+              <a:spcAft>
+                <a:spcPts val="0"/>
+              </a:spcAft>
+            </a:pPr>
+            <a:r>
+              <a:rPr sz="1200" b="0" i="0">
                 <a:solidFill>
                   <a:srgbClr val="DCDCDC"/>
                 </a:solidFill>
@@ -7967,12 +8126,15 @@
           </a:p>
           <a:p>
             <a:pPr algn="l">
-              <a:spcAft>
-                <a:spcPts val="200"/>
-              </a:spcAft>
-            </a:pPr>
-            <a:r>
-              <a:rPr sz="1300" b="1" i="0">
+              <a:lnSpc>
+                <a:spcPts val="1450"/>
+              </a:lnSpc>
+              <a:spcAft>
+                <a:spcPts val="0"/>
+              </a:spcAft>
+            </a:pPr>
+            <a:r>
+              <a:rPr sz="1200" b="1" i="0">
                 <a:solidFill>
                   <a:srgbClr val="9CDCFE"/>
                 </a:solidFill>
@@ -7991,7 +8153,7 @@
         </p:nvSpPr>
         <p:spPr>
           <a:xfrm>
-            <a:off x="502920" y="5650992"/>
+            <a:off x="502920" y="6089904"/>
             <a:ext cx="10332720" cy="274320"/>
           </a:xfrm>
           <a:prstGeom prst="rect">
